--- a/新北市二橋國小_數位工具教與學_2小時到校輔導教案簡報.pptx
+++ b/新北市二橋國小_數位工具教與學_2小時到校輔導教案簡報.pptx
@@ -3112,11 +3112,11 @@
             <a:avLst/>
           </a:prstGeom>
           <a:solidFill>
-            <a:srgbClr val="214D38"/>
+            <a:srgbClr val="1B4332"/>
           </a:solidFill>
           <a:ln>
             <a:solidFill>
-              <a:srgbClr val="214D38"/>
+              <a:srgbClr val="1B4332"/>
             </a:solidFill>
           </a:ln>
         </p:spPr>
@@ -3151,7 +3151,7 @@
         <p:spPr>
           <a:xfrm>
             <a:off x="731520" y="1097280"/>
-            <a:ext cx="137160" cy="4389120"/>
+            <a:ext cx="164592" cy="4572000"/>
           </a:xfrm>
           <a:prstGeom prst="rect">
             <a:avLst/>
@@ -3193,8 +3193,8 @@
         </p:nvSpPr>
         <p:spPr>
           <a:xfrm>
-            <a:off x="1097280" y="1097280"/>
-            <a:ext cx="9601200" cy="4389120"/>
+            <a:off x="1097280" y="1005840"/>
+            <a:ext cx="9326880" cy="4754880"/>
           </a:xfrm>
           <a:prstGeom prst="rect">
             <a:avLst/>
@@ -3209,9 +3209,9 @@
           <a:p>
             <a:pPr>
               <a:spcAft>
-                <a:spcPts val="1200"/>
-              </a:spcAft>
-              <a:defRPr sz="1400" b="1">
+                <a:spcPts val="1400"/>
+              </a:spcAft>
+              <a:defRPr sz="1600" b="1">
                 <a:solidFill>
                   <a:srgbClr val="52B788"/>
                 </a:solidFill>
@@ -3219,15 +3219,15 @@
               </a:defRPr>
             </a:pPr>
             <a:r>
-              <a:t>新北市學習共同體輔導團｜到校輔導專案</a:t>
-            </a:r>
-          </a:p>
-          <a:p>
-            <a:pPr>
-              <a:spcAft>
-                <a:spcPts val="1600"/>
-              </a:spcAft>
-              <a:defRPr sz="3200" b="1">
+              <a:t>新北市學習共同體輔導團｜入校輔導專案</a:t>
+            </a:r>
+          </a:p>
+          <a:p>
+            <a:pPr>
+              <a:spcAft>
+                <a:spcPts val="1800"/>
+              </a:spcAft>
+              <a:defRPr sz="3800" b="1">
                 <a:solidFill>
                   <a:srgbClr val="FFFFFF"/>
                 </a:solidFill>
@@ -3239,15 +3239,15 @@
             </a:r>
             <a:br/>
             <a:r>
-              <a:t>2小時入校輔導課程設計教案</a:t>
-            </a:r>
-          </a:p>
-          <a:p>
-            <a:pPr>
-              <a:spcAft>
-                <a:spcPts val="2800"/>
-              </a:spcAft>
-              <a:defRPr sz="1600">
+              <a:t>2 小時到校輔導課程設計教案</a:t>
+            </a:r>
+          </a:p>
+          <a:p>
+            <a:pPr>
+              <a:spcAft>
+                <a:spcPts val="3200"/>
+              </a:spcAft>
+              <a:defRPr sz="2000" b="1">
                 <a:solidFill>
                   <a:srgbClr val="D8F3DC"/>
                 </a:solidFill>
@@ -3255,12 +3255,12 @@
               </a:defRPr>
             </a:pPr>
             <a:r>
-              <a:t>🎯 依據 19 位教師真實前置問卷診斷・精準破除載具分心・AI Agent 命製伸展跳躍任務</a:t>
-            </a:r>
-          </a:p>
-          <a:p>
-            <a:pPr>
-              <a:defRPr sz="1200">
+              <a:t>🎯 依據 19 位全校教師問卷診斷・破除載具分心・AI 命製跳躍任務</a:t>
+            </a:r>
+          </a:p>
+          <a:p>
+            <a:pPr>
+              <a:defRPr sz="1400">
                 <a:solidFill>
                   <a:srgbClr val="B7E4C7"/>
                 </a:solidFill>
@@ -3268,11 +3268,11 @@
               </a:defRPr>
             </a:pPr>
             <a:r>
-              <a:t>研習對象：新北市二橋國小全體教師　｜　研習時間：120 分鐘（2小時實作工作坊）</a:t>
+              <a:t>研習對象：新北市二橋國小全體教師　｜　研習時間：120 分鐘（實作工作坊）</a:t>
             </a:r>
             <a:br/>
             <a:r>
-              <a:t>教案規劃：學習共同體輔導團　｜　數據來源：115數位工具教與學前置問卷</a:t>
+              <a:t>教案規劃：新北市學習共同體輔導團　｜　數據來源：115數位工具前置調查</a:t>
             </a:r>
           </a:p>
         </p:txBody>
@@ -3293,8 +3293,8 @@
         </p:blipFill>
         <p:spPr>
           <a:xfrm>
-            <a:off x="9875520" y="1371600"/>
-            <a:ext cx="1645920" cy="1645920"/>
+            <a:off x="9692640" y="1371600"/>
+            <a:ext cx="1737360" cy="1737360"/>
           </a:xfrm>
           <a:prstGeom prst="rect">
             <a:avLst/>
@@ -3334,11 +3334,11 @@
             <a:avLst/>
           </a:prstGeom>
           <a:solidFill>
-            <a:srgbClr val="214D38"/>
+            <a:srgbClr val="1B4332"/>
           </a:solidFill>
           <a:ln>
             <a:solidFill>
-              <a:srgbClr val="214D38"/>
+              <a:srgbClr val="1B4332"/>
             </a:solidFill>
           </a:ln>
         </p:spPr>
@@ -3372,8 +3372,8 @@
         </p:nvSpPr>
         <p:spPr>
           <a:xfrm>
-            <a:off x="731520" y="731520"/>
-            <a:ext cx="10728655" cy="1097280"/>
+            <a:off x="731520" y="548640"/>
+            <a:ext cx="10728655" cy="1188720"/>
           </a:xfrm>
           <a:prstGeom prst="rect">
             <a:avLst/>
@@ -3387,7 +3387,20 @@
           <a:lstStyle/>
           <a:p>
             <a:pPr>
-              <a:defRPr sz="2600" b="1">
+              <a:defRPr sz="1500" b="1">
+                <a:solidFill>
+                  <a:srgbClr val="52B788"/>
+                </a:solidFill>
+                <a:latin typeface="Microsoft JhengHei"/>
+              </a:defRPr>
+            </a:pPr>
+            <a:r>
+              <a:t>攜手二橋・課後落地有保障</a:t>
+            </a:r>
+          </a:p>
+          <a:p>
+            <a:pPr>
+              <a:defRPr sz="3000" b="1">
                 <a:solidFill>
                   <a:srgbClr val="FFFFFF"/>
                 </a:solidFill>
@@ -3408,8 +3421,8 @@
         </p:nvSpPr>
         <p:spPr>
           <a:xfrm>
-            <a:off x="731520" y="2011680"/>
-            <a:ext cx="5212080" cy="1920240"/>
+            <a:off x="731520" y="1920240"/>
+            <a:ext cx="5212080" cy="2011680"/>
           </a:xfrm>
           <a:prstGeom prst="roundRect">
             <a:avLst/>
@@ -3417,7 +3430,7 @@
           <a:solidFill>
             <a:srgbClr val="285C42"/>
           </a:solidFill>
-          <a:ln w="19050">
+          <a:ln w="25400">
             <a:solidFill>
               <a:srgbClr val="52B788"/>
             </a:solidFill>
@@ -3453,8 +3466,8 @@
         </p:nvSpPr>
         <p:spPr>
           <a:xfrm>
-            <a:off x="1005840" y="2194560"/>
-            <a:ext cx="4663440" cy="1554480"/>
+            <a:off x="1051560" y="2148840"/>
+            <a:ext cx="4572000" cy="1554480"/>
           </a:xfrm>
           <a:prstGeom prst="rect">
             <a:avLst/>
@@ -3471,7 +3484,7 @@
               <a:spcAft>
                 <a:spcPts val="800"/>
               </a:spcAft>
-              <a:defRPr sz="1400" b="1">
+              <a:defRPr sz="1900" b="1">
                 <a:solidFill>
                   <a:srgbClr val="FFFFFF"/>
                 </a:solidFill>
@@ -3479,12 +3492,12 @@
               </a:defRPr>
             </a:pPr>
             <a:r>
-              <a:t>📦 成果一：即戰力教案</a:t>
-            </a:r>
-          </a:p>
-          <a:p>
-            <a:pPr>
-              <a:defRPr sz="1100">
+              <a:t>📦 成果一：即戰力教案現場產出</a:t>
+            </a:r>
+          </a:p>
+          <a:p>
+            <a:pPr>
+              <a:defRPr sz="1500">
                 <a:solidFill>
                   <a:srgbClr val="D8F3DC"/>
                 </a:solidFill>
@@ -3492,7 +3505,7 @@
               </a:defRPr>
             </a:pPr>
             <a:r>
-              <a:t>每位參與研習的老師，現場完成 1 份下週就能直接進班上陣的學共伸展跳躍任務教案！</a:t>
+              <a:t>每位參與研習的老師，在 40 分鐘實作中現場完成 1 份下週就能直接進班上陣的學共伸展跳躍任務教案！</a:t>
             </a:r>
           </a:p>
         </p:txBody>
@@ -3505,8 +3518,8 @@
         </p:nvSpPr>
         <p:spPr>
           <a:xfrm>
-            <a:off x="6172200" y="2011680"/>
-            <a:ext cx="5212080" cy="1920240"/>
+            <a:off x="6172200" y="1920240"/>
+            <a:ext cx="5212080" cy="2011680"/>
           </a:xfrm>
           <a:prstGeom prst="roundRect">
             <a:avLst/>
@@ -3514,7 +3527,7 @@
           <a:solidFill>
             <a:srgbClr val="285C42"/>
           </a:solidFill>
-          <a:ln w="19050">
+          <a:ln w="25400">
             <a:solidFill>
               <a:srgbClr val="52B788"/>
             </a:solidFill>
@@ -3550,8 +3563,8 @@
         </p:nvSpPr>
         <p:spPr>
           <a:xfrm>
-            <a:off x="6446520" y="2194560"/>
-            <a:ext cx="4663440" cy="1554480"/>
+            <a:off x="6492240" y="2148840"/>
+            <a:ext cx="4572000" cy="1554480"/>
           </a:xfrm>
           <a:prstGeom prst="rect">
             <a:avLst/>
@@ -3568,7 +3581,7 @@
               <a:spcAft>
                 <a:spcPts val="800"/>
               </a:spcAft>
-              <a:defRPr sz="1400" b="1">
+              <a:defRPr sz="1900" b="1">
                 <a:solidFill>
                   <a:srgbClr val="FFFFFF"/>
                 </a:solidFill>
@@ -3576,12 +3589,12 @@
               </a:defRPr>
             </a:pPr>
             <a:r>
-              <a:t>🪄 成果二：AI 提示詞速查卡</a:t>
-            </a:r>
-          </a:p>
-          <a:p>
-            <a:pPr>
-              <a:defRPr sz="1100">
+              <a:t>🪄 成果二：二橋專屬 AI 提示詞速查卡</a:t>
+            </a:r>
+          </a:p>
+          <a:p>
+            <a:pPr>
+              <a:defRPr sz="1500">
                 <a:solidFill>
                   <a:srgbClr val="D8F3DC"/>
                 </a:solidFill>
@@ -3589,7 +3602,7 @@
               </a:defRPr>
             </a:pPr>
             <a:r>
-              <a:t>提供二橋專屬《學共 AI 備課提示詞手冊》，包含國語閱讀、數學多解、自然探究之標準咒語。</a:t>
+              <a:t>提供二橋教師專屬《學共 AI 備課提示詞手冊》，包含國語閱讀理解、數學多解探究之標準 Prompt。</a:t>
             </a:r>
           </a:p>
         </p:txBody>
@@ -3603,7 +3616,7 @@
         <p:spPr>
           <a:xfrm>
             <a:off x="731520" y="4114800"/>
-            <a:ext cx="5212080" cy="1920240"/>
+            <a:ext cx="5212080" cy="2011680"/>
           </a:xfrm>
           <a:prstGeom prst="roundRect">
             <a:avLst/>
@@ -3611,7 +3624,7 @@
           <a:solidFill>
             <a:srgbClr val="285C42"/>
           </a:solidFill>
-          <a:ln w="19050">
+          <a:ln w="25400">
             <a:solidFill>
               <a:srgbClr val="52B788"/>
             </a:solidFill>
@@ -3647,8 +3660,8 @@
         </p:nvSpPr>
         <p:spPr>
           <a:xfrm>
-            <a:off x="1005840" y="4297680"/>
-            <a:ext cx="4663440" cy="1554480"/>
+            <a:off x="1051560" y="4343400"/>
+            <a:ext cx="4572000" cy="1554480"/>
           </a:xfrm>
           <a:prstGeom prst="rect">
             <a:avLst/>
@@ -3665,7 +3678,7 @@
               <a:spcAft>
                 <a:spcPts val="800"/>
               </a:spcAft>
-              <a:defRPr sz="1400" b="1">
+              <a:defRPr sz="1900" b="1">
                 <a:solidFill>
                   <a:srgbClr val="FFFFFF"/>
                 </a:solidFill>
@@ -3673,12 +3686,12 @@
               </a:defRPr>
             </a:pPr>
             <a:r>
-              <a:t>📋 成果三：學共載具常規檢核表</a:t>
-            </a:r>
-          </a:p>
-          <a:p>
-            <a:pPr>
-              <a:defRPr sz="1100">
+              <a:t>📋 成果三：學共載具班級常規檢核表</a:t>
+            </a:r>
+          </a:p>
+          <a:p>
+            <a:pPr>
+              <a:defRPr sz="1500">
                 <a:solidFill>
                   <a:srgbClr val="D8F3DC"/>
                 </a:solidFill>
@@ -3686,7 +3699,7 @@
               </a:defRPr>
             </a:pPr>
             <a:r>
-              <a:t>提供低年級與中高年級適用的課堂常規檢核清單（螢幕蓋板口令、小組合作評量指標）。</a:t>
+              <a:t>提供低年級與中高年級適用的課堂常規檢核清單（螢幕蓋板三步驟口令、4人小組分工合作指標）。</a:t>
             </a:r>
           </a:p>
         </p:txBody>
@@ -3700,7 +3713,7 @@
         <p:spPr>
           <a:xfrm>
             <a:off x="6172200" y="4114800"/>
-            <a:ext cx="5212080" cy="1920240"/>
+            <a:ext cx="5212080" cy="2011680"/>
           </a:xfrm>
           <a:prstGeom prst="roundRect">
             <a:avLst/>
@@ -3708,7 +3721,7 @@
           <a:solidFill>
             <a:srgbClr val="285C42"/>
           </a:solidFill>
-          <a:ln w="19050">
+          <a:ln w="25400">
             <a:solidFill>
               <a:srgbClr val="52B788"/>
             </a:solidFill>
@@ -3744,8 +3757,8 @@
         </p:nvSpPr>
         <p:spPr>
           <a:xfrm>
-            <a:off x="6446520" y="4297680"/>
-            <a:ext cx="4663440" cy="1554480"/>
+            <a:off x="6492240" y="4343400"/>
+            <a:ext cx="4572000" cy="1554480"/>
           </a:xfrm>
           <a:prstGeom prst="rect">
             <a:avLst/>
@@ -3762,7 +3775,7 @@
               <a:spcAft>
                 <a:spcPts val="800"/>
               </a:spcAft>
-              <a:defRPr sz="1400" b="1">
+              <a:defRPr sz="1900" b="1">
                 <a:solidFill>
                   <a:srgbClr val="FFFFFF"/>
                 </a:solidFill>
@@ -3770,12 +3783,12 @@
               </a:defRPr>
             </a:pPr>
             <a:r>
-              <a:t>🤝 成果四：輔導團雲端資源庫</a:t>
-            </a:r>
-          </a:p>
-          <a:p>
-            <a:pPr>
-              <a:defRPr sz="1100">
+              <a:t>🤝 成果四：輔導團雲端資源庫持續陪伴</a:t>
+            </a:r>
+          </a:p>
+          <a:p>
+            <a:pPr>
+              <a:defRPr sz="1500">
                 <a:solidFill>
                   <a:srgbClr val="D8F3DC"/>
                 </a:solidFill>
@@ -3783,7 +3796,7 @@
               </a:defRPr>
             </a:pPr>
             <a:r>
-              <a:t>建立二橋國小專屬雲端資料夾，講師範例課件、Padlet 範本、議課影片持續共享更新。</a:t>
+              <a:t>建立二橋國小專屬雲端硬碟，講師示範簡報、Padlet 範本、觀課議課實例影片持續共享與支持更新。</a:t>
             </a:r>
           </a:p>
         </p:txBody>
@@ -3860,7 +3873,7 @@
         <p:spPr>
           <a:xfrm>
             <a:off x="731520" y="365760"/>
-            <a:ext cx="10698480" cy="822960"/>
+            <a:ext cx="10058400" cy="1005840"/>
           </a:xfrm>
           <a:prstGeom prst="rect">
             <a:avLst/>
@@ -3874,7 +3887,10 @@
           <a:lstStyle/>
           <a:p>
             <a:pPr>
-              <a:defRPr sz="1100" b="1">
+              <a:spcAft>
+                <a:spcPts val="200"/>
+              </a:spcAft>
+              <a:defRPr sz="1300" b="1">
                 <a:solidFill>
                   <a:srgbClr val="2D6A4F"/>
                 </a:solidFill>
@@ -3882,20 +3898,20 @@
               </a:defRPr>
             </a:pPr>
             <a:r>
-              <a:t>學習共同體輔導團・2小時到校輔導教案建議</a:t>
-            </a:r>
-          </a:p>
-          <a:p>
-            <a:pPr>
-              <a:defRPr sz="2200" b="1">
-                <a:solidFill>
-                  <a:srgbClr val="2B2D42"/>
-                </a:solidFill>
-                <a:latin typeface="Microsoft JhengHei"/>
-              </a:defRPr>
-            </a:pPr>
-            <a:r>
-              <a:t>二橋國小問卷診斷：全校教師學情畫像</a:t>
+              <a:t>學習共同體輔導團・2小時到校輔導教案</a:t>
+            </a:r>
+          </a:p>
+          <a:p>
+            <a:pPr>
+              <a:defRPr sz="2600" b="1">
+                <a:solidFill>
+                  <a:srgbClr val="1B4332"/>
+                </a:solidFill>
+                <a:latin typeface="Microsoft JhengHei"/>
+              </a:defRPr>
+            </a:pPr>
+            <a:r>
+              <a:t>二橋國小學情診斷：全校教師四大關鍵畫像</a:t>
             </a:r>
           </a:p>
         </p:txBody>
@@ -3916,7 +3932,7 @@
         </p:blipFill>
         <p:spPr>
           <a:xfrm>
-            <a:off x="10789920" y="320040"/>
+            <a:off x="10881360" y="365760"/>
             <a:ext cx="685800" cy="685800"/>
           </a:xfrm>
           <a:prstGeom prst="rect">
@@ -3932,8 +3948,8 @@
         </p:nvSpPr>
         <p:spPr>
           <a:xfrm>
-            <a:off x="731520" y="1463040"/>
-            <a:ext cx="2560320" cy="4754880"/>
+            <a:off x="731520" y="1508760"/>
+            <a:ext cx="2560320" cy="4663440"/>
           </a:xfrm>
           <a:prstGeom prst="roundRect">
             <a:avLst/>
@@ -3941,9 +3957,9 @@
           <a:solidFill>
             <a:srgbClr val="FFFFFF"/>
           </a:solidFill>
-          <a:ln w="19050">
+          <a:ln w="25400">
             <a:solidFill>
-              <a:srgbClr val="D8E6DE"/>
+              <a:srgbClr val="2D6A4F"/>
             </a:solidFill>
           </a:ln>
         </p:spPr>
@@ -3971,67 +3987,14 @@
       </p:sp>
       <p:sp>
         <p:nvSpPr>
-          <p:cNvPr id="6" name="Rounded Rectangle 5"/>
-          <p:cNvSpPr/>
-          <p:nvPr/>
-        </p:nvSpPr>
-        <p:spPr>
-          <a:xfrm>
-            <a:off x="914400" y="1645920"/>
-            <a:ext cx="2194560" cy="411480"/>
-          </a:xfrm>
-          <a:prstGeom prst="roundRect">
-            <a:avLst/>
-          </a:prstGeom>
-          <a:solidFill>
-            <a:srgbClr val="2D6A4F"/>
-          </a:solidFill>
-          <a:ln>
-            <a:noFill/>
-          </a:ln>
-        </p:spPr>
-        <p:style>
-          <a:lnRef idx="1">
-            <a:schemeClr val="accent1"/>
-          </a:lnRef>
-          <a:fillRef idx="3">
-            <a:schemeClr val="accent1"/>
-          </a:fillRef>
-          <a:effectRef idx="2">
-            <a:schemeClr val="accent1"/>
-          </a:effectRef>
-          <a:fontRef idx="minor">
-            <a:schemeClr val="lt1"/>
-          </a:fontRef>
-        </p:style>
-        <p:txBody>
-          <a:bodyPr rtlCol="0" anchor="ctr"/>
-          <a:lstStyle/>
-          <a:p>
-            <a:pPr algn="ctr">
-              <a:defRPr sz="1100" b="1">
-                <a:solidFill>
-                  <a:srgbClr val="FFFFFF"/>
-                </a:solidFill>
-                <a:latin typeface="Microsoft JhengHei"/>
-              </a:defRPr>
-            </a:pPr>
-            <a:r>
-              <a:t>👥 年段分佈平均 (19位)</a:t>
-            </a:r>
-          </a:p>
-        </p:txBody>
-      </p:sp>
-      <p:sp>
-        <p:nvSpPr>
-          <p:cNvPr id="7" name="TextBox 6"/>
+          <p:cNvPr id="6" name="TextBox 5"/>
           <p:cNvSpPr txBox="1"/>
           <p:nvPr/>
         </p:nvSpPr>
         <p:spPr>
           <a:xfrm>
-            <a:off x="914400" y="2194560"/>
-            <a:ext cx="2194560" cy="3840480"/>
+            <a:off x="914400" y="1691640"/>
+            <a:ext cx="2194560" cy="4297680"/>
           </a:xfrm>
           <a:prstGeom prst="rect">
             <a:avLst/>
@@ -4044,13 +4007,45 @@
           </a:bodyPr>
           <a:lstStyle/>
           <a:p>
-            <a:pPr>
-              <a:spcAft>
-                <a:spcPts val="400"/>
-              </a:spcAft>
-              <a:defRPr sz="1100">
-                <a:solidFill>
-                  <a:srgbClr val="2B2D42"/>
+            <a:pPr algn="ctr">
+              <a:spcAft>
+                <a:spcPts val="600"/>
+              </a:spcAft>
+              <a:defRPr sz="1700" b="1">
+                <a:solidFill>
+                  <a:srgbClr val="2D6A4F"/>
+                </a:solidFill>
+                <a:latin typeface="Microsoft JhengHei"/>
+              </a:defRPr>
+            </a:pPr>
+            <a:r>
+              <a:t>👥 年段極均衡</a:t>
+            </a:r>
+          </a:p>
+          <a:p>
+            <a:pPr algn="ctr">
+              <a:spcAft>
+                <a:spcPts val="1200"/>
+              </a:spcAft>
+              <a:defRPr sz="3200" b="1">
+                <a:solidFill>
+                  <a:srgbClr val="1B4332"/>
+                </a:solidFill>
+                <a:latin typeface="Microsoft JhengHei"/>
+              </a:defRPr>
+            </a:pPr>
+            <a:r>
+              <a:t>19 位</a:t>
+            </a:r>
+          </a:p>
+          <a:p>
+            <a:pPr>
+              <a:spcAft>
+                <a:spcPts val="300"/>
+              </a:spcAft>
+              <a:defRPr sz="1500">
+                <a:solidFill>
+                  <a:srgbClr val="212529"/>
                 </a:solidFill>
                 <a:latin typeface="Microsoft JhengHei"/>
               </a:defRPr>
@@ -4062,11 +4057,11 @@
           <a:p>
             <a:pPr>
               <a:spcAft>
-                <a:spcPts val="400"/>
-              </a:spcAft>
-              <a:defRPr sz="1100">
-                <a:solidFill>
-                  <a:srgbClr val="2B2D42"/>
+                <a:spcPts val="300"/>
+              </a:spcAft>
+              <a:defRPr sz="1500">
+                <a:solidFill>
+                  <a:srgbClr val="212529"/>
                 </a:solidFill>
                 <a:latin typeface="Microsoft JhengHei"/>
               </a:defRPr>
@@ -4078,11 +4073,11 @@
           <a:p>
             <a:pPr>
               <a:spcAft>
-                <a:spcPts val="400"/>
-              </a:spcAft>
-              <a:defRPr sz="1100">
-                <a:solidFill>
-                  <a:srgbClr val="2B2D42"/>
+                <a:spcPts val="300"/>
+              </a:spcAft>
+              <a:defRPr sz="1500">
+                <a:solidFill>
+                  <a:srgbClr val="212529"/>
                 </a:solidFill>
                 <a:latin typeface="Microsoft JhengHei"/>
               </a:defRPr>
@@ -4094,33 +4089,17 @@
           <a:p>
             <a:pPr>
               <a:spcAft>
-                <a:spcPts val="400"/>
-              </a:spcAft>
-              <a:defRPr sz="1100">
-                <a:solidFill>
-                  <a:srgbClr val="2B2D42"/>
-                </a:solidFill>
-                <a:latin typeface="Microsoft JhengHei"/>
-              </a:defRPr>
-            </a:pPr>
-            <a:r>
-              <a:t>行政教師 4 位 (21%)</a:t>
-            </a:r>
-          </a:p>
-          <a:p>
-            <a:pPr>
-              <a:spcAft>
-                <a:spcPts val="400"/>
-              </a:spcAft>
-              <a:defRPr sz="1100">
-                <a:solidFill>
-                  <a:srgbClr val="2B2D42"/>
-                </a:solidFill>
-                <a:latin typeface="Microsoft JhengHei"/>
-              </a:defRPr>
-            </a:pPr>
-            <a:r>
-              <a:t>科任教師 3 位 (16%)</a:t>
+                <a:spcPts val="300"/>
+              </a:spcAft>
+              <a:defRPr sz="1500">
+                <a:solidFill>
+                  <a:srgbClr val="212529"/>
+                </a:solidFill>
+                <a:latin typeface="Microsoft JhengHei"/>
+              </a:defRPr>
+            </a:pPr>
+            <a:r>
+              <a:t>行政科任 7 位 (37%)</a:t>
             </a:r>
           </a:p>
           <a:p>
@@ -4128,7 +4107,7 @@
               <a:spcBef>
                 <a:spcPts val="800"/>
               </a:spcBef>
-              <a:defRPr sz="1100" b="1">
+              <a:defRPr sz="1400" b="1">
                 <a:solidFill>
                   <a:srgbClr val="2D6A4F"/>
                 </a:solidFill>
@@ -4136,21 +4115,21 @@
               </a:defRPr>
             </a:pPr>
             <a:r>
-              <a:t>★ 各學段均衡，研習需兼顧跨段需求</a:t>
-            </a:r>
-          </a:p>
-        </p:txBody>
-      </p:sp>
-      <p:sp>
-        <p:nvSpPr>
-          <p:cNvPr id="8" name="Rounded Rectangle 7"/>
+              <a:t>★ 研習兼顧跨學段彈性</a:t>
+            </a:r>
+          </a:p>
+        </p:txBody>
+      </p:sp>
+      <p:sp>
+        <p:nvSpPr>
+          <p:cNvPr id="7" name="Rounded Rectangle 6"/>
           <p:cNvSpPr/>
           <p:nvPr/>
         </p:nvSpPr>
         <p:spPr>
           <a:xfrm>
-            <a:off x="3429000" y="1463040"/>
-            <a:ext cx="2560320" cy="4754880"/>
+            <a:off x="3429000" y="1508760"/>
+            <a:ext cx="2560320" cy="4663440"/>
           </a:xfrm>
           <a:prstGeom prst="roundRect">
             <a:avLst/>
@@ -4158,9 +4137,9 @@
           <a:solidFill>
             <a:srgbClr val="FFFFFF"/>
           </a:solidFill>
-          <a:ln w="19050">
+          <a:ln w="25400">
             <a:solidFill>
-              <a:srgbClr val="D8E6DE"/>
+              <a:srgbClr val="2D6A4F"/>
             </a:solidFill>
           </a:ln>
         </p:spPr>
@@ -4188,67 +4167,14 @@
       </p:sp>
       <p:sp>
         <p:nvSpPr>
-          <p:cNvPr id="9" name="Rounded Rectangle 8"/>
-          <p:cNvSpPr/>
-          <p:nvPr/>
-        </p:nvSpPr>
-        <p:spPr>
-          <a:xfrm>
-            <a:off x="3611880" y="1645920"/>
-            <a:ext cx="2194560" cy="411480"/>
-          </a:xfrm>
-          <a:prstGeom prst="roundRect">
-            <a:avLst/>
-          </a:prstGeom>
-          <a:solidFill>
-            <a:srgbClr val="2D6A4F"/>
-          </a:solidFill>
-          <a:ln>
-            <a:noFill/>
-          </a:ln>
-        </p:spPr>
-        <p:style>
-          <a:lnRef idx="1">
-            <a:schemeClr val="accent1"/>
-          </a:lnRef>
-          <a:fillRef idx="3">
-            <a:schemeClr val="accent1"/>
-          </a:fillRef>
-          <a:effectRef idx="2">
-            <a:schemeClr val="accent1"/>
-          </a:effectRef>
-          <a:fontRef idx="minor">
-            <a:schemeClr val="lt1"/>
-          </a:fontRef>
-        </p:style>
-        <p:txBody>
-          <a:bodyPr rtlCol="0" anchor="ctr"/>
-          <a:lstStyle/>
-          <a:p>
-            <a:pPr algn="ctr">
-              <a:defRPr sz="1100" b="1">
-                <a:solidFill>
-                  <a:srgbClr val="FFFFFF"/>
-                </a:solidFill>
-                <a:latin typeface="Microsoft JhengHei"/>
-              </a:defRPr>
-            </a:pPr>
-            <a:r>
-              <a:t>🏆 資深骨幹佔比 95%</a:t>
-            </a:r>
-          </a:p>
-        </p:txBody>
-      </p:sp>
-      <p:sp>
-        <p:nvSpPr>
-          <p:cNvPr id="10" name="TextBox 9"/>
+          <p:cNvPr id="8" name="TextBox 7"/>
           <p:cNvSpPr txBox="1"/>
           <p:nvPr/>
         </p:nvSpPr>
         <p:spPr>
           <a:xfrm>
-            <a:off x="3611880" y="2194560"/>
-            <a:ext cx="2194560" cy="3840480"/>
+            <a:off x="3611880" y="1691640"/>
+            <a:ext cx="2194560" cy="4297680"/>
           </a:xfrm>
           <a:prstGeom prst="rect">
             <a:avLst/>
@@ -4261,67 +4187,83 @@
           </a:bodyPr>
           <a:lstStyle/>
           <a:p>
-            <a:pPr>
-              <a:spcAft>
-                <a:spcPts val="400"/>
-              </a:spcAft>
-              <a:defRPr sz="1100">
-                <a:solidFill>
-                  <a:srgbClr val="2B2D42"/>
-                </a:solidFill>
-                <a:latin typeface="Microsoft JhengHei"/>
-              </a:defRPr>
-            </a:pPr>
-            <a:r>
-              <a:t>資深領航 (21年以上) 7 位 (37%)</a:t>
-            </a:r>
-          </a:p>
-          <a:p>
-            <a:pPr>
-              <a:spcAft>
-                <a:spcPts val="400"/>
-              </a:spcAft>
-              <a:defRPr sz="1100">
-                <a:solidFill>
-                  <a:srgbClr val="2B2D42"/>
-                </a:solidFill>
-                <a:latin typeface="Microsoft JhengHei"/>
-              </a:defRPr>
-            </a:pPr>
-            <a:r>
-              <a:t>中生代 (4~10年) 6 位 (32%)</a:t>
-            </a:r>
-          </a:p>
-          <a:p>
-            <a:pPr>
-              <a:spcAft>
-                <a:spcPts val="400"/>
-              </a:spcAft>
-              <a:defRPr sz="1100">
-                <a:solidFill>
-                  <a:srgbClr val="2B2D42"/>
-                </a:solidFill>
-                <a:latin typeface="Microsoft JhengHei"/>
-              </a:defRPr>
-            </a:pPr>
-            <a:r>
-              <a:t>資深教師 (11~20年) 5 位 (26%)</a:t>
-            </a:r>
-          </a:p>
-          <a:p>
-            <a:pPr>
-              <a:spcAft>
-                <a:spcPts val="400"/>
-              </a:spcAft>
-              <a:defRPr sz="1100">
-                <a:solidFill>
-                  <a:srgbClr val="2B2D42"/>
-                </a:solidFill>
-                <a:latin typeface="Microsoft JhengHei"/>
-              </a:defRPr>
-            </a:pPr>
-            <a:r>
-              <a:t>初任教師 1 位 (5%)</a:t>
+            <a:pPr algn="ctr">
+              <a:spcAft>
+                <a:spcPts val="600"/>
+              </a:spcAft>
+              <a:defRPr sz="1700" b="1">
+                <a:solidFill>
+                  <a:srgbClr val="2D6A4F"/>
+                </a:solidFill>
+                <a:latin typeface="Microsoft JhengHei"/>
+              </a:defRPr>
+            </a:pPr>
+            <a:r>
+              <a:t>🏆 資深骨幹主力</a:t>
+            </a:r>
+          </a:p>
+          <a:p>
+            <a:pPr algn="ctr">
+              <a:spcAft>
+                <a:spcPts val="1200"/>
+              </a:spcAft>
+              <a:defRPr sz="3200" b="1">
+                <a:solidFill>
+                  <a:srgbClr val="1B4332"/>
+                </a:solidFill>
+                <a:latin typeface="Microsoft JhengHei"/>
+              </a:defRPr>
+            </a:pPr>
+            <a:r>
+              <a:t>95%</a:t>
+            </a:r>
+          </a:p>
+          <a:p>
+            <a:pPr>
+              <a:spcAft>
+                <a:spcPts val="300"/>
+              </a:spcAft>
+              <a:defRPr sz="1500">
+                <a:solidFill>
+                  <a:srgbClr val="212529"/>
+                </a:solidFill>
+                <a:latin typeface="Microsoft JhengHei"/>
+              </a:defRPr>
+            </a:pPr>
+            <a:r>
+              <a:t>21年以上資深 7 位 (37%)</a:t>
+            </a:r>
+          </a:p>
+          <a:p>
+            <a:pPr>
+              <a:spcAft>
+                <a:spcPts val="300"/>
+              </a:spcAft>
+              <a:defRPr sz="1500">
+                <a:solidFill>
+                  <a:srgbClr val="212529"/>
+                </a:solidFill>
+                <a:latin typeface="Microsoft JhengHei"/>
+              </a:defRPr>
+            </a:pPr>
+            <a:r>
+              <a:t>中生代教師 6 位 (32%)</a:t>
+            </a:r>
+          </a:p>
+          <a:p>
+            <a:pPr>
+              <a:spcAft>
+                <a:spcPts val="300"/>
+              </a:spcAft>
+              <a:defRPr sz="1500">
+                <a:solidFill>
+                  <a:srgbClr val="212529"/>
+                </a:solidFill>
+                <a:latin typeface="Microsoft JhengHei"/>
+              </a:defRPr>
+            </a:pPr>
+            <a:r>
+              <a:t>資深教師 5 位 (26%)</a:t>
             </a:r>
           </a:p>
           <a:p>
@@ -4329,7 +4271,7 @@
               <a:spcBef>
                 <a:spcPts val="800"/>
               </a:spcBef>
-              <a:defRPr sz="1100" b="1">
+              <a:defRPr sz="1400" b="1">
                 <a:solidFill>
                   <a:srgbClr val="2D6A4F"/>
                 </a:solidFill>
@@ -4337,21 +4279,21 @@
               </a:defRPr>
             </a:pPr>
             <a:r>
-              <a:t>★ 教學底蘊極深，需提供高層次整合</a:t>
-            </a:r>
-          </a:p>
-        </p:txBody>
-      </p:sp>
-      <p:sp>
-        <p:nvSpPr>
-          <p:cNvPr id="11" name="Rounded Rectangle 10"/>
+              <a:t>★ 教學底蘊極深厚</a:t>
+            </a:r>
+          </a:p>
+        </p:txBody>
+      </p:sp>
+      <p:sp>
+        <p:nvSpPr>
+          <p:cNvPr id="9" name="Rounded Rectangle 8"/>
           <p:cNvSpPr/>
           <p:nvPr/>
         </p:nvSpPr>
         <p:spPr>
           <a:xfrm>
-            <a:off x="6126480" y="1463040"/>
-            <a:ext cx="2560320" cy="4754880"/>
+            <a:off x="6126480" y="1508760"/>
+            <a:ext cx="2560320" cy="4663440"/>
           </a:xfrm>
           <a:prstGeom prst="roundRect">
             <a:avLst/>
@@ -4359,9 +4301,9 @@
           <a:solidFill>
             <a:srgbClr val="FFFFFF"/>
           </a:solidFill>
-          <a:ln w="19050">
+          <a:ln w="25400">
             <a:solidFill>
-              <a:srgbClr val="D8E6DE"/>
+              <a:srgbClr val="E76F51"/>
             </a:solidFill>
           </a:ln>
         </p:spPr>
@@ -4389,67 +4331,14 @@
       </p:sp>
       <p:sp>
         <p:nvSpPr>
-          <p:cNvPr id="12" name="Rounded Rectangle 11"/>
-          <p:cNvSpPr/>
-          <p:nvPr/>
-        </p:nvSpPr>
-        <p:spPr>
-          <a:xfrm>
-            <a:off x="6309360" y="1645920"/>
-            <a:ext cx="2194560" cy="411480"/>
-          </a:xfrm>
-          <a:prstGeom prst="roundRect">
-            <a:avLst/>
-          </a:prstGeom>
-          <a:solidFill>
-            <a:srgbClr val="E76F51"/>
-          </a:solidFill>
-          <a:ln>
-            <a:noFill/>
-          </a:ln>
-        </p:spPr>
-        <p:style>
-          <a:lnRef idx="1">
-            <a:schemeClr val="accent1"/>
-          </a:lnRef>
-          <a:fillRef idx="3">
-            <a:schemeClr val="accent1"/>
-          </a:fillRef>
-          <a:effectRef idx="2">
-            <a:schemeClr val="accent1"/>
-          </a:effectRef>
-          <a:fontRef idx="minor">
-            <a:schemeClr val="lt1"/>
-          </a:fontRef>
-        </p:style>
-        <p:txBody>
-          <a:bodyPr rtlCol="0" anchor="ctr"/>
-          <a:lstStyle/>
-          <a:p>
-            <a:pPr algn="ctr">
-              <a:defRPr sz="1100" b="1">
-                <a:solidFill>
-                  <a:srgbClr val="FFFFFF"/>
-                </a:solidFill>
-                <a:latin typeface="Microsoft JhengHei"/>
-              </a:defRPr>
-            </a:pPr>
-            <a:r>
-              <a:t>🖥️ 關鍵硬體優勢</a:t>
-            </a:r>
-          </a:p>
-        </p:txBody>
-      </p:sp>
-      <p:sp>
-        <p:nvSpPr>
-          <p:cNvPr id="13" name="TextBox 12"/>
+          <p:cNvPr id="10" name="TextBox 9"/>
           <p:cNvSpPr txBox="1"/>
           <p:nvPr/>
         </p:nvSpPr>
         <p:spPr>
           <a:xfrm>
-            <a:off x="6309360" y="2194560"/>
-            <a:ext cx="2194560" cy="3840480"/>
+            <a:off x="6309360" y="1691640"/>
+            <a:ext cx="2194560" cy="4297680"/>
           </a:xfrm>
           <a:prstGeom prst="rect">
             <a:avLst/>
@@ -4462,67 +4351,83 @@
           </a:bodyPr>
           <a:lstStyle/>
           <a:p>
-            <a:pPr>
-              <a:spcAft>
-                <a:spcPts val="400"/>
-              </a:spcAft>
-              <a:defRPr sz="1100">
-                <a:solidFill>
-                  <a:srgbClr val="2B2D42"/>
-                </a:solidFill>
-                <a:latin typeface="Microsoft JhengHei"/>
-              </a:defRPr>
-            </a:pPr>
-            <a:r>
-              <a:t>100% (19/19) 教室內建</a:t>
-            </a:r>
-          </a:p>
-          <a:p>
-            <a:pPr>
-              <a:spcAft>
-                <a:spcPts val="400"/>
-              </a:spcAft>
-              <a:defRPr sz="1100">
-                <a:solidFill>
-                  <a:srgbClr val="2B2D42"/>
-                </a:solidFill>
-                <a:latin typeface="Microsoft JhengHei"/>
-              </a:defRPr>
-            </a:pPr>
-            <a:r>
-              <a:t>86 吋以上大型觸控互動螢幕！</a:t>
-            </a:r>
-          </a:p>
-          <a:p>
-            <a:pPr>
-              <a:spcAft>
-                <a:spcPts val="400"/>
-              </a:spcAft>
-              <a:defRPr sz="1100">
-                <a:solidFill>
-                  <a:srgbClr val="2B2D42"/>
-                </a:solidFill>
-                <a:latin typeface="Microsoft JhengHei"/>
-              </a:defRPr>
-            </a:pPr>
-            <a:r>
-              <a:t>• 學生 1:1 iPad：5 班</a:t>
-            </a:r>
-          </a:p>
-          <a:p>
-            <a:pPr>
-              <a:spcAft>
-                <a:spcPts val="400"/>
-              </a:spcAft>
-              <a:defRPr sz="1100">
-                <a:solidFill>
-                  <a:srgbClr val="2B2D42"/>
-                </a:solidFill>
-                <a:latin typeface="Microsoft JhengHei"/>
-              </a:defRPr>
-            </a:pPr>
-            <a:r>
-              <a:t>• 小組共用 / 預約車：3 班</a:t>
+            <a:pPr algn="ctr">
+              <a:spcAft>
+                <a:spcPts val="600"/>
+              </a:spcAft>
+              <a:defRPr sz="1700" b="1">
+                <a:solidFill>
+                  <a:srgbClr val="E76F51"/>
+                </a:solidFill>
+                <a:latin typeface="Microsoft JhengHei"/>
+              </a:defRPr>
+            </a:pPr>
+            <a:r>
+              <a:t>🖥️ 關鍵硬體王牌</a:t>
+            </a:r>
+          </a:p>
+          <a:p>
+            <a:pPr algn="ctr">
+              <a:spcAft>
+                <a:spcPts val="1200"/>
+              </a:spcAft>
+              <a:defRPr sz="3200" b="1">
+                <a:solidFill>
+                  <a:srgbClr val="1B4332"/>
+                </a:solidFill>
+                <a:latin typeface="Microsoft JhengHei"/>
+              </a:defRPr>
+            </a:pPr>
+            <a:r>
+              <a:t>100%</a:t>
+            </a:r>
+          </a:p>
+          <a:p>
+            <a:pPr>
+              <a:spcAft>
+                <a:spcPts val="300"/>
+              </a:spcAft>
+              <a:defRPr sz="1500">
+                <a:solidFill>
+                  <a:srgbClr val="212529"/>
+                </a:solidFill>
+                <a:latin typeface="Microsoft JhengHei"/>
+              </a:defRPr>
+            </a:pPr>
+            <a:r>
+              <a:t>全校 19 班均內建</a:t>
+            </a:r>
+          </a:p>
+          <a:p>
+            <a:pPr>
+              <a:spcAft>
+                <a:spcPts val="300"/>
+              </a:spcAft>
+              <a:defRPr sz="1500">
+                <a:solidFill>
+                  <a:srgbClr val="212529"/>
+                </a:solidFill>
+                <a:latin typeface="Microsoft JhengHei"/>
+              </a:defRPr>
+            </a:pPr>
+            <a:r>
+              <a:t>86 吋大型觸控螢幕！</a:t>
+            </a:r>
+          </a:p>
+          <a:p>
+            <a:pPr>
+              <a:spcAft>
+                <a:spcPts val="300"/>
+              </a:spcAft>
+              <a:defRPr sz="1500">
+                <a:solidFill>
+                  <a:srgbClr val="212529"/>
+                </a:solidFill>
+                <a:latin typeface="Microsoft JhengHei"/>
+              </a:defRPr>
+            </a:pPr>
+            <a:r>
+              <a:t>(平板抽用或生生用)</a:t>
             </a:r>
           </a:p>
           <a:p>
@@ -4530,7 +4435,7 @@
               <a:spcBef>
                 <a:spcPts val="800"/>
               </a:spcBef>
-              <a:defRPr sz="1100" b="1">
+              <a:defRPr sz="1400" b="1">
                 <a:solidFill>
                   <a:srgbClr val="E76F51"/>
                 </a:solidFill>
@@ -4538,21 +4443,21 @@
               </a:defRPr>
             </a:pPr>
             <a:r>
-              <a:t>★ 研習重心應放在大螢幕共構</a:t>
-            </a:r>
-          </a:p>
-        </p:txBody>
-      </p:sp>
-      <p:sp>
-        <p:nvSpPr>
-          <p:cNvPr id="14" name="Rounded Rectangle 13"/>
+              <a:t>★ 重點在大螢幕共構</a:t>
+            </a:r>
+          </a:p>
+        </p:txBody>
+      </p:sp>
+      <p:sp>
+        <p:nvSpPr>
+          <p:cNvPr id="11" name="Rounded Rectangle 10"/>
           <p:cNvSpPr/>
           <p:nvPr/>
         </p:nvSpPr>
         <p:spPr>
           <a:xfrm>
-            <a:off x="8823960" y="1463040"/>
-            <a:ext cx="2560320" cy="4754880"/>
+            <a:off x="8823960" y="1508760"/>
+            <a:ext cx="2560320" cy="4663440"/>
           </a:xfrm>
           <a:prstGeom prst="roundRect">
             <a:avLst/>
@@ -4560,9 +4465,9 @@
           <a:solidFill>
             <a:srgbClr val="FFFFFF"/>
           </a:solidFill>
-          <a:ln w="19050">
+          <a:ln w="25400">
             <a:solidFill>
-              <a:srgbClr val="D8E6DE"/>
+              <a:srgbClr val="E09F3E"/>
             </a:solidFill>
           </a:ln>
         </p:spPr>
@@ -4590,67 +4495,14 @@
       </p:sp>
       <p:sp>
         <p:nvSpPr>
-          <p:cNvPr id="15" name="Rounded Rectangle 14"/>
-          <p:cNvSpPr/>
-          <p:nvPr/>
-        </p:nvSpPr>
-        <p:spPr>
-          <a:xfrm>
-            <a:off x="9006840" y="1645920"/>
-            <a:ext cx="2194560" cy="411480"/>
-          </a:xfrm>
-          <a:prstGeom prst="roundRect">
-            <a:avLst/>
-          </a:prstGeom>
-          <a:solidFill>
-            <a:srgbClr val="E09F3E"/>
-          </a:solidFill>
-          <a:ln>
-            <a:noFill/>
-          </a:ln>
-        </p:spPr>
-        <p:style>
-          <a:lnRef idx="1">
-            <a:schemeClr val="accent1"/>
-          </a:lnRef>
-          <a:fillRef idx="3">
-            <a:schemeClr val="accent1"/>
-          </a:fillRef>
-          <a:effectRef idx="2">
-            <a:schemeClr val="accent1"/>
-          </a:effectRef>
-          <a:fontRef idx="minor">
-            <a:schemeClr val="lt1"/>
-          </a:fontRef>
-        </p:style>
-        <p:txBody>
-          <a:bodyPr rtlCol="0" anchor="ctr"/>
-          <a:lstStyle/>
-          <a:p>
-            <a:pPr algn="ctr">
-              <a:defRPr sz="1100" b="1">
-                <a:solidFill>
-                  <a:srgbClr val="FFFFFF"/>
-                </a:solidFill>
-                <a:latin typeface="Microsoft JhengHei"/>
-              </a:defRPr>
-            </a:pPr>
-            <a:r>
-              <a:t>📱 載具使用頻率呈現雙峰</a:t>
-            </a:r>
-          </a:p>
-        </p:txBody>
-      </p:sp>
-      <p:sp>
-        <p:nvSpPr>
-          <p:cNvPr id="16" name="TextBox 15"/>
+          <p:cNvPr id="12" name="TextBox 11"/>
           <p:cNvSpPr txBox="1"/>
           <p:nvPr/>
         </p:nvSpPr>
         <p:spPr>
           <a:xfrm>
-            <a:off x="9006840" y="2194560"/>
-            <a:ext cx="2194560" cy="3840480"/>
+            <a:off x="9006840" y="1691640"/>
+            <a:ext cx="2194560" cy="4297680"/>
           </a:xfrm>
           <a:prstGeom prst="rect">
             <a:avLst/>
@@ -4663,67 +4515,83 @@
           </a:bodyPr>
           <a:lstStyle/>
           <a:p>
-            <a:pPr>
-              <a:spcAft>
-                <a:spcPts val="400"/>
-              </a:spcAft>
-              <a:defRPr sz="1100">
-                <a:solidFill>
-                  <a:srgbClr val="2B2D42"/>
-                </a:solidFill>
-                <a:latin typeface="Microsoft JhengHei"/>
-              </a:defRPr>
-            </a:pPr>
-            <a:r>
-              <a:t>幾乎每堂課使用 (4次+)：37%</a:t>
-            </a:r>
-          </a:p>
-          <a:p>
-            <a:pPr>
-              <a:spcAft>
-                <a:spcPts val="400"/>
-              </a:spcAft>
-              <a:defRPr sz="1100">
-                <a:solidFill>
-                  <a:srgbClr val="2B2D42"/>
-                </a:solidFill>
-                <a:latin typeface="Microsoft JhengHei"/>
-              </a:defRPr>
-            </a:pPr>
-            <a:r>
-              <a:t>較少使用 (每月1~2次)：26%</a:t>
-            </a:r>
-          </a:p>
-          <a:p>
-            <a:pPr>
-              <a:spcAft>
-                <a:spcPts val="400"/>
-              </a:spcAft>
-              <a:defRPr sz="1100">
-                <a:solidFill>
-                  <a:srgbClr val="2B2D42"/>
-                </a:solidFill>
-                <a:latin typeface="Microsoft JhengHei"/>
-              </a:defRPr>
-            </a:pPr>
-            <a:r>
-              <a:t>偶爾使用 (每週1次)：16%</a:t>
-            </a:r>
-          </a:p>
-          <a:p>
-            <a:pPr>
-              <a:spcAft>
-                <a:spcPts val="400"/>
-              </a:spcAft>
-              <a:defRPr sz="1100">
-                <a:solidFill>
-                  <a:srgbClr val="2B2D42"/>
-                </a:solidFill>
-                <a:latin typeface="Microsoft JhengHei"/>
-              </a:defRPr>
-            </a:pPr>
-            <a:r>
-              <a:t>極少使用 / 經常使用：各 11%</a:t>
+            <a:pPr algn="ctr">
+              <a:spcAft>
+                <a:spcPts val="600"/>
+              </a:spcAft>
+              <a:defRPr sz="1700" b="1">
+                <a:solidFill>
+                  <a:srgbClr val="E09F3E"/>
+                </a:solidFill>
+                <a:latin typeface="Microsoft JhengHei"/>
+              </a:defRPr>
+            </a:pPr>
+            <a:r>
+              <a:t>📱 載具使用頻率</a:t>
+            </a:r>
+          </a:p>
+          <a:p>
+            <a:pPr algn="ctr">
+              <a:spcAft>
+                <a:spcPts val="1200"/>
+              </a:spcAft>
+              <a:defRPr sz="3200" b="1">
+                <a:solidFill>
+                  <a:srgbClr val="1B4332"/>
+                </a:solidFill>
+                <a:latin typeface="Microsoft JhengHei"/>
+              </a:defRPr>
+            </a:pPr>
+            <a:r>
+              <a:t>雙峰分佈</a:t>
+            </a:r>
+          </a:p>
+          <a:p>
+            <a:pPr>
+              <a:spcAft>
+                <a:spcPts val="300"/>
+              </a:spcAft>
+              <a:defRPr sz="1500">
+                <a:solidFill>
+                  <a:srgbClr val="212529"/>
+                </a:solidFill>
+                <a:latin typeface="Microsoft JhengHei"/>
+              </a:defRPr>
+            </a:pPr>
+            <a:r>
+              <a:t>每週4次以上：37%</a:t>
+            </a:r>
+          </a:p>
+          <a:p>
+            <a:pPr>
+              <a:spcAft>
+                <a:spcPts val="300"/>
+              </a:spcAft>
+              <a:defRPr sz="1500">
+                <a:solidFill>
+                  <a:srgbClr val="212529"/>
+                </a:solidFill>
+                <a:latin typeface="Microsoft JhengHei"/>
+              </a:defRPr>
+            </a:pPr>
+            <a:r>
+              <a:t>每月1-2次：26%</a:t>
+            </a:r>
+          </a:p>
+          <a:p>
+            <a:pPr>
+              <a:spcAft>
+                <a:spcPts val="300"/>
+              </a:spcAft>
+              <a:defRPr sz="1500">
+                <a:solidFill>
+                  <a:srgbClr val="212529"/>
+                </a:solidFill>
+                <a:latin typeface="Microsoft JhengHei"/>
+              </a:defRPr>
+            </a:pPr>
+            <a:r>
+              <a:t>偶爾使用：16%</a:t>
             </a:r>
           </a:p>
           <a:p>
@@ -4731,7 +4599,7 @@
               <a:spcBef>
                 <a:spcPts val="800"/>
               </a:spcBef>
-              <a:defRPr sz="1100" b="1">
+              <a:defRPr sz="1400" b="1">
                 <a:solidFill>
                   <a:srgbClr val="E09F3E"/>
                 </a:solidFill>
@@ -4739,7 +4607,7 @@
               </a:defRPr>
             </a:pPr>
             <a:r>
-              <a:t>★ 高頻者與觀望者並存，需階梯引導</a:t>
+              <a:t>★ 高頻與少用並存</a:t>
             </a:r>
           </a:p>
         </p:txBody>
@@ -4816,7 +4684,7 @@
         <p:spPr>
           <a:xfrm>
             <a:off x="731520" y="365760"/>
-            <a:ext cx="10698480" cy="822960"/>
+            <a:ext cx="10058400" cy="1005840"/>
           </a:xfrm>
           <a:prstGeom prst="rect">
             <a:avLst/>
@@ -4830,7 +4698,10 @@
           <a:lstStyle/>
           <a:p>
             <a:pPr>
-              <a:defRPr sz="1100" b="1">
+              <a:spcAft>
+                <a:spcPts val="200"/>
+              </a:spcAft>
+              <a:defRPr sz="1300" b="1">
                 <a:solidFill>
                   <a:srgbClr val="2D6A4F"/>
                 </a:solidFill>
@@ -4838,20 +4709,20 @@
               </a:defRPr>
             </a:pPr>
             <a:r>
-              <a:t>學習共同體輔導團・2小時到校輔導教案建議</a:t>
-            </a:r>
-          </a:p>
-          <a:p>
-            <a:pPr>
-              <a:defRPr sz="2200" b="1">
-                <a:solidFill>
-                  <a:srgbClr val="2B2D42"/>
-                </a:solidFill>
-                <a:latin typeface="Microsoft JhengHei"/>
-              </a:defRPr>
-            </a:pPr>
-            <a:r>
-              <a:t>現場三大痛點魔王 vs 研習期待票選 Top 3</a:t>
+              <a:t>學習共同體輔導團・2小時到校輔導教案</a:t>
+            </a:r>
+          </a:p>
+          <a:p>
+            <a:pPr>
+              <a:defRPr sz="2600" b="1">
+                <a:solidFill>
+                  <a:srgbClr val="1B4332"/>
+                </a:solidFill>
+                <a:latin typeface="Microsoft JhengHei"/>
+              </a:defRPr>
+            </a:pPr>
+            <a:r>
+              <a:t>二橋三大痛點魔王 vs 模組票選期待 Top 3</a:t>
             </a:r>
           </a:p>
         </p:txBody>
@@ -4872,7 +4743,7 @@
         </p:blipFill>
         <p:spPr>
           <a:xfrm>
-            <a:off x="10789920" y="320040"/>
+            <a:off x="10881360" y="365760"/>
             <a:ext cx="685800" cy="685800"/>
           </a:xfrm>
           <a:prstGeom prst="rect">
@@ -4888,8 +4759,8 @@
         </p:nvSpPr>
         <p:spPr>
           <a:xfrm>
-            <a:off x="731520" y="1463040"/>
-            <a:ext cx="5212080" cy="4754880"/>
+            <a:off x="731520" y="1508760"/>
+            <a:ext cx="5212080" cy="4663440"/>
           </a:xfrm>
           <a:prstGeom prst="roundRect">
             <a:avLst/>
@@ -4897,9 +4768,9 @@
           <a:solidFill>
             <a:srgbClr val="FFFFFF"/>
           </a:solidFill>
-          <a:ln w="19050">
+          <a:ln w="25400">
             <a:solidFill>
-              <a:srgbClr val="D8E6DE"/>
+              <a:srgbClr val="E76F51"/>
             </a:solidFill>
           </a:ln>
         </p:spPr>
@@ -4933,8 +4804,8 @@
         </p:nvSpPr>
         <p:spPr>
           <a:xfrm>
-            <a:off x="1005840" y="1645920"/>
-            <a:ext cx="4663440" cy="4389120"/>
+            <a:off x="1005840" y="1691640"/>
+            <a:ext cx="4663440" cy="4297680"/>
           </a:xfrm>
           <a:prstGeom prst="rect">
             <a:avLst/>
@@ -4949,17 +4820,49 @@
           <a:p>
             <a:pPr>
               <a:spcAft>
+                <a:spcPts val="1600"/>
+              </a:spcAft>
+              <a:defRPr sz="2000" b="1">
+                <a:solidFill>
+                  <a:srgbClr val="E76F51"/>
+                </a:solidFill>
+                <a:latin typeface="Microsoft JhengHei"/>
+              </a:defRPr>
+            </a:pPr>
+            <a:r>
+              <a:t>🚨 二橋教師最大的三個課堂卡點</a:t>
+            </a:r>
+          </a:p>
+          <a:p>
+            <a:pPr>
+              <a:spcAft>
+                <a:spcPts val="200"/>
+              </a:spcAft>
+              <a:defRPr sz="1700" b="1">
+                <a:solidFill>
+                  <a:srgbClr val="1B4332"/>
+                </a:solidFill>
+                <a:latin typeface="Microsoft JhengHei"/>
+              </a:defRPr>
+            </a:pPr>
+            <a:r>
+              <a:t>1. 載具分心與破壞傾聽 (53%)</a:t>
+            </a:r>
+          </a:p>
+          <a:p>
+            <a:pPr>
+              <a:spcAft>
                 <a:spcPts val="1200"/>
               </a:spcAft>
-              <a:defRPr sz="1500" b="1">
-                <a:solidFill>
-                  <a:srgbClr val="E76F51"/>
-                </a:solidFill>
-                <a:latin typeface="Microsoft JhengHei"/>
-              </a:defRPr>
-            </a:pPr>
-            <a:r>
-              <a:t>🚨 二橋教師最大的三個課堂卡點</a:t>
+              <a:defRPr sz="1500">
+                <a:solidFill>
+                  <a:srgbClr val="495057"/>
+                </a:solidFill>
+                <a:latin typeface="Microsoft JhengHei"/>
+              </a:defRPr>
+            </a:pPr>
+            <a:r>
+              <a:t>玩遊戲、發呆、不聽發言；螢幕亮著時眼神不再注視同伴。</a:t>
             </a:r>
           </a:p>
           <a:p>
@@ -4967,31 +4870,31 @@
               <a:spcAft>
                 <a:spcPts val="200"/>
               </a:spcAft>
-              <a:defRPr sz="1200" b="1">
-                <a:solidFill>
-                  <a:srgbClr val="2B2D42"/>
-                </a:solidFill>
-                <a:latin typeface="Microsoft JhengHei"/>
-              </a:defRPr>
-            </a:pPr>
-            <a:r>
-              <a:t>1. 載具分心與破壞傾聽 (53%)</a:t>
-            </a:r>
-          </a:p>
-          <a:p>
-            <a:pPr>
-              <a:spcAft>
-                <a:spcPts val="800"/>
-              </a:spcAft>
-              <a:defRPr sz="1050">
-                <a:solidFill>
-                  <a:srgbClr val="6C757D"/>
-                </a:solidFill>
-                <a:latin typeface="Microsoft JhengHei"/>
-              </a:defRPr>
-            </a:pPr>
-            <a:r>
-              <a:t>學生玩遊戲、發呆、不專心聆聽同伴發言；螢幕亮著時，眼神不再聚焦同伴。</a:t>
+              <a:defRPr sz="1700" b="1">
+                <a:solidFill>
+                  <a:srgbClr val="1B4332"/>
+                </a:solidFill>
+                <a:latin typeface="Microsoft JhengHei"/>
+              </a:defRPr>
+            </a:pPr>
+            <a:r>
+              <a:t>2. 操作載具耗時太久 (47%)</a:t>
+            </a:r>
+          </a:p>
+          <a:p>
+            <a:pPr>
+              <a:spcAft>
+                <a:spcPts val="1200"/>
+              </a:spcAft>
+              <a:defRPr sz="1500">
+                <a:solidFill>
+                  <a:srgbClr val="495057"/>
+                </a:solidFill>
+                <a:latin typeface="Microsoft JhengHei"/>
+              </a:defRPr>
+            </a:pPr>
+            <a:r>
+              <a:t>帳號登入繁瑣、連線不穩；搞載具嚴重壓縮小組深思時間！</a:t>
             </a:r>
           </a:p>
           <a:p>
@@ -4999,63 +4902,31 @@
               <a:spcAft>
                 <a:spcPts val="200"/>
               </a:spcAft>
-              <a:defRPr sz="1200" b="1">
-                <a:solidFill>
-                  <a:srgbClr val="2B2D42"/>
-                </a:solidFill>
-                <a:latin typeface="Microsoft JhengHei"/>
-              </a:defRPr>
-            </a:pPr>
-            <a:r>
-              <a:t>2. 操作載具耗時太久 (47%)</a:t>
-            </a:r>
-          </a:p>
-          <a:p>
-            <a:pPr>
-              <a:spcAft>
-                <a:spcPts val="800"/>
-              </a:spcAft>
-              <a:defRPr sz="1050">
-                <a:solidFill>
-                  <a:srgbClr val="6C757D"/>
-                </a:solidFill>
-                <a:latin typeface="Microsoft JhengHei"/>
-              </a:defRPr>
-            </a:pPr>
-            <a:r>
-              <a:t>帳號登入繁瑣、連線不穩；搞載具吃掉原本最珍貴的小組對話與深思時間。</a:t>
-            </a:r>
-          </a:p>
-          <a:p>
-            <a:pPr>
-              <a:spcAft>
-                <a:spcPts val="200"/>
-              </a:spcAft>
-              <a:defRPr sz="1200" b="1">
-                <a:solidFill>
-                  <a:srgbClr val="2B2D42"/>
-                </a:solidFill>
-                <a:latin typeface="Microsoft JhengHei"/>
-              </a:defRPr>
-            </a:pPr>
-            <a:r>
-              <a:t>3. 缺乏教材與跳躍題設計指引 (32%)</a:t>
-            </a:r>
-          </a:p>
-          <a:p>
-            <a:pPr>
-              <a:spcAft>
-                <a:spcPts val="800"/>
-              </a:spcAft>
-              <a:defRPr sz="1050">
-                <a:solidFill>
-                  <a:srgbClr val="6C757D"/>
-                </a:solidFill>
-                <a:latin typeface="Microsoft JhengHei"/>
-              </a:defRPr>
-            </a:pPr>
-            <a:r>
-              <a:t>不知道如何用數位工具設計出有層次的伸展跳躍任務（自評信心僅 2.68 分！）。</a:t>
+              <a:defRPr sz="1700" b="1">
+                <a:solidFill>
+                  <a:srgbClr val="1B4332"/>
+                </a:solidFill>
+                <a:latin typeface="Microsoft JhengHei"/>
+              </a:defRPr>
+            </a:pPr>
+            <a:r>
+              <a:t>3. 跳躍題設計缺乏指引 (32%)</a:t>
+            </a:r>
+          </a:p>
+          <a:p>
+            <a:pPr>
+              <a:spcAft>
+                <a:spcPts val="1200"/>
+              </a:spcAft>
+              <a:defRPr sz="1500">
+                <a:solidFill>
+                  <a:srgbClr val="495057"/>
+                </a:solidFill>
+                <a:latin typeface="Microsoft JhengHei"/>
+              </a:defRPr>
+            </a:pPr>
+            <a:r>
+              <a:t>不知道如何結合數位設計高挑戰題（跳躍題信心僅 2.68 分）。</a:t>
             </a:r>
           </a:p>
         </p:txBody>
@@ -5068,8 +4939,8 @@
         </p:nvSpPr>
         <p:spPr>
           <a:xfrm>
-            <a:off x="6217920" y="1463040"/>
-            <a:ext cx="5212080" cy="4754880"/>
+            <a:off x="6217920" y="1508760"/>
+            <a:ext cx="5212080" cy="4663440"/>
           </a:xfrm>
           <a:prstGeom prst="roundRect">
             <a:avLst/>
@@ -5077,9 +4948,9 @@
           <a:solidFill>
             <a:srgbClr val="FFFFFF"/>
           </a:solidFill>
-          <a:ln w="19050">
+          <a:ln w="25400">
             <a:solidFill>
-              <a:srgbClr val="D8E6DE"/>
+              <a:srgbClr val="2D6A4F"/>
             </a:solidFill>
           </a:ln>
         </p:spPr>
@@ -5113,8 +4984,8 @@
         </p:nvSpPr>
         <p:spPr>
           <a:xfrm>
-            <a:off x="6492240" y="1645920"/>
-            <a:ext cx="4663440" cy="4389120"/>
+            <a:off x="6492240" y="1691640"/>
+            <a:ext cx="4663440" cy="4297680"/>
           </a:xfrm>
           <a:prstGeom prst="rect">
             <a:avLst/>
@@ -5129,9 +5000,57 @@
           <a:p>
             <a:pPr>
               <a:spcAft>
+                <a:spcPts val="1600"/>
+              </a:spcAft>
+              <a:defRPr sz="2000" b="1">
+                <a:solidFill>
+                  <a:srgbClr val="2D6A4F"/>
+                </a:solidFill>
+                <a:latin typeface="Microsoft JhengHei"/>
+              </a:defRPr>
+            </a:pPr>
+            <a:r>
+              <a:t>🎯 研習實作模組期待排行 Top 3</a:t>
+            </a:r>
+          </a:p>
+          <a:p>
+            <a:pPr>
+              <a:spcAft>
+                <a:spcPts val="200"/>
+              </a:spcAft>
+              <a:defRPr sz="1700" b="1">
+                <a:solidFill>
+                  <a:srgbClr val="2D6A4F"/>
+                </a:solidFill>
+                <a:latin typeface="Microsoft JhengHei"/>
+              </a:defRPr>
+            </a:pPr>
+            <a:r>
+              <a:t>🥇 【模組A】AI 命製跳躍任務 (10票 / 53%)</a:t>
+            </a:r>
+          </a:p>
+          <a:p>
+            <a:pPr>
+              <a:spcAft>
                 <a:spcPts val="1200"/>
               </a:spcAft>
-              <a:defRPr sz="1500" b="1">
+              <a:defRPr sz="1500">
+                <a:solidFill>
+                  <a:srgbClr val="495057"/>
+                </a:solidFill>
+                <a:latin typeface="Microsoft JhengHei"/>
+              </a:defRPr>
+            </a:pPr>
+            <a:r>
+              <a:t>用 Gemini / NotebookLM 備課，3分鐘產出高層次跳躍題。</a:t>
+            </a:r>
+          </a:p>
+          <a:p>
+            <a:pPr>
+              <a:spcAft>
+                <a:spcPts val="200"/>
+              </a:spcAft>
+              <a:defRPr sz="1700" b="1">
                 <a:solidFill>
                   <a:srgbClr val="2D6A4F"/>
                 </a:solidFill>
@@ -5139,7 +5058,23 @@
               </a:defRPr>
             </a:pPr>
             <a:r>
-              <a:t>🎯 研習實作模組票選期待排行</a:t>
+              <a:t>🥈 【模組B】Padlet 共學互學神器 (9票 / 47%)</a:t>
+            </a:r>
+          </a:p>
+          <a:p>
+            <a:pPr>
+              <a:spcAft>
+                <a:spcPts val="1200"/>
+              </a:spcAft>
+              <a:defRPr sz="1500">
+                <a:solidFill>
+                  <a:srgbClr val="495057"/>
+                </a:solidFill>
+                <a:latin typeface="Microsoft JhengHei"/>
+              </a:defRPr>
+            </a:pPr>
+            <a:r>
+              <a:t>免付費互動牆，小組討論一鍵張貼，串聯大螢幕共構。</a:t>
             </a:r>
           </a:p>
           <a:p>
@@ -5147,7 +5082,7 @@
               <a:spcAft>
                 <a:spcPts val="200"/>
               </a:spcAft>
-              <a:defRPr sz="1200" b="1">
+              <a:defRPr sz="1700" b="1">
                 <a:solidFill>
                   <a:srgbClr val="2D6A4F"/>
                 </a:solidFill>
@@ -5155,87 +5090,23 @@
               </a:defRPr>
             </a:pPr>
             <a:r>
-              <a:t>🥇 【模組A】AI Agent 命製跳躍任務 (10票 / 53%)</a:t>
-            </a:r>
-          </a:p>
-          <a:p>
-            <a:pPr>
-              <a:spcAft>
-                <a:spcPts val="800"/>
-              </a:spcAft>
-              <a:defRPr sz="1050">
-                <a:solidFill>
-                  <a:srgbClr val="6C757D"/>
-                </a:solidFill>
-                <a:latin typeface="Microsoft JhengHei"/>
-              </a:defRPr>
-            </a:pPr>
-            <a:r>
-              <a:t>利用 Antigravity / Gemini / NotebookLM 備課，3分鐘產出跳躍任務與引導提問。</a:t>
-            </a:r>
-          </a:p>
-          <a:p>
-            <a:pPr>
-              <a:spcAft>
-                <a:spcPts val="200"/>
-              </a:spcAft>
-              <a:defRPr sz="1200" b="1">
-                <a:solidFill>
-                  <a:srgbClr val="2D6A4F"/>
-                </a:solidFill>
-                <a:latin typeface="Microsoft JhengHei"/>
-              </a:defRPr>
-            </a:pPr>
-            <a:r>
-              <a:t>🥈 【模組B】Padlet 小組共學互學神器 (9票 / 47%)</a:t>
-            </a:r>
-          </a:p>
-          <a:p>
-            <a:pPr>
-              <a:spcAft>
-                <a:spcPts val="800"/>
-              </a:spcAft>
-              <a:defRPr sz="1050">
-                <a:solidFill>
-                  <a:srgbClr val="6C757D"/>
-                </a:solidFill>
-                <a:latin typeface="Microsoft JhengHei"/>
-              </a:defRPr>
-            </a:pPr>
-            <a:r>
-              <a:t>免付費數位互動工具，支援小組共學互學與全班思維在大螢幕上的串聯。</a:t>
-            </a:r>
-          </a:p>
-          <a:p>
-            <a:pPr>
-              <a:spcAft>
-                <a:spcPts val="200"/>
-              </a:spcAft>
-              <a:defRPr sz="1200" b="1">
-                <a:solidFill>
-                  <a:srgbClr val="2D6A4F"/>
-                </a:solidFill>
-                <a:latin typeface="Microsoft JhengHei"/>
-              </a:defRPr>
-            </a:pPr>
-            <a:r>
-              <a:t>🥉 【模組D】破除數位分心與班級經營 (8票 / 42%)</a:t>
-            </a:r>
-          </a:p>
-          <a:p>
-            <a:pPr>
-              <a:spcAft>
-                <a:spcPts val="800"/>
-              </a:spcAft>
-              <a:defRPr sz="1050">
-                <a:solidFill>
-                  <a:srgbClr val="6C757D"/>
-                </a:solidFill>
-                <a:latin typeface="Microsoft JhengHei"/>
-              </a:defRPr>
-            </a:pPr>
-            <a:r>
-              <a:t>學習共同體下的載具班規、螢幕反轉法與快速派發常規，徹底終結耗時。</a:t>
+              <a:t>🥉 【模組D】破除分心班級經營 (8票 / 42%)</a:t>
+            </a:r>
+          </a:p>
+          <a:p>
+            <a:pPr>
+              <a:spcAft>
+                <a:spcPts val="1200"/>
+              </a:spcAft>
+              <a:defRPr sz="1500">
+                <a:solidFill>
+                  <a:srgbClr val="495057"/>
+                </a:solidFill>
+                <a:latin typeface="Microsoft JhengHei"/>
+              </a:defRPr>
+            </a:pPr>
+            <a:r>
+              <a:t>螢幕反轉法與免登入快速常規，把時間還給學生對話！</a:t>
             </a:r>
           </a:p>
         </p:txBody>
@@ -5312,7 +5183,7 @@
         <p:spPr>
           <a:xfrm>
             <a:off x="731520" y="365760"/>
-            <a:ext cx="10698480" cy="822960"/>
+            <a:ext cx="10058400" cy="1005840"/>
           </a:xfrm>
           <a:prstGeom prst="rect">
             <a:avLst/>
@@ -5326,7 +5197,10 @@
           <a:lstStyle/>
           <a:p>
             <a:pPr>
-              <a:defRPr sz="1100" b="1">
+              <a:spcAft>
+                <a:spcPts val="200"/>
+              </a:spcAft>
+              <a:defRPr sz="1300" b="1">
                 <a:solidFill>
                   <a:srgbClr val="2D6A4F"/>
                 </a:solidFill>
@@ -5334,20 +5208,20 @@
               </a:defRPr>
             </a:pPr>
             <a:r>
-              <a:t>學習共同體輔導團・2小時到校輔導教案建議</a:t>
-            </a:r>
-          </a:p>
-          <a:p>
-            <a:pPr>
-              <a:defRPr sz="2200" b="1">
-                <a:solidFill>
-                  <a:srgbClr val="2B2D42"/>
-                </a:solidFill>
-                <a:latin typeface="Microsoft JhengHei"/>
-              </a:defRPr>
-            </a:pPr>
-            <a:r>
-              <a:t>課程設計核心理念：二橋專屬破局三策</a:t>
+              <a:t>學習共同體輔導團・2小時到校輔導教案</a:t>
+            </a:r>
+          </a:p>
+          <a:p>
+            <a:pPr>
+              <a:defRPr sz="2600" b="1">
+                <a:solidFill>
+                  <a:srgbClr val="1B4332"/>
+                </a:solidFill>
+                <a:latin typeface="Microsoft JhengHei"/>
+              </a:defRPr>
+            </a:pPr>
+            <a:r>
+              <a:t>課程指導心法：二橋專屬破局三策</a:t>
             </a:r>
           </a:p>
         </p:txBody>
@@ -5368,7 +5242,7 @@
         </p:blipFill>
         <p:spPr>
           <a:xfrm>
-            <a:off x="10789920" y="320040"/>
+            <a:off x="10881360" y="365760"/>
             <a:ext cx="685800" cy="685800"/>
           </a:xfrm>
           <a:prstGeom prst="rect">
@@ -5384,8 +5258,8 @@
         </p:nvSpPr>
         <p:spPr>
           <a:xfrm>
-            <a:off x="731520" y="1463040"/>
-            <a:ext cx="3474720" cy="4754880"/>
+            <a:off x="731520" y="1508760"/>
+            <a:ext cx="3474720" cy="4663440"/>
           </a:xfrm>
           <a:prstGeom prst="roundRect">
             <a:avLst/>
@@ -5445,9 +5319,9 @@
           <a:p>
             <a:pPr>
               <a:spcAft>
-                <a:spcPts val="400"/>
-              </a:spcAft>
-              <a:defRPr sz="1300" b="1">
+                <a:spcPts val="200"/>
+              </a:spcAft>
+              <a:defRPr sz="2100" b="1">
                 <a:solidFill>
                   <a:srgbClr val="2D6A4F"/>
                 </a:solidFill>
@@ -5455,71 +5329,71 @@
               </a:defRPr>
             </a:pPr>
             <a:r>
-              <a:t>策略一：常規先行，守護實體傾聽</a:t>
-            </a:r>
-          </a:p>
-          <a:p>
-            <a:pPr>
-              <a:spcAft>
-                <a:spcPts val="1400"/>
-              </a:spcAft>
-              <a:defRPr sz="1000">
-                <a:solidFill>
-                  <a:srgbClr val="6C757D"/>
-                </a:solidFill>
-                <a:latin typeface="Microsoft JhengHei"/>
-              </a:defRPr>
-            </a:pPr>
-            <a:r>
-              <a:t>破除『載具分心』痛點</a:t>
-            </a:r>
-          </a:p>
-          <a:p>
-            <a:pPr>
-              <a:spcAft>
-                <a:spcPts val="800"/>
-              </a:spcAft>
-              <a:defRPr sz="1100">
-                <a:solidFill>
-                  <a:srgbClr val="2B2D42"/>
-                </a:solidFill>
-                <a:latin typeface="Microsoft JhengHei"/>
-              </a:defRPr>
-            </a:pPr>
-            <a:r>
-              <a:t>• 實踐『三秒蓋板 / 螢幕反轉』常規：發言時眼看同伴，載具平放。</a:t>
-            </a:r>
-          </a:p>
-          <a:p>
-            <a:pPr>
-              <a:spcAft>
-                <a:spcPts val="800"/>
-              </a:spcAft>
-              <a:defRPr sz="1100">
-                <a:solidFill>
-                  <a:srgbClr val="2B2D42"/>
-                </a:solidFill>
-                <a:latin typeface="Microsoft JhengHei"/>
-              </a:defRPr>
-            </a:pPr>
-            <a:r>
-              <a:t>• 免帳號極速入場：QR-Code 一掃即進，把登入時間由 10 分鐘壓到 30 秒。</a:t>
-            </a:r>
-          </a:p>
-          <a:p>
-            <a:pPr>
-              <a:spcAft>
-                <a:spcPts val="800"/>
-              </a:spcAft>
-              <a:defRPr sz="1100">
-                <a:solidFill>
-                  <a:srgbClr val="2B2D42"/>
-                </a:solidFill>
-                <a:latin typeface="Microsoft JhengHei"/>
-              </a:defRPr>
-            </a:pPr>
-            <a:r>
-              <a:t>• 平板是『思維筆記本』而非娛樂載具，守護課堂溫潤眼神對話。</a:t>
+              <a:t>策略一：常規先行</a:t>
+            </a:r>
+          </a:p>
+          <a:p>
+            <a:pPr>
+              <a:spcAft>
+                <a:spcPts val="1600"/>
+              </a:spcAft>
+              <a:defRPr sz="1400">
+                <a:solidFill>
+                  <a:srgbClr val="495057"/>
+                </a:solidFill>
+                <a:latin typeface="Microsoft JhengHei"/>
+              </a:defRPr>
+            </a:pPr>
+            <a:r>
+              <a:t>守護實體傾聽</a:t>
+            </a:r>
+          </a:p>
+          <a:p>
+            <a:pPr>
+              <a:spcAft>
+                <a:spcPts val="1000"/>
+              </a:spcAft>
+              <a:defRPr sz="1600">
+                <a:solidFill>
+                  <a:srgbClr val="212529"/>
+                </a:solidFill>
+                <a:latin typeface="Microsoft JhengHei"/>
+              </a:defRPr>
+            </a:pPr>
+            <a:r>
+              <a:t>• 實踐『三秒蓋板 / 螢幕反轉』：發言時眼看同伴，載具平放。</a:t>
+            </a:r>
+          </a:p>
+          <a:p>
+            <a:pPr>
+              <a:spcAft>
+                <a:spcPts val="1000"/>
+              </a:spcAft>
+              <a:defRPr sz="1600">
+                <a:solidFill>
+                  <a:srgbClr val="212529"/>
+                </a:solidFill>
+                <a:latin typeface="Microsoft JhengHei"/>
+              </a:defRPr>
+            </a:pPr>
+            <a:r>
+              <a:t>• 免帳號極速入場：QR-Code 一掃即進，登入由 10分鐘壓到 30秒。</a:t>
+            </a:r>
+          </a:p>
+          <a:p>
+            <a:pPr>
+              <a:spcAft>
+                <a:spcPts val="1000"/>
+              </a:spcAft>
+              <a:defRPr sz="1600">
+                <a:solidFill>
+                  <a:srgbClr val="212529"/>
+                </a:solidFill>
+                <a:latin typeface="Microsoft JhengHei"/>
+              </a:defRPr>
+            </a:pPr>
+            <a:r>
+              <a:t>• 平板是『思維筆記本』，守護課堂溫潤眼神對話。</a:t>
             </a:r>
           </a:p>
         </p:txBody>
@@ -5532,8 +5406,8 @@
         </p:nvSpPr>
         <p:spPr>
           <a:xfrm>
-            <a:off x="4343400" y="1463040"/>
-            <a:ext cx="3474720" cy="4754880"/>
+            <a:off x="4343400" y="1508760"/>
+            <a:ext cx="3474720" cy="4663440"/>
           </a:xfrm>
           <a:prstGeom prst="roundRect">
             <a:avLst/>
@@ -5593,9 +5467,9 @@
           <a:p>
             <a:pPr>
               <a:spcAft>
-                <a:spcPts val="400"/>
-              </a:spcAft>
-              <a:defRPr sz="1300" b="1">
+                <a:spcPts val="200"/>
+              </a:spcAft>
+              <a:defRPr sz="2100" b="1">
                 <a:solidFill>
                   <a:srgbClr val="E09F3E"/>
                 </a:solidFill>
@@ -5603,71 +5477,71 @@
               </a:defRPr>
             </a:pPr>
             <a:r>
-              <a:t>策略二：善用全校 86吋大螢幕優勢</a:t>
-            </a:r>
-          </a:p>
-          <a:p>
-            <a:pPr>
-              <a:spcAft>
-                <a:spcPts val="1400"/>
-              </a:spcAft>
-              <a:defRPr sz="1000">
-                <a:solidFill>
-                  <a:srgbClr val="6C757D"/>
-                </a:solidFill>
-                <a:latin typeface="Microsoft JhengHei"/>
-              </a:defRPr>
-            </a:pPr>
-            <a:r>
-              <a:t>破除『各自埋頭』孤島</a:t>
-            </a:r>
-          </a:p>
-          <a:p>
-            <a:pPr>
-              <a:spcAft>
-                <a:spcPts val="800"/>
-              </a:spcAft>
-              <a:defRPr sz="1100">
-                <a:solidFill>
-                  <a:srgbClr val="2B2D42"/>
-                </a:solidFill>
-                <a:latin typeface="Microsoft JhengHei"/>
-              </a:defRPr>
-            </a:pPr>
-            <a:r>
-              <a:t>• 不讓全班每人埋頭看小平板，改以 4人一組共用 1 載具共學。</a:t>
-            </a:r>
-          </a:p>
-          <a:p>
-            <a:pPr>
-              <a:spcAft>
-                <a:spcPts val="800"/>
-              </a:spcAft>
-              <a:defRPr sz="1100">
-                <a:solidFill>
-                  <a:srgbClr val="2B2D42"/>
-                </a:solidFill>
-                <a:latin typeface="Microsoft JhengHei"/>
-              </a:defRPr>
-            </a:pPr>
-            <a:r>
-              <a:t>• 各組多元思考與疑惑一秒推播至黑板 86吋大螢幕。</a:t>
-            </a:r>
-          </a:p>
-          <a:p>
-            <a:pPr>
-              <a:spcAft>
-                <a:spcPts val="800"/>
-              </a:spcAft>
-              <a:defRPr sz="1100">
-                <a:solidFill>
-                  <a:srgbClr val="2B2D42"/>
-                </a:solidFill>
-                <a:latin typeface="Microsoft JhengHei"/>
-              </a:defRPr>
-            </a:pPr>
-            <a:r>
-              <a:t>• 老師直接在觸控大屏上圈選、拉線、對比，促發高階共構對話。</a:t>
+              <a:t>策略二：善用 86吋大屏</a:t>
+            </a:r>
+          </a:p>
+          <a:p>
+            <a:pPr>
+              <a:spcAft>
+                <a:spcPts val="1600"/>
+              </a:spcAft>
+              <a:defRPr sz="1400">
+                <a:solidFill>
+                  <a:srgbClr val="495057"/>
+                </a:solidFill>
+                <a:latin typeface="Microsoft JhengHei"/>
+              </a:defRPr>
+            </a:pPr>
+            <a:r>
+              <a:t>告別個別孤島</a:t>
+            </a:r>
+          </a:p>
+          <a:p>
+            <a:pPr>
+              <a:spcAft>
+                <a:spcPts val="1000"/>
+              </a:spcAft>
+              <a:defRPr sz="1600">
+                <a:solidFill>
+                  <a:srgbClr val="212529"/>
+                </a:solidFill>
+                <a:latin typeface="Microsoft JhengHei"/>
+              </a:defRPr>
+            </a:pPr>
+            <a:r>
+              <a:t>• 不推生生用平板各自孤立，改以 4人一組共用 1 載具共學。</a:t>
+            </a:r>
+          </a:p>
+          <a:p>
+            <a:pPr>
+              <a:spcAft>
+                <a:spcPts val="1000"/>
+              </a:spcAft>
+              <a:defRPr sz="1600">
+                <a:solidFill>
+                  <a:srgbClr val="212529"/>
+                </a:solidFill>
+                <a:latin typeface="Microsoft JhengHei"/>
+              </a:defRPr>
+            </a:pPr>
+            <a:r>
+              <a:t>• 各組多元解法一秒推播至黑板 86 吋觸控大螢幕。</a:t>
+            </a:r>
+          </a:p>
+          <a:p>
+            <a:pPr>
+              <a:spcAft>
+                <a:spcPts val="1000"/>
+              </a:spcAft>
+              <a:defRPr sz="1600">
+                <a:solidFill>
+                  <a:srgbClr val="212529"/>
+                </a:solidFill>
+                <a:latin typeface="Microsoft JhengHei"/>
+              </a:defRPr>
+            </a:pPr>
+            <a:r>
+              <a:t>• 教師在大屏圈選、對比，促發全班高階共構對話。</a:t>
             </a:r>
           </a:p>
         </p:txBody>
@@ -5680,8 +5554,8 @@
         </p:nvSpPr>
         <p:spPr>
           <a:xfrm>
-            <a:off x="7955280" y="1463040"/>
-            <a:ext cx="3474720" cy="4754880"/>
+            <a:off x="7955280" y="1508760"/>
+            <a:ext cx="3474720" cy="4663440"/>
           </a:xfrm>
           <a:prstGeom prst="roundRect">
             <a:avLst/>
@@ -5741,9 +5615,9 @@
           <a:p>
             <a:pPr>
               <a:spcAft>
-                <a:spcPts val="400"/>
-              </a:spcAft>
-              <a:defRPr sz="1300" b="1">
+                <a:spcPts val="200"/>
+              </a:spcAft>
+              <a:defRPr sz="2100" b="1">
                 <a:solidFill>
                   <a:srgbClr val="E76F51"/>
                 </a:solidFill>
@@ -5751,71 +5625,71 @@
               </a:defRPr>
             </a:pPr>
             <a:r>
-              <a:t>策略三：AI 賦能命製伸展跳躍任務</a:t>
-            </a:r>
-          </a:p>
-          <a:p>
-            <a:pPr>
-              <a:spcAft>
-                <a:spcPts val="1400"/>
-              </a:spcAft>
-              <a:defRPr sz="1000">
-                <a:solidFill>
-                  <a:srgbClr val="6C757D"/>
-                </a:solidFill>
-                <a:latin typeface="Microsoft JhengHei"/>
-              </a:defRPr>
-            </a:pPr>
-            <a:r>
-              <a:t>突破『2.68分設計信心』瓶頸</a:t>
-            </a:r>
-          </a:p>
-          <a:p>
-            <a:pPr>
-              <a:spcAft>
-                <a:spcPts val="800"/>
-              </a:spcAft>
-              <a:defRPr sz="1100">
-                <a:solidFill>
-                  <a:srgbClr val="2B2D42"/>
-                </a:solidFill>
-                <a:latin typeface="Microsoft JhengHei"/>
-              </a:defRPr>
-            </a:pPr>
-            <a:r>
-              <a:t>• 將康軒/南一/翰林課本段落丟給 AI，3分鐘解構文本三層次。</a:t>
-            </a:r>
-          </a:p>
-          <a:p>
-            <a:pPr>
-              <a:spcAft>
-                <a:spcPts val="800"/>
-              </a:spcAft>
-              <a:defRPr sz="1100">
-                <a:solidFill>
-                  <a:srgbClr val="2B2D42"/>
-                </a:solidFill>
-                <a:latin typeface="Microsoft JhengHei"/>
-              </a:defRPr>
-            </a:pPr>
-            <a:r>
-              <a:t>• 產出符合學共哲學的『伸展跳躍任務 (Jumping Task)』與階梯題。</a:t>
-            </a:r>
-          </a:p>
-          <a:p>
-            <a:pPr>
-              <a:spcAft>
-                <a:spcPts val="800"/>
-              </a:spcAft>
-              <a:defRPr sz="1100">
-                <a:solidFill>
-                  <a:srgbClr val="2B2D42"/>
-                </a:solidFill>
-                <a:latin typeface="Microsoft JhengHei"/>
-              </a:defRPr>
-            </a:pPr>
-            <a:r>
-              <a:t>• 現場帶著全體老師實作，每人帶走下週立即可用的教案！</a:t>
+              <a:t>策略三：AI 命題跳躍題</a:t>
+            </a:r>
+          </a:p>
+          <a:p>
+            <a:pPr>
+              <a:spcAft>
+                <a:spcPts val="1600"/>
+              </a:spcAft>
+              <a:defRPr sz="1400">
+                <a:solidFill>
+                  <a:srgbClr val="495057"/>
+                </a:solidFill>
+                <a:latin typeface="Microsoft JhengHei"/>
+              </a:defRPr>
+            </a:pPr>
+            <a:r>
+              <a:t>突破 2.68分信心瓶頸</a:t>
+            </a:r>
+          </a:p>
+          <a:p>
+            <a:pPr>
+              <a:spcAft>
+                <a:spcPts val="1000"/>
+              </a:spcAft>
+              <a:defRPr sz="1600">
+                <a:solidFill>
+                  <a:srgbClr val="212529"/>
+                </a:solidFill>
+                <a:latin typeface="Microsoft JhengHei"/>
+              </a:defRPr>
+            </a:pPr>
+            <a:r>
+              <a:t>• 課本單元丟給 AI，3分鐘解構文本三層次思維。</a:t>
+            </a:r>
+          </a:p>
+          <a:p>
+            <a:pPr>
+              <a:spcAft>
+                <a:spcPts val="1000"/>
+              </a:spcAft>
+              <a:defRPr sz="1600">
+                <a:solidFill>
+                  <a:srgbClr val="212529"/>
+                </a:solidFill>
+                <a:latin typeface="Microsoft JhengHei"/>
+              </a:defRPr>
+            </a:pPr>
+            <a:r>
+              <a:t>• 產出具備認知衝突的『伸展跳躍任務 (Jumping Task)』。</a:t>
+            </a:r>
+          </a:p>
+          <a:p>
+            <a:pPr>
+              <a:spcAft>
+                <a:spcPts val="1000"/>
+              </a:spcAft>
+              <a:defRPr sz="1600">
+                <a:solidFill>
+                  <a:srgbClr val="212529"/>
+                </a:solidFill>
+                <a:latin typeface="Microsoft JhengHei"/>
+              </a:defRPr>
+            </a:pPr>
+            <a:r>
+              <a:t>• 研習現場實作，每位老師帶走下週立即可用的教案！</a:t>
             </a:r>
           </a:p>
         </p:txBody>
@@ -5892,7 +5766,7 @@
         <p:spPr>
           <a:xfrm>
             <a:off x="731520" y="365760"/>
-            <a:ext cx="10698480" cy="822960"/>
+            <a:ext cx="10058400" cy="1005840"/>
           </a:xfrm>
           <a:prstGeom prst="rect">
             <a:avLst/>
@@ -5906,7 +5780,10 @@
           <a:lstStyle/>
           <a:p>
             <a:pPr>
-              <a:defRPr sz="1100" b="1">
+              <a:spcAft>
+                <a:spcPts val="200"/>
+              </a:spcAft>
+              <a:defRPr sz="1300" b="1">
                 <a:solidFill>
                   <a:srgbClr val="2D6A4F"/>
                 </a:solidFill>
@@ -5914,20 +5791,20 @@
               </a:defRPr>
             </a:pPr>
             <a:r>
-              <a:t>學習共同體輔導團・2小時到校輔導教案建議</a:t>
-            </a:r>
-          </a:p>
-          <a:p>
-            <a:pPr>
-              <a:defRPr sz="2200" b="1">
-                <a:solidFill>
-                  <a:srgbClr val="2B2D42"/>
-                </a:solidFill>
-                <a:latin typeface="Microsoft JhengHei"/>
-              </a:defRPr>
-            </a:pPr>
-            <a:r>
-              <a:t>2小時工作坊教案流程總覽（精確至分鐘）</a:t>
+              <a:t>學習共同體輔導團・2小時到校輔導教案</a:t>
+            </a:r>
+          </a:p>
+          <a:p>
+            <a:pPr>
+              <a:defRPr sz="2600" b="1">
+                <a:solidFill>
+                  <a:srgbClr val="1B4332"/>
+                </a:solidFill>
+                <a:latin typeface="Microsoft JhengHei"/>
+              </a:defRPr>
+            </a:pPr>
+            <a:r>
+              <a:t>2小時工作坊教案流程總覽（起承轉合）</a:t>
             </a:r>
           </a:p>
         </p:txBody>
@@ -5948,7 +5825,7 @@
         </p:blipFill>
         <p:spPr>
           <a:xfrm>
-            <a:off x="10789920" y="320040"/>
+            <a:off x="10881360" y="365760"/>
             <a:ext cx="685800" cy="685800"/>
           </a:xfrm>
           <a:prstGeom prst="rect">
@@ -5965,8 +5842,8 @@
           <p:nvPr/>
         </p:nvGraphicFramePr>
         <p:xfrm>
-          <a:off x="731520" y="1463040"/>
-          <a:ext cx="10728655" cy="4754880"/>
+          <a:off x="731520" y="1508760"/>
+          <a:ext cx="10728655" cy="4663440"/>
         </p:xfrm>
         <a:graphic>
           <a:graphicData uri="http://schemas.openxmlformats.org/drawingml/2006/table">
@@ -5976,18 +5853,18 @@
               </a:tblPr>
               <a:tblGrid>
                 <a:gridCol w="1645920"/>
-                <a:gridCol w="2011680"/>
-                <a:gridCol w="5029200"/>
+                <a:gridCol w="2103120"/>
+                <a:gridCol w="4937760"/>
                 <a:gridCol w="2041855"/>
               </a:tblGrid>
-              <a:tr h="792480">
+              <a:tr h="777240">
                 <a:tc>
                   <a:txBody>
                     <a:bodyPr/>
                     <a:lstStyle/>
                     <a:p>
                       <a:pPr algn="ctr">
-                        <a:defRPr sz="1100" b="1">
+                        <a:defRPr sz="1500" b="1">
                           <a:solidFill>
                             <a:srgbClr val="FFFFFF"/>
                           </a:solidFill>
@@ -5995,13 +5872,13 @@
                         </a:defRPr>
                       </a:pPr>
                       <a:r>
-                        <a:t>時間配比</a:t>
+                        <a:t>時間</a:t>
                       </a:r>
                     </a:p>
                   </a:txBody>
                   <a:tcPr>
                     <a:solidFill>
-                      <a:srgbClr val="214D38"/>
+                      <a:srgbClr val="1B4332"/>
                     </a:solidFill>
                   </a:tcPr>
                 </a:tc>
@@ -6011,7 +5888,7 @@
                     <a:lstStyle/>
                     <a:p>
                       <a:pPr algn="ctr">
-                        <a:defRPr sz="1100" b="1">
+                        <a:defRPr sz="1500" b="1">
                           <a:solidFill>
                             <a:srgbClr val="FFFFFF"/>
                           </a:solidFill>
@@ -6025,7 +5902,7 @@
                   </a:txBody>
                   <a:tcPr>
                     <a:solidFill>
-                      <a:srgbClr val="214D38"/>
+                      <a:srgbClr val="1B4332"/>
                     </a:solidFill>
                   </a:tcPr>
                 </a:tc>
@@ -6035,7 +5912,7 @@
                     <a:lstStyle/>
                     <a:p>
                       <a:pPr algn="ctr">
-                        <a:defRPr sz="1100" b="1">
+                        <a:defRPr sz="1500" b="1">
                           <a:solidFill>
                             <a:srgbClr val="FFFFFF"/>
                           </a:solidFill>
@@ -6043,13 +5920,13 @@
                         </a:defRPr>
                       </a:pPr>
                       <a:r>
-                        <a:t>研習內容與教師實作任務</a:t>
+                        <a:t>研習核心實作任務</a:t>
                       </a:r>
                     </a:p>
                   </a:txBody>
                   <a:tcPr>
                     <a:solidFill>
-                      <a:srgbClr val="214D38"/>
+                      <a:srgbClr val="1B4332"/>
                     </a:solidFill>
                   </a:tcPr>
                 </a:tc>
@@ -6059,7 +5936,7 @@
                     <a:lstStyle/>
                     <a:p>
                       <a:pPr algn="ctr">
-                        <a:defRPr sz="1100" b="1">
+                        <a:defRPr sz="1500" b="1">
                           <a:solidFill>
                             <a:srgbClr val="FFFFFF"/>
                           </a:solidFill>
@@ -6073,27 +5950,27 @@
                   </a:txBody>
                   <a:tcPr>
                     <a:solidFill>
-                      <a:srgbClr val="214D38"/>
+                      <a:srgbClr val="1B4332"/>
                     </a:solidFill>
                   </a:tcPr>
                 </a:tc>
               </a:tr>
-              <a:tr h="792480">
+              <a:tr h="777240">
                 <a:tc>
                   <a:txBody>
                     <a:bodyPr/>
                     <a:lstStyle/>
                     <a:p>
                       <a:pPr algn="ctr">
-                        <a:defRPr sz="1000" b="1">
+                        <a:defRPr sz="1400" b="1">
                           <a:solidFill>
-                            <a:srgbClr val="2B2D42"/>
+                            <a:srgbClr val="212529"/>
                           </a:solidFill>
                           <a:latin typeface="Microsoft JhengHei"/>
                         </a:defRPr>
                       </a:pPr>
                       <a:r>
-                        <a:t>00:00 - 00:15</a:t>
+                        <a:t>00:00-00:15</a:t>
                       </a:r>
                     </a:p>
                     <a:p>
@@ -6114,9 +5991,9 @@
                     <a:lstStyle/>
                     <a:p>
                       <a:pPr algn="ctr">
-                        <a:defRPr sz="1000" b="1">
+                        <a:defRPr sz="1400" b="1">
                           <a:solidFill>
-                            <a:srgbClr val="2B2D42"/>
+                            <a:srgbClr val="212529"/>
                           </a:solidFill>
                           <a:latin typeface="Microsoft JhengHei"/>
                         </a:defRPr>
@@ -6143,25 +6020,20 @@
                     <a:lstStyle/>
                     <a:p>
                       <a:pPr>
-                        <a:defRPr sz="1000">
+                        <a:defRPr sz="1400">
                           <a:solidFill>
-                            <a:srgbClr val="2B2D42"/>
+                            <a:srgbClr val="212529"/>
                           </a:solidFill>
                           <a:latin typeface="Microsoft JhengHei"/>
                         </a:defRPr>
                       </a:pPr>
                       <a:r>
-                        <a:t>1. 投放大螢幕展示二橋 19 位教師真實填答痛點雷達圖</a:t>
+                        <a:t>• 投放大螢幕展示二橋 19 位教師真實痛點數據</a:t>
                       </a:r>
                     </a:p>
                     <a:p>
                       <a:r>
-                        <a:t>2. 點破關鍵盲點：「數位不是主角，傾聽關係才是靈魂」</a:t>
-                      </a:r>
-                    </a:p>
-                    <a:p>
-                      <a:r>
-                        <a:t>3. 確立今日目標：下週一就能直接帶進班級的輕量化流程</a:t>
+                        <a:t>• 點破盲點：「數位是梯子，傾聽才是靈魂」</a:t>
                       </a:r>
                     </a:p>
                   </a:txBody>
@@ -6177,15 +6049,15 @@
                     <a:lstStyle/>
                     <a:p>
                       <a:pPr algn="ctr">
-                        <a:defRPr sz="1000" b="1">
+                        <a:defRPr sz="1400" b="1">
                           <a:solidFill>
-                            <a:srgbClr val="2B2D42"/>
+                            <a:srgbClr val="E76F51"/>
                           </a:solidFill>
                           <a:latin typeface="Microsoft JhengHei"/>
                         </a:defRPr>
                       </a:pPr>
                       <a:r>
-                        <a:t>破冰引導</a:t>
+                        <a:t>破冰共鳴</a:t>
                       </a:r>
                     </a:p>
                     <a:p>
@@ -6201,22 +6073,22 @@
                   </a:tcPr>
                 </a:tc>
               </a:tr>
-              <a:tr h="792480">
+              <a:tr h="777240">
                 <a:tc>
                   <a:txBody>
                     <a:bodyPr/>
                     <a:lstStyle/>
                     <a:p>
                       <a:pPr algn="ctr">
-                        <a:defRPr sz="1000" b="1">
+                        <a:defRPr sz="1400" b="1">
                           <a:solidFill>
-                            <a:srgbClr val="2B2D42"/>
+                            <a:srgbClr val="212529"/>
                           </a:solidFill>
                           <a:latin typeface="Microsoft JhengHei"/>
                         </a:defRPr>
                       </a:pPr>
                       <a:r>
-                        <a:t>00:15 - 00:40</a:t>
+                        <a:t>00:15-00:40</a:t>
                       </a:r>
                     </a:p>
                     <a:p>
@@ -6227,7 +6099,7 @@
                   </a:txBody>
                   <a:tcPr>
                     <a:solidFill>
-                      <a:srgbClr val="F0F7F3"/>
+                      <a:srgbClr val="EEF6F1"/>
                     </a:solidFill>
                   </a:tcPr>
                 </a:tc>
@@ -6237,9 +6109,9 @@
                     <a:lstStyle/>
                     <a:p>
                       <a:pPr algn="ctr">
-                        <a:defRPr sz="1000" b="1">
+                        <a:defRPr sz="1400" b="1">
                           <a:solidFill>
-                            <a:srgbClr val="2B2D42"/>
+                            <a:srgbClr val="212529"/>
                           </a:solidFill>
                           <a:latin typeface="Microsoft JhengHei"/>
                         </a:defRPr>
@@ -6256,7 +6128,7 @@
                   </a:txBody>
                   <a:tcPr>
                     <a:solidFill>
-                      <a:srgbClr val="F0F7F3"/>
+                      <a:srgbClr val="EEF6F1"/>
                     </a:solidFill>
                   </a:tcPr>
                 </a:tc>
@@ -6266,31 +6138,26 @@
                     <a:lstStyle/>
                     <a:p>
                       <a:pPr>
-                        <a:defRPr sz="1000">
+                        <a:defRPr sz="1400">
                           <a:solidFill>
-                            <a:srgbClr val="2B2D42"/>
+                            <a:srgbClr val="212529"/>
                           </a:solidFill>
                           <a:latin typeface="Microsoft JhengHei"/>
                         </a:defRPr>
                       </a:pPr>
                       <a:r>
-                        <a:t>1. 免帳號極速入場法：QR-Code 30秒直達，免去繁瑣登入</a:t>
+                        <a:t>• 免帳號極速入場：QR-Code 30秒進入討論</a:t>
                       </a:r>
                     </a:p>
                     <a:p>
                       <a:r>
-                        <a:t>2. 「螢幕蓋板 / 視線回收」三步驟：說話看眼睛、平放載具</a:t>
-                      </a:r>
-                    </a:p>
-                    <a:p>
-                      <a:r>
-                        <a:t>3. 低年級專用防卡關：顏色分組標籤、拍照語音上傳法</a:t>
+                        <a:t>• 「三秒蓋板」常規：說話看眼睛、平放載具</a:t>
                       </a:r>
                     </a:p>
                   </a:txBody>
                   <a:tcPr>
                     <a:solidFill>
-                      <a:srgbClr val="F0F7F3"/>
+                      <a:srgbClr val="EEF6F1"/>
                     </a:solidFill>
                   </a:tcPr>
                 </a:tc>
@@ -6300,9 +6167,9 @@
                     <a:lstStyle/>
                     <a:p>
                       <a:pPr algn="ctr">
-                        <a:defRPr sz="1000" b="1">
+                        <a:defRPr sz="1400" b="1">
                           <a:solidFill>
-                            <a:srgbClr val="2B2D42"/>
+                            <a:srgbClr val="E76F51"/>
                           </a:solidFill>
                           <a:latin typeface="Microsoft JhengHei"/>
                         </a:defRPr>
@@ -6313,38 +6180,38 @@
                     </a:p>
                     <a:p>
                       <a:r>
-                        <a:t>破除載具分心</a:t>
+                        <a:t>終結操作耗時</a:t>
                       </a:r>
                     </a:p>
                     <a:p>
                       <a:r>
-                        <a:t>消滅操作耗時</a:t>
+                        <a:t>破除學生分心</a:t>
                       </a:r>
                     </a:p>
                   </a:txBody>
                   <a:tcPr>
                     <a:solidFill>
-                      <a:srgbClr val="F0F7F3"/>
+                      <a:srgbClr val="EEF6F1"/>
                     </a:solidFill>
                   </a:tcPr>
                 </a:tc>
               </a:tr>
-              <a:tr h="792480">
+              <a:tr h="777240">
                 <a:tc>
                   <a:txBody>
                     <a:bodyPr/>
                     <a:lstStyle/>
                     <a:p>
                       <a:pPr algn="ctr">
-                        <a:defRPr sz="1000" b="1">
+                        <a:defRPr sz="1400" b="1">
                           <a:solidFill>
-                            <a:srgbClr val="2B2D42"/>
+                            <a:srgbClr val="212529"/>
                           </a:solidFill>
                           <a:latin typeface="Microsoft JhengHei"/>
                         </a:defRPr>
                       </a:pPr>
                       <a:r>
-                        <a:t>00:40 - 01:10</a:t>
+                        <a:t>00:40-01:10</a:t>
                       </a:r>
                     </a:p>
                     <a:p>
@@ -6365,9 +6232,9 @@
                     <a:lstStyle/>
                     <a:p>
                       <a:pPr algn="ctr">
-                        <a:defRPr sz="1000" b="1">
+                        <a:defRPr sz="1400" b="1">
                           <a:solidFill>
-                            <a:srgbClr val="2B2D42"/>
+                            <a:srgbClr val="212529"/>
                           </a:solidFill>
                           <a:latin typeface="Microsoft JhengHei"/>
                         </a:defRPr>
@@ -6394,25 +6261,20 @@
                     <a:lstStyle/>
                     <a:p>
                       <a:pPr>
-                        <a:defRPr sz="1000">
+                        <a:defRPr sz="1400">
                           <a:solidFill>
-                            <a:srgbClr val="2B2D42"/>
+                            <a:srgbClr val="212529"/>
                           </a:solidFill>
                           <a:latin typeface="Microsoft JhengHei"/>
                         </a:defRPr>
                       </a:pPr>
                       <a:r>
-                        <a:t>1. 4人小組共用 1 平板：Padlet 免登入互動牆實務演練</a:t>
+                        <a:t>• 4人小組共用1載具：Padlet 免登入互動演練</a:t>
                       </a:r>
                     </a:p>
                     <a:p>
                       <a:r>
-                        <a:t>2. 86吋觸控大螢幕串聯：把各組解法秒投大屏，現場圈選對比</a:t>
-                      </a:r>
-                    </a:p>
-                    <a:p>
-                      <a:r>
-                        <a:t>3. 促發互學共構：從個別作業轉變為全班高光思維對話</a:t>
+                        <a:t>• 86吋觸控大螢幕串聯：各組解法秒上大屏圈選</a:t>
                       </a:r>
                     </a:p>
                   </a:txBody>
@@ -6428,9 +6290,9 @@
                     <a:lstStyle/>
                     <a:p>
                       <a:pPr algn="ctr">
-                        <a:defRPr sz="1000" b="1">
+                        <a:defRPr sz="1400" b="1">
                           <a:solidFill>
-                            <a:srgbClr val="2B2D42"/>
+                            <a:srgbClr val="E76F51"/>
                           </a:solidFill>
                           <a:latin typeface="Microsoft JhengHei"/>
                         </a:defRPr>
@@ -6446,7 +6308,7 @@
                     </a:p>
                     <a:p>
                       <a:r>
-                        <a:t>全班大螢幕對話</a:t>
+                        <a:t>大螢幕高階共構</a:t>
                       </a:r>
                     </a:p>
                   </a:txBody>
@@ -6457,22 +6319,22 @@
                   </a:tcPr>
                 </a:tc>
               </a:tr>
-              <a:tr h="792480">
+              <a:tr h="777240">
                 <a:tc>
                   <a:txBody>
                     <a:bodyPr/>
                     <a:lstStyle/>
                     <a:p>
                       <a:pPr algn="ctr">
-                        <a:defRPr sz="1000" b="1">
+                        <a:defRPr sz="1400" b="1">
                           <a:solidFill>
-                            <a:srgbClr val="2B2D42"/>
+                            <a:srgbClr val="212529"/>
                           </a:solidFill>
                           <a:latin typeface="Microsoft JhengHei"/>
                         </a:defRPr>
                       </a:pPr>
                       <a:r>
-                        <a:t>01:10 - 01:50</a:t>
+                        <a:t>01:10-01:50</a:t>
                       </a:r>
                     </a:p>
                     <a:p>
@@ -6483,7 +6345,7 @@
                   </a:txBody>
                   <a:tcPr>
                     <a:solidFill>
-                      <a:srgbClr val="F0F7F3"/>
+                      <a:srgbClr val="EEF6F1"/>
                     </a:solidFill>
                   </a:tcPr>
                 </a:tc>
@@ -6493,9 +6355,9 @@
                     <a:lstStyle/>
                     <a:p>
                       <a:pPr algn="ctr">
-                        <a:defRPr sz="1000" b="1">
+                        <a:defRPr sz="1400" b="1">
                           <a:solidFill>
-                            <a:srgbClr val="2B2D42"/>
+                            <a:srgbClr val="212529"/>
                           </a:solidFill>
                           <a:latin typeface="Microsoft JhengHei"/>
                         </a:defRPr>
@@ -6512,7 +6374,7 @@
                   </a:txBody>
                   <a:tcPr>
                     <a:solidFill>
-                      <a:srgbClr val="F0F7F3"/>
+                      <a:srgbClr val="EEF6F1"/>
                     </a:solidFill>
                   </a:tcPr>
                 </a:tc>
@@ -6522,31 +6384,26 @@
                     <a:lstStyle/>
                     <a:p>
                       <a:pPr>
-                        <a:defRPr sz="1000">
+                        <a:defRPr sz="1400">
                           <a:solidFill>
-                            <a:srgbClr val="2B2D42"/>
+                            <a:srgbClr val="212529"/>
                           </a:solidFill>
                           <a:latin typeface="Microsoft JhengHei"/>
                         </a:defRPr>
                       </a:pPr>
                       <a:r>
-                        <a:t>1. 文本解構三層次：基礎提取 ➔ 推論統整 ➔ 伸展跳躍</a:t>
+                        <a:t>• 文本解構三層次：提取 ➔ 統整 ➔ 伸展跳躍</a:t>
                       </a:r>
                     </a:p>
                     <a:p>
                       <a:r>
-                        <a:t>2. AI 咒語實操：用 Gemini / ChatGPT 30秒生成 Jumping Task</a:t>
-                      </a:r>
-                    </a:p>
-                    <a:p>
-                      <a:r>
-                        <a:t>3. 實作產出：每位老師現場完成一題下週的跳躍任務教案</a:t>
+                        <a:t>• AI 咒語實戰：現場產出下週可用跳躍題教案</a:t>
                       </a:r>
                     </a:p>
                   </a:txBody>
                   <a:tcPr>
                     <a:solidFill>
-                      <a:srgbClr val="F0F7F3"/>
+                      <a:srgbClr val="EEF6F1"/>
                     </a:solidFill>
                   </a:tcPr>
                 </a:tc>
@@ -6556,9 +6413,9 @@
                     <a:lstStyle/>
                     <a:p>
                       <a:pPr algn="ctr">
-                        <a:defRPr sz="1000" b="1">
+                        <a:defRPr sz="1400" b="1">
                           <a:solidFill>
-                            <a:srgbClr val="2B2D42"/>
+                            <a:srgbClr val="E76F51"/>
                           </a:solidFill>
                           <a:latin typeface="Microsoft JhengHei"/>
                         </a:defRPr>
@@ -6569,7 +6426,7 @@
                     </a:p>
                     <a:p>
                       <a:r>
-                        <a:t>AI 輔助備課</a:t>
+                        <a:t>AI 備課賦能</a:t>
                       </a:r>
                     </a:p>
                     <a:p>
@@ -6580,27 +6437,27 @@
                   </a:txBody>
                   <a:tcPr>
                     <a:solidFill>
-                      <a:srgbClr val="F0F7F3"/>
+                      <a:srgbClr val="EEF6F1"/>
                     </a:solidFill>
                   </a:tcPr>
                 </a:tc>
               </a:tr>
-              <a:tr h="792480">
+              <a:tr h="777240">
                 <a:tc>
                   <a:txBody>
                     <a:bodyPr/>
                     <a:lstStyle/>
                     <a:p>
                       <a:pPr algn="ctr">
-                        <a:defRPr sz="1000" b="1">
+                        <a:defRPr sz="1400" b="1">
                           <a:solidFill>
-                            <a:srgbClr val="2B2D42"/>
+                            <a:srgbClr val="212529"/>
                           </a:solidFill>
                           <a:latin typeface="Microsoft JhengHei"/>
                         </a:defRPr>
                       </a:pPr>
                       <a:r>
-                        <a:t>01:50 - 02:00</a:t>
+                        <a:t>01:50-02:00</a:t>
                       </a:r>
                     </a:p>
                     <a:p>
@@ -6621,9 +6478,9 @@
                     <a:lstStyle/>
                     <a:p>
                       <a:pPr algn="ctr">
-                        <a:defRPr sz="1000" b="1">
+                        <a:defRPr sz="1400" b="1">
                           <a:solidFill>
-                            <a:srgbClr val="2B2D42"/>
+                            <a:srgbClr val="212529"/>
                           </a:solidFill>
                           <a:latin typeface="Microsoft JhengHei"/>
                         </a:defRPr>
@@ -6650,25 +6507,20 @@
                     <a:lstStyle/>
                     <a:p>
                       <a:pPr>
-                        <a:defRPr sz="1000">
+                        <a:defRPr sz="1400">
                           <a:solidFill>
-                            <a:srgbClr val="2B2D42"/>
+                            <a:srgbClr val="212529"/>
                           </a:solidFill>
                           <a:latin typeface="Microsoft JhengHei"/>
                         </a:defRPr>
                       </a:pPr>
                       <a:r>
-                        <a:t>1. 現場 Q&amp;A：精準回答二橋老師個別提問（低年級、互動教材）</a:t>
+                        <a:t>• 精準回答二橋老師個別提問（低年級、互動教材）</a:t>
                       </a:r>
                     </a:p>
                     <a:p>
                       <a:r>
-                        <a:t>2. 總結收斂：載具少一點，思考深一點；工具當階梯，互學成常規</a:t>
-                      </a:r>
-                    </a:p>
-                    <a:p>
-                      <a:r>
-                        <a:t>3. 發布「二橋專屬數位學共資源包」雲端共享連結</a:t>
+                        <a:t>• 發布「二橋專屬數位學共資源包」雲端連結</a:t>
                       </a:r>
                     </a:p>
                   </a:txBody>
@@ -6684,20 +6536,20 @@
                     <a:lstStyle/>
                     <a:p>
                       <a:pPr algn="ctr">
-                        <a:defRPr sz="1000" b="1">
+                        <a:defRPr sz="1400" b="1">
                           <a:solidFill>
-                            <a:srgbClr val="2B2D42"/>
+                            <a:srgbClr val="E76F51"/>
                           </a:solidFill>
                           <a:latin typeface="Microsoft JhengHei"/>
                         </a:defRPr>
                       </a:pPr>
                       <a:r>
-                        <a:t>二橋提問現場破解</a:t>
+                        <a:t>個別提問現場破解</a:t>
                       </a:r>
                     </a:p>
                     <a:p>
                       <a:r>
-                        <a:t>課後陪伴支持</a:t>
+                        <a:t>課後持續陪伴</a:t>
                       </a:r>
                     </a:p>
                   </a:txBody>
@@ -6784,7 +6636,7 @@
         <p:spPr>
           <a:xfrm>
             <a:off x="731520" y="365760"/>
-            <a:ext cx="10698480" cy="822960"/>
+            <a:ext cx="10058400" cy="1005840"/>
           </a:xfrm>
           <a:prstGeom prst="rect">
             <a:avLst/>
@@ -6798,7 +6650,10 @@
           <a:lstStyle/>
           <a:p>
             <a:pPr>
-              <a:defRPr sz="1100" b="1">
+              <a:spcAft>
+                <a:spcPts val="200"/>
+              </a:spcAft>
+              <a:defRPr sz="1300" b="1">
                 <a:solidFill>
                   <a:srgbClr val="2D6A4F"/>
                 </a:solidFill>
@@ -6806,20 +6661,20 @@
               </a:defRPr>
             </a:pPr>
             <a:r>
-              <a:t>學習共同體輔導團・2小時到校輔導教案建議</a:t>
-            </a:r>
-          </a:p>
-          <a:p>
-            <a:pPr>
-              <a:defRPr sz="2200" b="1">
-                <a:solidFill>
-                  <a:srgbClr val="2B2D42"/>
-                </a:solidFill>
-                <a:latin typeface="Microsoft JhengHei"/>
-              </a:defRPr>
-            </a:pPr>
-            <a:r>
-              <a:t>模組 D 深度實務：破除分心與學共載具常規</a:t>
+              <a:t>學習共同體輔導團・2小時到校輔導教案</a:t>
+            </a:r>
+          </a:p>
+          <a:p>
+            <a:pPr>
+              <a:defRPr sz="2600" b="1">
+                <a:solidFill>
+                  <a:srgbClr val="1B4332"/>
+                </a:solidFill>
+                <a:latin typeface="Microsoft JhengHei"/>
+              </a:defRPr>
+            </a:pPr>
+            <a:r>
+              <a:t>模組 D 落地實務：破除分心與學共載具常規</a:t>
             </a:r>
           </a:p>
         </p:txBody>
@@ -6840,7 +6695,7 @@
         </p:blipFill>
         <p:spPr>
           <a:xfrm>
-            <a:off x="10789920" y="320040"/>
+            <a:off x="10881360" y="365760"/>
             <a:ext cx="685800" cy="685800"/>
           </a:xfrm>
           <a:prstGeom prst="rect">
@@ -6856,8 +6711,8 @@
         </p:nvSpPr>
         <p:spPr>
           <a:xfrm>
-            <a:off x="731520" y="1463040"/>
-            <a:ext cx="10728655" cy="1417320"/>
+            <a:off x="731520" y="1508760"/>
+            <a:ext cx="10728655" cy="1371600"/>
           </a:xfrm>
           <a:prstGeom prst="roundRect">
             <a:avLst/>
@@ -6865,7 +6720,7 @@
           <a:solidFill>
             <a:srgbClr val="FFFFFF"/>
           </a:solidFill>
-          <a:ln w="19050">
+          <a:ln w="25400">
             <a:solidFill>
               <a:srgbClr val="2D6A4F"/>
             </a:solidFill>
@@ -6901,7 +6756,7 @@
         </p:nvSpPr>
         <p:spPr>
           <a:xfrm>
-            <a:off x="1005840" y="1600200"/>
+            <a:off x="1005840" y="1618488"/>
             <a:ext cx="10149840" cy="1143000"/>
           </a:xfrm>
           <a:prstGeom prst="rect">
@@ -6919,7 +6774,7 @@
               <a:spcAft>
                 <a:spcPts val="400"/>
               </a:spcAft>
-              <a:defRPr sz="1300" b="1">
+              <a:defRPr sz="1700" b="1">
                 <a:solidFill>
                   <a:srgbClr val="2D6A4F"/>
                 </a:solidFill>
@@ -6935,15 +6790,15 @@
               <a:spcAft>
                 <a:spcPts val="200"/>
               </a:spcAft>
-              <a:defRPr sz="1050">
-                <a:solidFill>
-                  <a:srgbClr val="2B2D42"/>
-                </a:solidFill>
-                <a:latin typeface="Microsoft JhengHei"/>
-              </a:defRPr>
-            </a:pPr>
-            <a:r>
-              <a:t>• 傳統痛點：學生忘記帳號密碼、大小寫分不清，光登入就消耗半堂課。</a:t>
+              <a:defRPr sz="1450">
+                <a:solidFill>
+                  <a:srgbClr val="212529"/>
+                </a:solidFill>
+                <a:latin typeface="Microsoft JhengHei"/>
+              </a:defRPr>
+            </a:pPr>
+            <a:r>
+              <a:t>• 傳統痛點：學生忘記帳號密碼、大小寫分不清，搞登入消耗半堂課！</a:t>
             </a:r>
           </a:p>
           <a:p>
@@ -6951,9 +6806,9 @@
               <a:spcAft>
                 <a:spcPts val="200"/>
               </a:spcAft>
-              <a:defRPr sz="1050">
-                <a:solidFill>
-                  <a:srgbClr val="2B2D42"/>
+              <a:defRPr sz="1450">
+                <a:solidFill>
+                  <a:srgbClr val="212529"/>
                 </a:solidFill>
                 <a:latin typeface="Microsoft JhengHei"/>
               </a:defRPr>
@@ -6967,15 +6822,15 @@
               <a:spcAft>
                 <a:spcPts val="200"/>
               </a:spcAft>
-              <a:defRPr sz="1050">
-                <a:solidFill>
-                  <a:srgbClr val="2B2D42"/>
-                </a:solidFill>
-                <a:latin typeface="Microsoft JhengHei"/>
-              </a:defRPr>
-            </a:pPr>
-            <a:r>
-              <a:t>• 課堂成效：開機掃描 30 秒進入討論情境，把完整時間還給小組深思！</a:t>
+              <a:defRPr sz="1450">
+                <a:solidFill>
+                  <a:srgbClr val="212529"/>
+                </a:solidFill>
+                <a:latin typeface="Microsoft JhengHei"/>
+              </a:defRPr>
+            </a:pPr>
+            <a:r>
+              <a:t>• 課堂成效：開機掃描 30 秒進入討論情境，把完整時間還給學生深度對話！</a:t>
             </a:r>
           </a:p>
         </p:txBody>
@@ -6988,8 +6843,8 @@
         </p:nvSpPr>
         <p:spPr>
           <a:xfrm>
-            <a:off x="731520" y="3063240"/>
-            <a:ext cx="10728655" cy="1417320"/>
+            <a:off x="731520" y="3063239"/>
+            <a:ext cx="10728655" cy="1371600"/>
           </a:xfrm>
           <a:prstGeom prst="roundRect">
             <a:avLst/>
@@ -6997,7 +6852,7 @@
           <a:solidFill>
             <a:srgbClr val="FFFFFF"/>
           </a:solidFill>
-          <a:ln w="19050">
+          <a:ln w="25400">
             <a:solidFill>
               <a:srgbClr val="E76F51"/>
             </a:solidFill>
@@ -7033,7 +6888,7 @@
         </p:nvSpPr>
         <p:spPr>
           <a:xfrm>
-            <a:off x="1005840" y="3200400"/>
+            <a:off x="1005840" y="3172967"/>
             <a:ext cx="10149840" cy="1143000"/>
           </a:xfrm>
           <a:prstGeom prst="rect">
@@ -7051,7 +6906,7 @@
               <a:spcAft>
                 <a:spcPts val="400"/>
               </a:spcAft>
-              <a:defRPr sz="1300" b="1">
+              <a:defRPr sz="1700" b="1">
                 <a:solidFill>
                   <a:srgbClr val="E76F51"/>
                 </a:solidFill>
@@ -7067,15 +6922,15 @@
               <a:spcAft>
                 <a:spcPts val="200"/>
               </a:spcAft>
-              <a:defRPr sz="1050">
-                <a:solidFill>
-                  <a:srgbClr val="2B2D42"/>
-                </a:solidFill>
-                <a:latin typeface="Microsoft JhengHei"/>
-              </a:defRPr>
-            </a:pPr>
-            <a:r>
-              <a:t>• 步驟 1：【倒數指令】講師/組長口令『3、2、1，螢幕蓋板』。</a:t>
+              <a:defRPr sz="1450">
+                <a:solidFill>
+                  <a:srgbClr val="212529"/>
+                </a:solidFill>
+                <a:latin typeface="Microsoft JhengHei"/>
+              </a:defRPr>
+            </a:pPr>
+            <a:r>
+              <a:t>• 步驟 1【倒數指令】：口令『3、2、1，螢幕蓋板』，全班動作一致。</a:t>
             </a:r>
           </a:p>
           <a:p>
@@ -7083,15 +6938,15 @@
               <a:spcAft>
                 <a:spcPts val="200"/>
               </a:spcAft>
-              <a:defRPr sz="1050">
-                <a:solidFill>
-                  <a:srgbClr val="2B2D42"/>
-                </a:solidFill>
-                <a:latin typeface="Microsoft JhengHei"/>
-              </a:defRPr>
-            </a:pPr>
-            <a:r>
-              <a:t>• 步驟 2：【姿態重置】平板面朝下平放桌角，雙手自然置於桌面。</a:t>
+              <a:defRPr sz="1450">
+                <a:solidFill>
+                  <a:srgbClr val="212529"/>
+                </a:solidFill>
+                <a:latin typeface="Microsoft JhengHei"/>
+              </a:defRPr>
+            </a:pPr>
+            <a:r>
+              <a:t>• 步驟 2【姿態重置】：平板面朝下平放桌角，雙手自然置於桌面，停止滑動。</a:t>
             </a:r>
           </a:p>
           <a:p>
@@ -7099,15 +6954,15 @@
               <a:spcAft>
                 <a:spcPts val="200"/>
               </a:spcAft>
-              <a:defRPr sz="1050">
-                <a:solidFill>
-                  <a:srgbClr val="2B2D42"/>
-                </a:solidFill>
-                <a:latin typeface="Microsoft JhengHei"/>
-              </a:defRPr>
-            </a:pPr>
-            <a:r>
-              <a:t>• 步驟 3：【視線聚焦】雙眼抬起注視發言夥伴，啟動高專注實體傾聽。</a:t>
+              <a:defRPr sz="1450">
+                <a:solidFill>
+                  <a:srgbClr val="212529"/>
+                </a:solidFill>
+                <a:latin typeface="Microsoft JhengHei"/>
+              </a:defRPr>
+            </a:pPr>
+            <a:r>
+              <a:t>• 步驟 3【視線聚焦】：雙眼抬起注視發言夥伴，啟動高專注實體傾聽關係。</a:t>
             </a:r>
           </a:p>
         </p:txBody>
@@ -7120,8 +6975,8 @@
         </p:nvSpPr>
         <p:spPr>
           <a:xfrm>
-            <a:off x="731520" y="4663440"/>
-            <a:ext cx="10728655" cy="1417320"/>
+            <a:off x="731520" y="4617720"/>
+            <a:ext cx="10728655" cy="1371600"/>
           </a:xfrm>
           <a:prstGeom prst="roundRect">
             <a:avLst/>
@@ -7129,7 +6984,7 @@
           <a:solidFill>
             <a:srgbClr val="FFFFFF"/>
           </a:solidFill>
-          <a:ln w="19050">
+          <a:ln w="25400">
             <a:solidFill>
               <a:srgbClr val="E09F3E"/>
             </a:solidFill>
@@ -7165,7 +7020,7 @@
         </p:nvSpPr>
         <p:spPr>
           <a:xfrm>
-            <a:off x="1005840" y="4800600"/>
+            <a:off x="1005840" y="4727448"/>
             <a:ext cx="10149840" cy="1143000"/>
           </a:xfrm>
           <a:prstGeom prst="rect">
@@ -7183,7 +7038,7 @@
               <a:spcAft>
                 <a:spcPts val="400"/>
               </a:spcAft>
-              <a:defRPr sz="1300" b="1">
+              <a:defRPr sz="1700" b="1">
                 <a:solidFill>
                   <a:srgbClr val="E09F3E"/>
                 </a:solidFill>
@@ -7199,15 +7054,15 @@
               <a:spcAft>
                 <a:spcPts val="200"/>
               </a:spcAft>
-              <a:defRPr sz="1050">
-                <a:solidFill>
-                  <a:srgbClr val="2B2D42"/>
-                </a:solidFill>
-                <a:latin typeface="Microsoft JhengHei"/>
-              </a:defRPr>
-            </a:pPr>
-            <a:r>
-              <a:t>• 法寶 1：【顏色組別平板】平板背貼紅藍黃綠貼紙，依組領取，不分個人。</a:t>
+              <a:defRPr sz="1450">
+                <a:solidFill>
+                  <a:srgbClr val="212529"/>
+                </a:solidFill>
+                <a:latin typeface="Microsoft JhengHei"/>
+              </a:defRPr>
+            </a:pPr>
+            <a:r>
+              <a:t>• 法寶 1【顏色組別平板】：背貼大面積紅/藍/黃/綠標籤，依組領取不分個人機。</a:t>
             </a:r>
           </a:p>
           <a:p>
@@ -7215,15 +7070,15 @@
               <a:spcAft>
                 <a:spcPts val="200"/>
               </a:spcAft>
-              <a:defRPr sz="1050">
-                <a:solidFill>
-                  <a:srgbClr val="2B2D42"/>
-                </a:solidFill>
-                <a:latin typeface="Microsoft JhengHei"/>
-              </a:defRPr>
-            </a:pPr>
-            <a:r>
-              <a:t>• 法寶 2：【免注音輸入】改用麥克風語音輸入，或拍下小白板實體操作。</a:t>
+              <a:defRPr sz="1450">
+                <a:solidFill>
+                  <a:srgbClr val="212529"/>
+                </a:solidFill>
+                <a:latin typeface="Microsoft JhengHei"/>
+              </a:defRPr>
+            </a:pPr>
+            <a:r>
+              <a:t>• 法寶 2【免注音打字】：引導學生按下麥克風語音輸入，或拍下小白板實體操作。</a:t>
             </a:r>
           </a:p>
           <a:p>
@@ -7231,15 +7086,15 @@
               <a:spcAft>
                 <a:spcPts val="200"/>
               </a:spcAft>
-              <a:defRPr sz="1050">
-                <a:solidFill>
-                  <a:srgbClr val="2B2D42"/>
-                </a:solidFill>
-                <a:latin typeface="Microsoft JhengHei"/>
-              </a:defRPr>
-            </a:pPr>
-            <a:r>
-              <a:t>• 法寶 3：【大圖示桌面捷徑】桌面僅留單一圖示，點開直接就是當日任務。</a:t>
+              <a:defRPr sz="1450">
+                <a:solidFill>
+                  <a:srgbClr val="212529"/>
+                </a:solidFill>
+                <a:latin typeface="Microsoft JhengHei"/>
+              </a:defRPr>
+            </a:pPr>
+            <a:r>
+              <a:t>• 法寶 3【單一桌面捷徑】：桌面僅留一個當日任務網頁捷徑，點開直接開始。</a:t>
             </a:r>
           </a:p>
         </p:txBody>
@@ -7316,7 +7171,7 @@
         <p:spPr>
           <a:xfrm>
             <a:off x="731520" y="365760"/>
-            <a:ext cx="10698480" cy="822960"/>
+            <a:ext cx="10058400" cy="1005840"/>
           </a:xfrm>
           <a:prstGeom prst="rect">
             <a:avLst/>
@@ -7330,7 +7185,10 @@
           <a:lstStyle/>
           <a:p>
             <a:pPr>
-              <a:defRPr sz="1100" b="1">
+              <a:spcAft>
+                <a:spcPts val="200"/>
+              </a:spcAft>
+              <a:defRPr sz="1300" b="1">
                 <a:solidFill>
                   <a:srgbClr val="2D6A4F"/>
                 </a:solidFill>
@@ -7338,20 +7196,20 @@
               </a:defRPr>
             </a:pPr>
             <a:r>
-              <a:t>學習共同體輔導團・2小時到校輔導教案建議</a:t>
-            </a:r>
-          </a:p>
-          <a:p>
-            <a:pPr>
-              <a:defRPr sz="2200" b="1">
-                <a:solidFill>
-                  <a:srgbClr val="2B2D42"/>
-                </a:solidFill>
-                <a:latin typeface="Microsoft JhengHei"/>
-              </a:defRPr>
-            </a:pPr>
-            <a:r>
-              <a:t>模組 B 深度實務：Padlet 小組共學與 86吋大屏共構</a:t>
+              <a:t>學習共同體輔導團・2小時到校輔導教案</a:t>
+            </a:r>
+          </a:p>
+          <a:p>
+            <a:pPr>
+              <a:defRPr sz="2600" b="1">
+                <a:solidFill>
+                  <a:srgbClr val="1B4332"/>
+                </a:solidFill>
+                <a:latin typeface="Microsoft JhengHei"/>
+              </a:defRPr>
+            </a:pPr>
+            <a:r>
+              <a:t>模組 B 落地實務：Padlet 小組共學與 86吋大屏共構</a:t>
             </a:r>
           </a:p>
         </p:txBody>
@@ -7372,7 +7230,7 @@
         </p:blipFill>
         <p:spPr>
           <a:xfrm>
-            <a:off x="10789920" y="320040"/>
+            <a:off x="10881360" y="365760"/>
             <a:ext cx="685800" cy="685800"/>
           </a:xfrm>
           <a:prstGeom prst="rect">
@@ -7388,8 +7246,8 @@
         </p:nvSpPr>
         <p:spPr>
           <a:xfrm>
-            <a:off x="731520" y="1463040"/>
-            <a:ext cx="5212080" cy="4754880"/>
+            <a:off x="731520" y="1508760"/>
+            <a:ext cx="5212080" cy="4663440"/>
           </a:xfrm>
           <a:prstGeom prst="roundRect">
             <a:avLst/>
@@ -7397,9 +7255,9 @@
           <a:solidFill>
             <a:srgbClr val="FFFFFF"/>
           </a:solidFill>
-          <a:ln w="19050">
+          <a:ln w="25400">
             <a:solidFill>
-              <a:srgbClr val="D8E6DE"/>
+              <a:srgbClr val="2D6A4F"/>
             </a:solidFill>
           </a:ln>
         </p:spPr>
@@ -7433,8 +7291,8 @@
         </p:nvSpPr>
         <p:spPr>
           <a:xfrm>
-            <a:off x="1005840" y="1645920"/>
-            <a:ext cx="4663440" cy="4389120"/>
+            <a:off x="1005840" y="1691640"/>
+            <a:ext cx="4663440" cy="4297680"/>
           </a:xfrm>
           <a:prstGeom prst="rect">
             <a:avLst/>
@@ -7449,9 +7307,9 @@
           <a:p>
             <a:pPr>
               <a:spcAft>
-                <a:spcPts val="1000"/>
-              </a:spcAft>
-              <a:defRPr sz="1400" b="1">
+                <a:spcPts val="1200"/>
+              </a:spcAft>
+              <a:defRPr sz="2000" b="1">
                 <a:solidFill>
                   <a:srgbClr val="2D6A4F"/>
                 </a:solidFill>
@@ -7464,13 +7322,10 @@
           </a:p>
           <a:p>
             <a:pPr>
-              <a:spcBef>
+              <a:spcAft>
                 <a:spcPts val="600"/>
-              </a:spcBef>
-              <a:spcAft>
-                <a:spcPts val="400"/>
-              </a:spcAft>
-              <a:defRPr sz="1150" b="1">
+              </a:spcAft>
+              <a:defRPr sz="1600" b="1">
                 <a:solidFill>
                   <a:srgbClr val="2D6A4F"/>
                 </a:solidFill>
@@ -7484,28 +7339,25 @@
           <a:p>
             <a:pPr>
               <a:spcAft>
-                <a:spcPts val="400"/>
-              </a:spcAft>
-              <a:defRPr sz="1050">
-                <a:solidFill>
-                  <a:srgbClr val="2B2D42"/>
-                </a:solidFill>
-                <a:latin typeface="Microsoft JhengHei"/>
-              </a:defRPr>
-            </a:pPr>
-            <a:r>
-              <a:t>人手一台平板時，每個人容易淪為『數位孤島』，各滑各的，完全沒有對話！</a:t>
-            </a:r>
-          </a:p>
-          <a:p>
-            <a:pPr>
-              <a:spcBef>
                 <a:spcPts val="600"/>
-              </a:spcBef>
-              <a:spcAft>
-                <a:spcPts val="400"/>
-              </a:spcAft>
-              <a:defRPr sz="1150" b="1">
+              </a:spcAft>
+              <a:defRPr sz="1500" b="0">
+                <a:solidFill>
+                  <a:srgbClr val="212529"/>
+                </a:solidFill>
+                <a:latin typeface="Microsoft JhengHei"/>
+              </a:defRPr>
+            </a:pPr>
+            <a:r>
+              <a:t>人手一台容易陷入『各自孤島』，各滑各的，完全沒有真正的傾聽與對話！</a:t>
+            </a:r>
+          </a:p>
+          <a:p>
+            <a:pPr>
+              <a:spcAft>
+                <a:spcPts val="600"/>
+              </a:spcAft>
+              <a:defRPr sz="1600" b="1">
                 <a:solidFill>
                   <a:srgbClr val="2D6A4F"/>
                 </a:solidFill>
@@ -7513,55 +7365,55 @@
               </a:defRPr>
             </a:pPr>
             <a:r>
-              <a:t>4人共用 1 載具的魔力：</a:t>
-            </a:r>
-          </a:p>
-          <a:p>
-            <a:pPr>
-              <a:spcAft>
-                <a:spcPts val="400"/>
-              </a:spcAft>
-              <a:defRPr sz="1050">
-                <a:solidFill>
-                  <a:srgbClr val="2B2D42"/>
-                </a:solidFill>
-                <a:latin typeface="Microsoft JhengHei"/>
-              </a:defRPr>
-            </a:pPr>
-            <a:r>
-              <a:t>• 角色輪替：一人負責記錄，三人專注出主意與探究反思。</a:t>
-            </a:r>
-          </a:p>
-          <a:p>
-            <a:pPr>
-              <a:spcAft>
-                <a:spcPts val="400"/>
-              </a:spcAft>
-              <a:defRPr sz="1050">
-                <a:solidFill>
-                  <a:srgbClr val="2B2D42"/>
-                </a:solidFill>
-                <a:latin typeface="Microsoft JhengHei"/>
-              </a:defRPr>
-            </a:pPr>
-            <a:r>
-              <a:t>• 實體討論先行：必須在小組達成共識後，才能在平板上傳成果。</a:t>
-            </a:r>
-          </a:p>
-          <a:p>
-            <a:pPr>
-              <a:spcAft>
-                <a:spcPts val="400"/>
-              </a:spcAft>
-              <a:defRPr sz="1050">
-                <a:solidFill>
-                  <a:srgbClr val="2B2D42"/>
-                </a:solidFill>
-                <a:latin typeface="Microsoft JhengHei"/>
-              </a:defRPr>
-            </a:pPr>
-            <a:r>
-              <a:t>• Padlet 免費互動牆：小組將解題卡、照片、疑惑卡一鍵張貼。</a:t>
+              <a:t>4人共用 1 載具的協作魔力：</a:t>
+            </a:r>
+          </a:p>
+          <a:p>
+            <a:pPr>
+              <a:spcAft>
+                <a:spcPts val="600"/>
+              </a:spcAft>
+              <a:defRPr sz="1500" b="0">
+                <a:solidFill>
+                  <a:srgbClr val="212529"/>
+                </a:solidFill>
+                <a:latin typeface="Microsoft JhengHei"/>
+              </a:defRPr>
+            </a:pPr>
+            <a:r>
+              <a:t>• 角色輪替：1 人負責操作記錄，其餘 3 人專注發想、檢核與質疑討論。</a:t>
+            </a:r>
+          </a:p>
+          <a:p>
+            <a:pPr>
+              <a:spcAft>
+                <a:spcPts val="600"/>
+              </a:spcAft>
+              <a:defRPr sz="1500" b="0">
+                <a:solidFill>
+                  <a:srgbClr val="212529"/>
+                </a:solidFill>
+                <a:latin typeface="Microsoft JhengHei"/>
+              </a:defRPr>
+            </a:pPr>
+            <a:r>
+              <a:t>• 實體對話先行：組內必須先達成共識，才能由記錄者打字或拍照上傳。</a:t>
+            </a:r>
+          </a:p>
+          <a:p>
+            <a:pPr>
+              <a:spcAft>
+                <a:spcPts val="600"/>
+              </a:spcAft>
+              <a:defRPr sz="1500" b="0">
+                <a:solidFill>
+                  <a:srgbClr val="212529"/>
+                </a:solidFill>
+                <a:latin typeface="Microsoft JhengHei"/>
+              </a:defRPr>
+            </a:pPr>
+            <a:r>
+              <a:t>• Padlet 零門檻張貼：小組將解法卡、疑惑卡一鍵張貼，隨時回溯思考軌跡。</a:t>
             </a:r>
           </a:p>
         </p:txBody>
@@ -7574,8 +7426,8 @@
         </p:nvSpPr>
         <p:spPr>
           <a:xfrm>
-            <a:off x="6217920" y="1463040"/>
-            <a:ext cx="5212080" cy="4754880"/>
+            <a:off x="6217920" y="1508760"/>
+            <a:ext cx="5212080" cy="4663440"/>
           </a:xfrm>
           <a:prstGeom prst="roundRect">
             <a:avLst/>
@@ -7583,9 +7435,9 @@
           <a:solidFill>
             <a:srgbClr val="FFFFFF"/>
           </a:solidFill>
-          <a:ln w="19050">
+          <a:ln w="25400">
             <a:solidFill>
-              <a:srgbClr val="D8E6DE"/>
+              <a:srgbClr val="E09F3E"/>
             </a:solidFill>
           </a:ln>
         </p:spPr>
@@ -7619,8 +7471,8 @@
         </p:nvSpPr>
         <p:spPr>
           <a:xfrm>
-            <a:off x="6492240" y="1645920"/>
-            <a:ext cx="4663440" cy="4389120"/>
+            <a:off x="6492240" y="1691640"/>
+            <a:ext cx="4663440" cy="4297680"/>
           </a:xfrm>
           <a:prstGeom prst="rect">
             <a:avLst/>
@@ -7635,9 +7487,9 @@
           <a:p>
             <a:pPr>
               <a:spcAft>
-                <a:spcPts val="1000"/>
-              </a:spcAft>
-              <a:defRPr sz="1400" b="1">
+                <a:spcPts val="1200"/>
+              </a:spcAft>
+              <a:defRPr sz="2000" b="1">
                 <a:solidFill>
                   <a:srgbClr val="E09F3E"/>
                 </a:solidFill>
@@ -7650,13 +7502,10 @@
           </a:p>
           <a:p>
             <a:pPr>
-              <a:spcBef>
+              <a:spcAft>
                 <a:spcPts val="600"/>
-              </a:spcBef>
-              <a:spcAft>
-                <a:spcPts val="400"/>
-              </a:spcAft>
-              <a:defRPr sz="1150" b="1">
+              </a:spcAft>
+              <a:defRPr sz="1600" b="1">
                 <a:solidFill>
                   <a:srgbClr val="E09F3E"/>
                 </a:solidFill>
@@ -7664,71 +7513,71 @@
               </a:defRPr>
             </a:pPr>
             <a:r>
-              <a:t>全校 100% 內建大觸控螢幕的王牌打法：</a:t>
-            </a:r>
-          </a:p>
-          <a:p>
-            <a:pPr>
-              <a:spcAft>
-                <a:spcPts val="400"/>
-              </a:spcAft>
-              <a:defRPr sz="1050">
-                <a:solidFill>
-                  <a:srgbClr val="2B2D42"/>
-                </a:solidFill>
-                <a:latin typeface="Microsoft JhengHei"/>
-              </a:defRPr>
-            </a:pPr>
-            <a:r>
-              <a:t>• 即時投影全班想法：大螢幕同時並列 6 組的多元解題路徑。</a:t>
-            </a:r>
-          </a:p>
-          <a:p>
-            <a:pPr>
-              <a:spcAft>
-                <a:spcPts val="400"/>
-              </a:spcAft>
-              <a:defRPr sz="1050">
-                <a:solidFill>
-                  <a:srgbClr val="2B2D42"/>
-                </a:solidFill>
-                <a:latin typeface="Microsoft JhengHei"/>
-              </a:defRPr>
-            </a:pPr>
-            <a:r>
-              <a:t>• 觸控筆畫圈連線：教師或學生直接走上講台，在螢幕上圈出『亮點』與『矛盾』。</a:t>
-            </a:r>
-          </a:p>
-          <a:p>
-            <a:pPr>
-              <a:spcAft>
-                <a:spcPts val="400"/>
-              </a:spcAft>
-              <a:defRPr sz="1050">
-                <a:solidFill>
-                  <a:srgbClr val="2B2D42"/>
-                </a:solidFill>
-                <a:latin typeface="Microsoft JhengHei"/>
-              </a:defRPr>
-            </a:pPr>
-            <a:r>
-              <a:t>• 促發全班對話：『第2組的算式和第4組有什麼不一樣？誰能看懂他們的想法？』</a:t>
-            </a:r>
-          </a:p>
-          <a:p>
-            <a:pPr>
-              <a:spcAft>
-                <a:spcPts val="400"/>
-              </a:spcAft>
-              <a:defRPr sz="1050">
-                <a:solidFill>
-                  <a:srgbClr val="2B2D42"/>
-                </a:solidFill>
-                <a:latin typeface="Microsoft JhengHei"/>
-              </a:defRPr>
-            </a:pPr>
-            <a:r>
-              <a:t>• 從個別作業升華為共構理解：螢幕不是播放投影機，而是共學大黑板！</a:t>
+              <a:t>全校 100% 內建大螢幕的最強戰術：</a:t>
+            </a:r>
+          </a:p>
+          <a:p>
+            <a:pPr>
+              <a:spcAft>
+                <a:spcPts val="600"/>
+              </a:spcAft>
+              <a:defRPr sz="1500" b="0">
+                <a:solidFill>
+                  <a:srgbClr val="212529"/>
+                </a:solidFill>
+                <a:latin typeface="Microsoft JhengHei"/>
+              </a:defRPr>
+            </a:pPr>
+            <a:r>
+              <a:t>• 全班想法並列：大螢幕同時並列各組思考路徑，告別單組輪流報的枯燥。</a:t>
+            </a:r>
+          </a:p>
+          <a:p>
+            <a:pPr>
+              <a:spcAft>
+                <a:spcPts val="600"/>
+              </a:spcAft>
+              <a:defRPr sz="1500" b="0">
+                <a:solidFill>
+                  <a:srgbClr val="212529"/>
+                </a:solidFill>
+                <a:latin typeface="Microsoft JhengHei"/>
+              </a:defRPr>
+            </a:pPr>
+            <a:r>
+              <a:t>• 觸控筆畫圈連線：教師與學生走上講台，直接在大屏圈出亮點與矛盾。</a:t>
+            </a:r>
+          </a:p>
+          <a:p>
+            <a:pPr>
+              <a:spcAft>
+                <a:spcPts val="600"/>
+              </a:spcAft>
+              <a:defRPr sz="1500" b="0">
+                <a:solidFill>
+                  <a:srgbClr val="212529"/>
+                </a:solidFill>
+                <a:latin typeface="Microsoft JhengHei"/>
+              </a:defRPr>
+            </a:pPr>
+            <a:r>
+              <a:t>• 促發全班對話：『第 2 組和第 4 組有什麼不同？誰能看懂他們的想法？』</a:t>
+            </a:r>
+          </a:p>
+          <a:p>
+            <a:pPr>
+              <a:spcAft>
+                <a:spcPts val="600"/>
+              </a:spcAft>
+              <a:defRPr sz="1500" b="0">
+                <a:solidFill>
+                  <a:srgbClr val="212529"/>
+                </a:solidFill>
+                <a:latin typeface="Microsoft JhengHei"/>
+              </a:defRPr>
+            </a:pPr>
+            <a:r>
+              <a:t>• 從作業升華為共構：大螢幕不是投影機，而是全班共同探究的大黑板！</a:t>
             </a:r>
           </a:p>
         </p:txBody>
@@ -7805,7 +7654,7 @@
         <p:spPr>
           <a:xfrm>
             <a:off x="731520" y="365760"/>
-            <a:ext cx="10698480" cy="822960"/>
+            <a:ext cx="10058400" cy="1005840"/>
           </a:xfrm>
           <a:prstGeom prst="rect">
             <a:avLst/>
@@ -7819,7 +7668,10 @@
           <a:lstStyle/>
           <a:p>
             <a:pPr>
-              <a:defRPr sz="1100" b="1">
+              <a:spcAft>
+                <a:spcPts val="200"/>
+              </a:spcAft>
+              <a:defRPr sz="1300" b="1">
                 <a:solidFill>
                   <a:srgbClr val="2D6A4F"/>
                 </a:solidFill>
@@ -7827,20 +7679,20 @@
               </a:defRPr>
             </a:pPr>
             <a:r>
-              <a:t>學習共同體輔導團・2小時到校輔導教案建議</a:t>
-            </a:r>
-          </a:p>
-          <a:p>
-            <a:pPr>
-              <a:defRPr sz="2200" b="1">
-                <a:solidFill>
-                  <a:srgbClr val="2B2D42"/>
-                </a:solidFill>
-                <a:latin typeface="Microsoft JhengHei"/>
-              </a:defRPr>
-            </a:pPr>
-            <a:r>
-              <a:t>模組 A 深度實務：AI Agent 命製學共伸展跳躍任務</a:t>
+              <a:t>學習共同體輔導團・2小時到校輔導教案</a:t>
+            </a:r>
+          </a:p>
+          <a:p>
+            <a:pPr>
+              <a:defRPr sz="2600" b="1">
+                <a:solidFill>
+                  <a:srgbClr val="1B4332"/>
+                </a:solidFill>
+                <a:latin typeface="Microsoft JhengHei"/>
+              </a:defRPr>
+            </a:pPr>
+            <a:r>
+              <a:t>模組 A 落地實務：AI Agent 命製學共伸展跳躍任務</a:t>
             </a:r>
           </a:p>
         </p:txBody>
@@ -7861,7 +7713,7 @@
         </p:blipFill>
         <p:spPr>
           <a:xfrm>
-            <a:off x="10789920" y="320040"/>
+            <a:off x="10881360" y="365760"/>
             <a:ext cx="685800" cy="685800"/>
           </a:xfrm>
           <a:prstGeom prst="rect">
@@ -7877,356 +7729,8 @@
         </p:nvSpPr>
         <p:spPr>
           <a:xfrm>
-            <a:off x="731520" y="1463040"/>
+            <a:off x="731520" y="1508760"/>
             <a:ext cx="3474720" cy="2011680"/>
-          </a:xfrm>
-          <a:prstGeom prst="roundRect">
-            <a:avLst/>
-          </a:prstGeom>
-          <a:solidFill>
-            <a:srgbClr val="FFFFFF"/>
-          </a:solidFill>
-          <a:ln w="19050">
-            <a:solidFill>
-              <a:srgbClr val="2D6A4F"/>
-            </a:solidFill>
-          </a:ln>
-        </p:spPr>
-        <p:style>
-          <a:lnRef idx="1">
-            <a:schemeClr val="accent1"/>
-          </a:lnRef>
-          <a:fillRef idx="3">
-            <a:schemeClr val="accent1"/>
-          </a:fillRef>
-          <a:effectRef idx="2">
-            <a:schemeClr val="accent1"/>
-          </a:effectRef>
-          <a:fontRef idx="minor">
-            <a:schemeClr val="lt1"/>
-          </a:fontRef>
-        </p:style>
-        <p:txBody>
-          <a:bodyPr rtlCol="0" anchor="ctr"/>
-          <a:lstStyle/>
-          <a:p>
-            <a:pPr algn="ctr"/>
-          </a:p>
-        </p:txBody>
-      </p:sp>
-      <p:sp>
-        <p:nvSpPr>
-          <p:cNvPr id="6" name="TextBox 5"/>
-          <p:cNvSpPr txBox="1"/>
-          <p:nvPr/>
-        </p:nvSpPr>
-        <p:spPr>
-          <a:xfrm>
-            <a:off x="868680" y="1600200"/>
-            <a:ext cx="3200400" cy="1737360"/>
-          </a:xfrm>
-          <a:prstGeom prst="rect">
-            <a:avLst/>
-          </a:prstGeom>
-          <a:noFill/>
-        </p:spPr>
-        <p:txBody>
-          <a:bodyPr wrap="square">
-            <a:spAutoFit/>
-          </a:bodyPr>
-          <a:lstStyle/>
-          <a:p>
-            <a:pPr>
-              <a:spcAft>
-                <a:spcPts val="600"/>
-              </a:spcAft>
-              <a:defRPr sz="1150" b="1">
-                <a:solidFill>
-                  <a:srgbClr val="2D6A4F"/>
-                </a:solidFill>
-                <a:latin typeface="Microsoft JhengHei"/>
-              </a:defRPr>
-            </a:pPr>
-            <a:r>
-              <a:t>層次一：基礎提取題 (挑戰度 30%)</a:t>
-            </a:r>
-          </a:p>
-          <a:p>
-            <a:pPr>
-              <a:spcAft>
-                <a:spcPts val="200"/>
-              </a:spcAft>
-              <a:defRPr sz="1000">
-                <a:solidFill>
-                  <a:srgbClr val="2B2D42"/>
-                </a:solidFill>
-                <a:latin typeface="Microsoft JhengHei"/>
-              </a:defRPr>
-            </a:pPr>
-            <a:r>
-              <a:t>確認學生是否掌握文本事實、核心定義或基本算則。</a:t>
-            </a:r>
-          </a:p>
-          <a:p>
-            <a:pPr>
-              <a:spcAft>
-                <a:spcPts val="200"/>
-              </a:spcAft>
-              <a:defRPr sz="1000">
-                <a:solidFill>
-                  <a:srgbClr val="2B2D42"/>
-                </a:solidFill>
-                <a:latin typeface="Microsoft JhengHei"/>
-              </a:defRPr>
-            </a:pPr>
-            <a:r>
-              <a:t>• 例：文章主角遇到什麼困境？這題的條件有哪些？</a:t>
-            </a:r>
-          </a:p>
-        </p:txBody>
-      </p:sp>
-      <p:sp>
-        <p:nvSpPr>
-          <p:cNvPr id="7" name="Rounded Rectangle 6"/>
-          <p:cNvSpPr/>
-          <p:nvPr/>
-        </p:nvSpPr>
-        <p:spPr>
-          <a:xfrm>
-            <a:off x="4343400" y="1463040"/>
-            <a:ext cx="3474720" cy="2011680"/>
-          </a:xfrm>
-          <a:prstGeom prst="roundRect">
-            <a:avLst/>
-          </a:prstGeom>
-          <a:solidFill>
-            <a:srgbClr val="FFFFFF"/>
-          </a:solidFill>
-          <a:ln w="19050">
-            <a:solidFill>
-              <a:srgbClr val="E09F3E"/>
-            </a:solidFill>
-          </a:ln>
-        </p:spPr>
-        <p:style>
-          <a:lnRef idx="1">
-            <a:schemeClr val="accent1"/>
-          </a:lnRef>
-          <a:fillRef idx="3">
-            <a:schemeClr val="accent1"/>
-          </a:fillRef>
-          <a:effectRef idx="2">
-            <a:schemeClr val="accent1"/>
-          </a:effectRef>
-          <a:fontRef idx="minor">
-            <a:schemeClr val="lt1"/>
-          </a:fontRef>
-        </p:style>
-        <p:txBody>
-          <a:bodyPr rtlCol="0" anchor="ctr"/>
-          <a:lstStyle/>
-          <a:p>
-            <a:pPr algn="ctr"/>
-          </a:p>
-        </p:txBody>
-      </p:sp>
-      <p:sp>
-        <p:nvSpPr>
-          <p:cNvPr id="8" name="TextBox 7"/>
-          <p:cNvSpPr txBox="1"/>
-          <p:nvPr/>
-        </p:nvSpPr>
-        <p:spPr>
-          <a:xfrm>
-            <a:off x="4480560" y="1600200"/>
-            <a:ext cx="3200400" cy="1737360"/>
-          </a:xfrm>
-          <a:prstGeom prst="rect">
-            <a:avLst/>
-          </a:prstGeom>
-          <a:noFill/>
-        </p:spPr>
-        <p:txBody>
-          <a:bodyPr wrap="square">
-            <a:spAutoFit/>
-          </a:bodyPr>
-          <a:lstStyle/>
-          <a:p>
-            <a:pPr>
-              <a:spcAft>
-                <a:spcPts val="600"/>
-              </a:spcAft>
-              <a:defRPr sz="1150" b="1">
-                <a:solidFill>
-                  <a:srgbClr val="E09F3E"/>
-                </a:solidFill>
-                <a:latin typeface="Microsoft JhengHei"/>
-              </a:defRPr>
-            </a:pPr>
-            <a:r>
-              <a:t>層次二：推論統整題 (挑戰度 60%)</a:t>
-            </a:r>
-          </a:p>
-          <a:p>
-            <a:pPr>
-              <a:spcAft>
-                <a:spcPts val="200"/>
-              </a:spcAft>
-              <a:defRPr sz="1000">
-                <a:solidFill>
-                  <a:srgbClr val="2B2D42"/>
-                </a:solidFill>
-                <a:latin typeface="Microsoft JhengHei"/>
-              </a:defRPr>
-            </a:pPr>
-            <a:r>
-              <a:t>小組互學探究不同觀點之間的連結、因果關係或多元解法。</a:t>
-            </a:r>
-          </a:p>
-          <a:p>
-            <a:pPr>
-              <a:spcAft>
-                <a:spcPts val="200"/>
-              </a:spcAft>
-              <a:defRPr sz="1000">
-                <a:solidFill>
-                  <a:srgbClr val="2B2D42"/>
-                </a:solidFill>
-                <a:latin typeface="Microsoft JhengHei"/>
-              </a:defRPr>
-            </a:pPr>
-            <a:r>
-              <a:t>• 例：為什麼主角會做出這個決定？這兩種解法本質相同嗎？</a:t>
-            </a:r>
-          </a:p>
-        </p:txBody>
-      </p:sp>
-      <p:sp>
-        <p:nvSpPr>
-          <p:cNvPr id="9" name="Rounded Rectangle 8"/>
-          <p:cNvSpPr/>
-          <p:nvPr/>
-        </p:nvSpPr>
-        <p:spPr>
-          <a:xfrm>
-            <a:off x="7955280" y="1463040"/>
-            <a:ext cx="3474720" cy="2011680"/>
-          </a:xfrm>
-          <a:prstGeom prst="roundRect">
-            <a:avLst/>
-          </a:prstGeom>
-          <a:solidFill>
-            <a:srgbClr val="FFFFFF"/>
-          </a:solidFill>
-          <a:ln w="19050">
-            <a:solidFill>
-              <a:srgbClr val="E76F51"/>
-            </a:solidFill>
-          </a:ln>
-        </p:spPr>
-        <p:style>
-          <a:lnRef idx="1">
-            <a:schemeClr val="accent1"/>
-          </a:lnRef>
-          <a:fillRef idx="3">
-            <a:schemeClr val="accent1"/>
-          </a:fillRef>
-          <a:effectRef idx="2">
-            <a:schemeClr val="accent1"/>
-          </a:effectRef>
-          <a:fontRef idx="minor">
-            <a:schemeClr val="lt1"/>
-          </a:fontRef>
-        </p:style>
-        <p:txBody>
-          <a:bodyPr rtlCol="0" anchor="ctr"/>
-          <a:lstStyle/>
-          <a:p>
-            <a:pPr algn="ctr"/>
-          </a:p>
-        </p:txBody>
-      </p:sp>
-      <p:sp>
-        <p:nvSpPr>
-          <p:cNvPr id="10" name="TextBox 9"/>
-          <p:cNvSpPr txBox="1"/>
-          <p:nvPr/>
-        </p:nvSpPr>
-        <p:spPr>
-          <a:xfrm>
-            <a:off x="8092440" y="1600200"/>
-            <a:ext cx="3200400" cy="1737360"/>
-          </a:xfrm>
-          <a:prstGeom prst="rect">
-            <a:avLst/>
-          </a:prstGeom>
-          <a:noFill/>
-        </p:spPr>
-        <p:txBody>
-          <a:bodyPr wrap="square">
-            <a:spAutoFit/>
-          </a:bodyPr>
-          <a:lstStyle/>
-          <a:p>
-            <a:pPr>
-              <a:spcAft>
-                <a:spcPts val="600"/>
-              </a:spcAft>
-              <a:defRPr sz="1150" b="1">
-                <a:solidFill>
-                  <a:srgbClr val="E76F51"/>
-                </a:solidFill>
-                <a:latin typeface="Microsoft JhengHei"/>
-              </a:defRPr>
-            </a:pPr>
-            <a:r>
-              <a:t>層次三：伸展跳躍題 (挑戰度 100% Jumping Task)</a:t>
-            </a:r>
-          </a:p>
-          <a:p>
-            <a:pPr>
-              <a:spcAft>
-                <a:spcPts val="200"/>
-              </a:spcAft>
-              <a:defRPr sz="1000">
-                <a:solidFill>
-                  <a:srgbClr val="2B2D42"/>
-                </a:solidFill>
-                <a:latin typeface="Microsoft JhengHei"/>
-              </a:defRPr>
-            </a:pPr>
-            <a:r>
-              <a:t>高認知挑戰、無單一標準答案、促發同儕相互借力與高光頓悟！</a:t>
-            </a:r>
-          </a:p>
-          <a:p>
-            <a:pPr>
-              <a:spcAft>
-                <a:spcPts val="200"/>
-              </a:spcAft>
-              <a:defRPr sz="1000">
-                <a:solidFill>
-                  <a:srgbClr val="2B2D42"/>
-                </a:solidFill>
-                <a:latin typeface="Microsoft JhengHei"/>
-              </a:defRPr>
-            </a:pPr>
-            <a:r>
-              <a:t>• 例：如果結局翻轉，你如何改寫關鍵抉擇？生活中有類似模型嗎？</a:t>
-            </a:r>
-          </a:p>
-        </p:txBody>
-      </p:sp>
-      <p:sp>
-        <p:nvSpPr>
-          <p:cNvPr id="11" name="Rounded Rectangle 10"/>
-          <p:cNvSpPr/>
-          <p:nvPr/>
-        </p:nvSpPr>
-        <p:spPr>
-          <a:xfrm>
-            <a:off x="731520" y="3657600"/>
-            <a:ext cx="10728655" cy="2560320"/>
           </a:xfrm>
           <a:prstGeom prst="roundRect">
             <a:avLst/>
@@ -8264,14 +7768,14 @@
       </p:sp>
       <p:sp>
         <p:nvSpPr>
-          <p:cNvPr id="12" name="TextBox 11"/>
+          <p:cNvPr id="6" name="TextBox 5"/>
           <p:cNvSpPr txBox="1"/>
           <p:nvPr/>
         </p:nvSpPr>
         <p:spPr>
           <a:xfrm>
-            <a:off x="1005840" y="3794760"/>
-            <a:ext cx="10149840" cy="2286000"/>
+            <a:off x="914400" y="1645920"/>
+            <a:ext cx="3108960" cy="1737360"/>
           </a:xfrm>
           <a:prstGeom prst="rect">
             <a:avLst/>
@@ -8286,75 +7790,407 @@
           <a:p>
             <a:pPr>
               <a:spcAft>
+                <a:spcPts val="400"/>
+              </a:spcAft>
+              <a:defRPr sz="1600" b="1">
+                <a:solidFill>
+                  <a:srgbClr val="2D6A4F"/>
+                </a:solidFill>
+                <a:latin typeface="Microsoft JhengHei"/>
+              </a:defRPr>
+            </a:pPr>
+            <a:r>
+              <a:t>層次一：基礎提取題 (30%)</a:t>
+            </a:r>
+          </a:p>
+          <a:p>
+            <a:pPr>
+              <a:spcAft>
+                <a:spcPts val="200"/>
+              </a:spcAft>
+              <a:defRPr sz="1400">
+                <a:solidFill>
+                  <a:srgbClr val="212529"/>
+                </a:solidFill>
+                <a:latin typeface="Microsoft JhengHei"/>
+              </a:defRPr>
+            </a:pPr>
+            <a:r>
+              <a:t>掌握課本事實、核心定義或基本算則。</a:t>
+            </a:r>
+          </a:p>
+          <a:p>
+            <a:pPr>
+              <a:spcAft>
+                <a:spcPts val="200"/>
+              </a:spcAft>
+              <a:defRPr sz="1400">
+                <a:solidFill>
+                  <a:srgbClr val="212529"/>
+                </a:solidFill>
+                <a:latin typeface="Microsoft JhengHei"/>
+              </a:defRPr>
+            </a:pPr>
+            <a:r>
+              <a:t>• 例：主角遇到什麼困境？這題條件是什麼？</a:t>
+            </a:r>
+          </a:p>
+        </p:txBody>
+      </p:sp>
+      <p:sp>
+        <p:nvSpPr>
+          <p:cNvPr id="7" name="Rounded Rectangle 6"/>
+          <p:cNvSpPr/>
+          <p:nvPr/>
+        </p:nvSpPr>
+        <p:spPr>
+          <a:xfrm>
+            <a:off x="4343400" y="1508760"/>
+            <a:ext cx="3474720" cy="2011680"/>
+          </a:xfrm>
+          <a:prstGeom prst="roundRect">
+            <a:avLst/>
+          </a:prstGeom>
+          <a:solidFill>
+            <a:srgbClr val="FFFFFF"/>
+          </a:solidFill>
+          <a:ln w="25400">
+            <a:solidFill>
+              <a:srgbClr val="E09F3E"/>
+            </a:solidFill>
+          </a:ln>
+        </p:spPr>
+        <p:style>
+          <a:lnRef idx="1">
+            <a:schemeClr val="accent1"/>
+          </a:lnRef>
+          <a:fillRef idx="3">
+            <a:schemeClr val="accent1"/>
+          </a:fillRef>
+          <a:effectRef idx="2">
+            <a:schemeClr val="accent1"/>
+          </a:effectRef>
+          <a:fontRef idx="minor">
+            <a:schemeClr val="lt1"/>
+          </a:fontRef>
+        </p:style>
+        <p:txBody>
+          <a:bodyPr rtlCol="0" anchor="ctr"/>
+          <a:lstStyle/>
+          <a:p>
+            <a:pPr algn="ctr"/>
+          </a:p>
+        </p:txBody>
+      </p:sp>
+      <p:sp>
+        <p:nvSpPr>
+          <p:cNvPr id="8" name="TextBox 7"/>
+          <p:cNvSpPr txBox="1"/>
+          <p:nvPr/>
+        </p:nvSpPr>
+        <p:spPr>
+          <a:xfrm>
+            <a:off x="4526280" y="1645920"/>
+            <a:ext cx="3108960" cy="1737360"/>
+          </a:xfrm>
+          <a:prstGeom prst="rect">
+            <a:avLst/>
+          </a:prstGeom>
+          <a:noFill/>
+        </p:spPr>
+        <p:txBody>
+          <a:bodyPr wrap="square">
+            <a:spAutoFit/>
+          </a:bodyPr>
+          <a:lstStyle/>
+          <a:p>
+            <a:pPr>
+              <a:spcAft>
+                <a:spcPts val="400"/>
+              </a:spcAft>
+              <a:defRPr sz="1600" b="1">
+                <a:solidFill>
+                  <a:srgbClr val="E09F3E"/>
+                </a:solidFill>
+                <a:latin typeface="Microsoft JhengHei"/>
+              </a:defRPr>
+            </a:pPr>
+            <a:r>
+              <a:t>層次二：推論統整題 (60%)</a:t>
+            </a:r>
+          </a:p>
+          <a:p>
+            <a:pPr>
+              <a:spcAft>
+                <a:spcPts val="200"/>
+              </a:spcAft>
+              <a:defRPr sz="1400">
+                <a:solidFill>
+                  <a:srgbClr val="212529"/>
+                </a:solidFill>
+                <a:latin typeface="Microsoft JhengHei"/>
+              </a:defRPr>
+            </a:pPr>
+            <a:r>
+              <a:t>小組互學探究因果關係與多元解法。</a:t>
+            </a:r>
+          </a:p>
+          <a:p>
+            <a:pPr>
+              <a:spcAft>
+                <a:spcPts val="200"/>
+              </a:spcAft>
+              <a:defRPr sz="1400">
+                <a:solidFill>
+                  <a:srgbClr val="212529"/>
+                </a:solidFill>
+                <a:latin typeface="Microsoft JhengHei"/>
+              </a:defRPr>
+            </a:pPr>
+            <a:r>
+              <a:t>• 例：為什麼做此選擇？這兩種算式本質同嗎？</a:t>
+            </a:r>
+          </a:p>
+        </p:txBody>
+      </p:sp>
+      <p:sp>
+        <p:nvSpPr>
+          <p:cNvPr id="9" name="Rounded Rectangle 8"/>
+          <p:cNvSpPr/>
+          <p:nvPr/>
+        </p:nvSpPr>
+        <p:spPr>
+          <a:xfrm>
+            <a:off x="7955280" y="1508760"/>
+            <a:ext cx="3474720" cy="2011680"/>
+          </a:xfrm>
+          <a:prstGeom prst="roundRect">
+            <a:avLst/>
+          </a:prstGeom>
+          <a:solidFill>
+            <a:srgbClr val="FFFFFF"/>
+          </a:solidFill>
+          <a:ln w="25400">
+            <a:solidFill>
+              <a:srgbClr val="E76F51"/>
+            </a:solidFill>
+          </a:ln>
+        </p:spPr>
+        <p:style>
+          <a:lnRef idx="1">
+            <a:schemeClr val="accent1"/>
+          </a:lnRef>
+          <a:fillRef idx="3">
+            <a:schemeClr val="accent1"/>
+          </a:fillRef>
+          <a:effectRef idx="2">
+            <a:schemeClr val="accent1"/>
+          </a:effectRef>
+          <a:fontRef idx="minor">
+            <a:schemeClr val="lt1"/>
+          </a:fontRef>
+        </p:style>
+        <p:txBody>
+          <a:bodyPr rtlCol="0" anchor="ctr"/>
+          <a:lstStyle/>
+          <a:p>
+            <a:pPr algn="ctr"/>
+          </a:p>
+        </p:txBody>
+      </p:sp>
+      <p:sp>
+        <p:nvSpPr>
+          <p:cNvPr id="10" name="TextBox 9"/>
+          <p:cNvSpPr txBox="1"/>
+          <p:nvPr/>
+        </p:nvSpPr>
+        <p:spPr>
+          <a:xfrm>
+            <a:off x="8138160" y="1645920"/>
+            <a:ext cx="3108960" cy="1737360"/>
+          </a:xfrm>
+          <a:prstGeom prst="rect">
+            <a:avLst/>
+          </a:prstGeom>
+          <a:noFill/>
+        </p:spPr>
+        <p:txBody>
+          <a:bodyPr wrap="square">
+            <a:spAutoFit/>
+          </a:bodyPr>
+          <a:lstStyle/>
+          <a:p>
+            <a:pPr>
+              <a:spcAft>
+                <a:spcPts val="400"/>
+              </a:spcAft>
+              <a:defRPr sz="1600" b="1">
+                <a:solidFill>
+                  <a:srgbClr val="E76F51"/>
+                </a:solidFill>
+                <a:latin typeface="Microsoft JhengHei"/>
+              </a:defRPr>
+            </a:pPr>
+            <a:r>
+              <a:t>層次三：伸展跳躍題 (100% Jumping Task)</a:t>
+            </a:r>
+          </a:p>
+          <a:p>
+            <a:pPr>
+              <a:spcAft>
+                <a:spcPts val="200"/>
+              </a:spcAft>
+              <a:defRPr sz="1400">
+                <a:solidFill>
+                  <a:srgbClr val="212529"/>
+                </a:solidFill>
+                <a:latin typeface="Microsoft JhengHei"/>
+              </a:defRPr>
+            </a:pPr>
+            <a:r>
+              <a:t>高認知挑戰、開放思考、促發同儕相互借力！</a:t>
+            </a:r>
+          </a:p>
+          <a:p>
+            <a:pPr>
+              <a:spcAft>
+                <a:spcPts val="200"/>
+              </a:spcAft>
+              <a:defRPr sz="1400">
+                <a:solidFill>
+                  <a:srgbClr val="212529"/>
+                </a:solidFill>
+                <a:latin typeface="Microsoft JhengHei"/>
+              </a:defRPr>
+            </a:pPr>
+            <a:r>
+              <a:t>• 例：如果結局翻轉，如何改寫？有何生活模型？</a:t>
+            </a:r>
+          </a:p>
+        </p:txBody>
+      </p:sp>
+      <p:sp>
+        <p:nvSpPr>
+          <p:cNvPr id="11" name="Rounded Rectangle 10"/>
+          <p:cNvSpPr/>
+          <p:nvPr/>
+        </p:nvSpPr>
+        <p:spPr>
+          <a:xfrm>
+            <a:off x="731520" y="3703320"/>
+            <a:ext cx="10728655" cy="2468880"/>
+          </a:xfrm>
+          <a:prstGeom prst="roundRect">
+            <a:avLst/>
+          </a:prstGeom>
+          <a:solidFill>
+            <a:srgbClr val="1E293B"/>
+          </a:solidFill>
+          <a:ln w="25400">
+            <a:solidFill>
+              <a:srgbClr val="52B788"/>
+            </a:solidFill>
+          </a:ln>
+        </p:spPr>
+        <p:style>
+          <a:lnRef idx="1">
+            <a:schemeClr val="accent1"/>
+          </a:lnRef>
+          <a:fillRef idx="3">
+            <a:schemeClr val="accent1"/>
+          </a:fillRef>
+          <a:effectRef idx="2">
+            <a:schemeClr val="accent1"/>
+          </a:effectRef>
+          <a:fontRef idx="minor">
+            <a:schemeClr val="lt1"/>
+          </a:fontRef>
+        </p:style>
+        <p:txBody>
+          <a:bodyPr rtlCol="0" anchor="ctr"/>
+          <a:lstStyle/>
+          <a:p>
+            <a:pPr algn="ctr"/>
+          </a:p>
+        </p:txBody>
+      </p:sp>
+      <p:sp>
+        <p:nvSpPr>
+          <p:cNvPr id="12" name="TextBox 11"/>
+          <p:cNvSpPr txBox="1"/>
+          <p:nvPr/>
+        </p:nvSpPr>
+        <p:spPr>
+          <a:xfrm>
+            <a:off x="1005840" y="3794760"/>
+            <a:ext cx="10149840" cy="2286000"/>
+          </a:xfrm>
+          <a:prstGeom prst="rect">
+            <a:avLst/>
+          </a:prstGeom>
+          <a:noFill/>
+        </p:spPr>
+        <p:txBody>
+          <a:bodyPr wrap="square">
+            <a:spAutoFit/>
+          </a:bodyPr>
+          <a:lstStyle/>
+          <a:p>
+            <a:pPr>
+              <a:spcAft>
                 <a:spcPts val="600"/>
               </a:spcAft>
-              <a:defRPr sz="1250" b="1">
-                <a:solidFill>
-                  <a:srgbClr val="2D6A4F"/>
-                </a:solidFill>
-                <a:latin typeface="Microsoft JhengHei"/>
-              </a:defRPr>
-            </a:pPr>
-            <a:r>
-              <a:t>🪄 現場實作：二橋專屬 AI 跳躍任務命題咒語（複製即可貼上 Gemini / ChatGPT）</a:t>
-            </a:r>
-          </a:p>
-          <a:p>
-            <a:pPr>
-              <a:spcAft>
-                <a:spcPts val="100"/>
-              </a:spcAft>
-              <a:defRPr sz="950">
-                <a:solidFill>
-                  <a:srgbClr val="2D6A4F"/>
-                </a:solidFill>
-                <a:latin typeface="Consolas"/>
-              </a:defRPr>
-            </a:pPr>
-            <a:r>
-              <a:t>【Prompt 咒語範本】</a:t>
-            </a:r>
-          </a:p>
-          <a:p>
-            <a:pPr>
-              <a:spcAft>
-                <a:spcPts val="100"/>
-              </a:spcAft>
-              <a:defRPr sz="950">
-                <a:solidFill>
-                  <a:srgbClr val="2B2D42"/>
-                </a:solidFill>
-                <a:latin typeface="Microsoft JhengHei"/>
-              </a:defRPr>
-            </a:pPr>
-            <a:r>
-              <a:t>你是一位專精日本佐藤學『學習共同體』教學法的國小教材專家。</a:t>
-            </a:r>
-          </a:p>
-          <a:p>
-            <a:pPr>
-              <a:spcAft>
-                <a:spcPts val="100"/>
-              </a:spcAft>
-              <a:defRPr sz="950">
-                <a:solidFill>
-                  <a:srgbClr val="2B2D42"/>
-                </a:solidFill>
-                <a:latin typeface="Microsoft JhengHei"/>
-              </a:defRPr>
-            </a:pPr>
-            <a:r>
-              <a:t>我目前要教授［科目/年級/單元名稱］，附上課文段落或數學核心概念：［貼上課文或概念］。</a:t>
-            </a:r>
-          </a:p>
-          <a:p>
-            <a:pPr>
-              <a:spcAft>
-                <a:spcPts val="100"/>
-              </a:spcAft>
-              <a:defRPr sz="950">
-                <a:solidFill>
-                  <a:srgbClr val="2B2D42"/>
+              <a:defRPr sz="1600" b="1">
+                <a:solidFill>
+                  <a:srgbClr val="52B788"/>
+                </a:solidFill>
+                <a:latin typeface="Microsoft JhengHei"/>
+              </a:defRPr>
+            </a:pPr>
+            <a:r>
+              <a:t>🪄 現場實作：二橋專屬 AI 跳躍任務命題咒語（複製貼上 Gemini / ChatGPT）</a:t>
+            </a:r>
+          </a:p>
+          <a:p>
+            <a:pPr>
+              <a:spcAft>
+                <a:spcPts val="200"/>
+              </a:spcAft>
+              <a:defRPr sz="1350">
+                <a:solidFill>
+                  <a:srgbClr val="F1F5F9"/>
+                </a:solidFill>
+                <a:latin typeface="Microsoft JhengHei"/>
+              </a:defRPr>
+            </a:pPr>
+            <a:r>
+              <a:t>你是一位專精日本佐藤學『學習共同體』教學法的國小教材研發專家。</a:t>
+            </a:r>
+          </a:p>
+          <a:p>
+            <a:pPr>
+              <a:spcAft>
+                <a:spcPts val="200"/>
+              </a:spcAft>
+              <a:defRPr sz="1350">
+                <a:solidFill>
+                  <a:srgbClr val="F1F5F9"/>
+                </a:solidFill>
+                <a:latin typeface="Microsoft JhengHei"/>
+              </a:defRPr>
+            </a:pPr>
+            <a:r>
+              <a:t>我目前要教授［科目/年級/單元名稱］，課本段落或核心概念如下：［貼上課文或概念］。</a:t>
+            </a:r>
+          </a:p>
+          <a:p>
+            <a:pPr>
+              <a:spcAft>
+                <a:spcPts val="200"/>
+              </a:spcAft>
+              <a:defRPr sz="1350">
+                <a:solidFill>
+                  <a:srgbClr val="F1F5F9"/>
                 </a:solidFill>
                 <a:latin typeface="Microsoft JhengHei"/>
               </a:defRPr>
@@ -8366,43 +8202,43 @@
           <a:p>
             <a:pPr>
               <a:spcAft>
-                <a:spcPts val="100"/>
-              </a:spcAft>
-              <a:defRPr sz="950">
-                <a:solidFill>
-                  <a:srgbClr val="2B2D42"/>
-                </a:solidFill>
-                <a:latin typeface="Microsoft JhengHei"/>
-              </a:defRPr>
-            </a:pPr>
-            <a:r>
-              <a:t>1. 2題小組共學互學探究題（促發學生提出不同觀察角度與討論）。</a:t>
-            </a:r>
-          </a:p>
-          <a:p>
-            <a:pPr>
-              <a:spcAft>
-                <a:spcPts val="100"/>
-              </a:spcAft>
-              <a:defRPr sz="950">
-                <a:solidFill>
-                  <a:srgbClr val="2B2D42"/>
-                </a:solidFill>
-                <a:latin typeface="Microsoft JhengHei"/>
-              </a:defRPr>
-            </a:pPr>
-            <a:r>
-              <a:t>2. 1題高挑戰度的『伸展跳躍任務 (Jumping Task)』（具備認知衝突、開放思考、非單一標準答案，需小組協作共構才能解出）。</a:t>
-            </a:r>
-          </a:p>
-          <a:p>
-            <a:pPr>
-              <a:spcAft>
-                <a:spcPts val="100"/>
-              </a:spcAft>
-              <a:defRPr sz="950">
-                <a:solidFill>
-                  <a:srgbClr val="2B2D42"/>
+                <a:spcPts val="200"/>
+              </a:spcAft>
+              <a:defRPr sz="1350">
+                <a:solidFill>
+                  <a:srgbClr val="F1F5F9"/>
+                </a:solidFill>
+                <a:latin typeface="Microsoft JhengHei"/>
+              </a:defRPr>
+            </a:pPr>
+            <a:r>
+              <a:t>1. 2 題小組共學互學探究題（促發學生提出不同觀察角度與深層對話）。</a:t>
+            </a:r>
+          </a:p>
+          <a:p>
+            <a:pPr>
+              <a:spcAft>
+                <a:spcPts val="200"/>
+              </a:spcAft>
+              <a:defRPr sz="1350">
+                <a:solidFill>
+                  <a:srgbClr val="F1F5F9"/>
+                </a:solidFill>
+                <a:latin typeface="Microsoft JhengHei"/>
+              </a:defRPr>
+            </a:pPr>
+            <a:r>
+              <a:t>2. 1 題高挑戰度的『伸展跳躍任務 (Jumping Task)』（具備認知衝突、開放思考、非單一標準答案）。</a:t>
+            </a:r>
+          </a:p>
+          <a:p>
+            <a:pPr>
+              <a:spcAft>
+                <a:spcPts val="200"/>
+              </a:spcAft>
+              <a:defRPr sz="1350">
+                <a:solidFill>
+                  <a:srgbClr val="F1F5F9"/>
                 </a:solidFill>
                 <a:latin typeface="Microsoft JhengHei"/>
               </a:defRPr>
@@ -8485,7 +8321,7 @@
         <p:spPr>
           <a:xfrm>
             <a:off x="731520" y="365760"/>
-            <a:ext cx="10698480" cy="822960"/>
+            <a:ext cx="10058400" cy="1005840"/>
           </a:xfrm>
           <a:prstGeom prst="rect">
             <a:avLst/>
@@ -8499,7 +8335,10 @@
           <a:lstStyle/>
           <a:p>
             <a:pPr>
-              <a:defRPr sz="1100" b="1">
+              <a:spcAft>
+                <a:spcPts val="200"/>
+              </a:spcAft>
+              <a:defRPr sz="1300" b="1">
                 <a:solidFill>
                   <a:srgbClr val="2D6A4F"/>
                 </a:solidFill>
@@ -8507,14 +8346,14 @@
               </a:defRPr>
             </a:pPr>
             <a:r>
-              <a:t>學習共同體輔導團・2小時到校輔導教案建議</a:t>
-            </a:r>
-          </a:p>
-          <a:p>
-            <a:pPr>
-              <a:defRPr sz="2200" b="1">
-                <a:solidFill>
-                  <a:srgbClr val="2B2D42"/>
+              <a:t>學習共同體輔導團・2小時到校輔導教案</a:t>
+            </a:r>
+          </a:p>
+          <a:p>
+            <a:pPr>
+              <a:defRPr sz="2600" b="1">
+                <a:solidFill>
+                  <a:srgbClr val="1B4332"/>
                 </a:solidFill>
                 <a:latin typeface="Microsoft JhengHei"/>
               </a:defRPr>
@@ -8541,7 +8380,7 @@
         </p:blipFill>
         <p:spPr>
           <a:xfrm>
-            <a:off x="10789920" y="320040"/>
+            <a:off x="10881360" y="365760"/>
             <a:ext cx="685800" cy="685800"/>
           </a:xfrm>
           <a:prstGeom prst="rect">
@@ -8557,8 +8396,8 @@
         </p:nvSpPr>
         <p:spPr>
           <a:xfrm>
-            <a:off x="731520" y="1463040"/>
-            <a:ext cx="5212080" cy="4754880"/>
+            <a:off x="731520" y="1508760"/>
+            <a:ext cx="5212080" cy="4663440"/>
           </a:xfrm>
           <a:prstGeom prst="roundRect">
             <a:avLst/>
@@ -8566,7 +8405,7 @@
           <a:solidFill>
             <a:srgbClr val="FFFFFF"/>
           </a:solidFill>
-          <a:ln w="19050">
+          <a:ln w="25400">
             <a:solidFill>
               <a:srgbClr val="E76F51"/>
             </a:solidFill>
@@ -8602,8 +8441,8 @@
         </p:nvSpPr>
         <p:spPr>
           <a:xfrm>
-            <a:off x="1005840" y="1645920"/>
-            <a:ext cx="4663440" cy="4389120"/>
+            <a:off x="1005840" y="1691640"/>
+            <a:ext cx="4663440" cy="4297680"/>
           </a:xfrm>
           <a:prstGeom prst="rect">
             <a:avLst/>
@@ -8617,7 +8456,7 @@
           <a:lstStyle/>
           <a:p>
             <a:pPr>
-              <a:defRPr sz="1200" b="1">
+              <a:defRPr sz="1500" b="1">
                 <a:solidFill>
                   <a:srgbClr val="E76F51"/>
                 </a:solidFill>
@@ -8625,7 +8464,7 @@
               </a:defRPr>
             </a:pPr>
             <a:r>
-              <a:t>❓ 二橋低年級老師提問：</a:t>
+              <a:t>❓ 低年級老師提問：</a:t>
             </a:r>
           </a:p>
           <a:p>
@@ -8633,9 +8472,9 @@
               <a:spcAft>
                 <a:spcPts val="1200"/>
               </a:spcAft>
-              <a:defRPr sz="1300" b="1">
-                <a:solidFill>
-                  <a:srgbClr val="2B2D42"/>
+              <a:defRPr sz="1900" b="1">
+                <a:solidFill>
+                  <a:srgbClr val="1B4332"/>
                 </a:solidFill>
                 <a:latin typeface="Microsoft JhengHei"/>
               </a:defRPr>
@@ -8647,9 +8486,9 @@
           <a:p>
             <a:pPr>
               <a:spcAft>
-                <a:spcPts val="600"/>
-              </a:spcAft>
-              <a:defRPr sz="1050" b="1">
+                <a:spcPts val="800"/>
+              </a:spcAft>
+              <a:defRPr sz="1600" b="1">
                 <a:solidFill>
                   <a:srgbClr val="2D6A4F"/>
                 </a:solidFill>
@@ -8663,49 +8502,49 @@
           <a:p>
             <a:pPr>
               <a:spcAft>
-                <a:spcPts val="600"/>
-              </a:spcAft>
-              <a:defRPr sz="1050" b="0">
-                <a:solidFill>
-                  <a:srgbClr val="2B2D42"/>
-                </a:solidFill>
-                <a:latin typeface="Microsoft JhengHei"/>
-              </a:defRPr>
-            </a:pPr>
-            <a:r>
-              <a:t>1. 【取消個人帳號】低年級不記帳密！每組固定一台貼有顏色/動物貼紙的公用平板，掃 QR-code 直接進任務。</a:t>
-            </a:r>
-          </a:p>
-          <a:p>
-            <a:pPr>
-              <a:spcAft>
-                <a:spcPts val="600"/>
-              </a:spcAft>
-              <a:defRPr sz="1050" b="0">
-                <a:solidFill>
-                  <a:srgbClr val="2B2D42"/>
-                </a:solidFill>
-                <a:latin typeface="Microsoft JhengHei"/>
-              </a:defRPr>
-            </a:pPr>
-            <a:r>
-              <a:t>2. 【語音輸入代替打字】學生按一下注音麥克風直接說話轉文字，識字量少也能表達思維。</a:t>
-            </a:r>
-          </a:p>
-          <a:p>
-            <a:pPr>
-              <a:spcAft>
-                <a:spcPts val="600"/>
-              </a:spcAft>
-              <a:defRPr sz="1050" b="0">
-                <a:solidFill>
-                  <a:srgbClr val="2B2D42"/>
-                </a:solidFill>
-                <a:latin typeface="Microsoft JhengHei"/>
-              </a:defRPr>
-            </a:pPr>
-            <a:r>
-              <a:t>3. 【拍照代替複雜操作】實體積木、數學附件擺好後，小組『按拍照鍵』直接傳上 Padlet，3秒完成記錄！</a:t>
+                <a:spcPts val="800"/>
+              </a:spcAft>
+              <a:defRPr sz="1500" b="0">
+                <a:solidFill>
+                  <a:srgbClr val="212529"/>
+                </a:solidFill>
+                <a:latin typeface="Microsoft JhengHei"/>
+              </a:defRPr>
+            </a:pPr>
+            <a:r>
+              <a:t>1. 【取消個人帳密】低年級不記帳號！每組 1 台貼顏色標籤的公用平板，掃 QR-code 直接進任務畫面。</a:t>
+            </a:r>
+          </a:p>
+          <a:p>
+            <a:pPr>
+              <a:spcAft>
+                <a:spcPts val="800"/>
+              </a:spcAft>
+              <a:defRPr sz="1500" b="0">
+                <a:solidFill>
+                  <a:srgbClr val="212529"/>
+                </a:solidFill>
+                <a:latin typeface="Microsoft JhengHei"/>
+              </a:defRPr>
+            </a:pPr>
+            <a:r>
+              <a:t>2. 【語音輸入代替打字】學生按麥克風說話自動轉文字，識字量少也能暢所欲言表達思維。</a:t>
+            </a:r>
+          </a:p>
+          <a:p>
+            <a:pPr>
+              <a:spcAft>
+                <a:spcPts val="800"/>
+              </a:spcAft>
+              <a:defRPr sz="1500" b="0">
+                <a:solidFill>
+                  <a:srgbClr val="212529"/>
+                </a:solidFill>
+                <a:latin typeface="Microsoft JhengHei"/>
+              </a:defRPr>
+            </a:pPr>
+            <a:r>
+              <a:t>3. 【拍照代替複雜操作】實體積木、小白板擺好後，小組『按拍照鍵』直接上傳，3 秒完成記錄！</a:t>
             </a:r>
           </a:p>
         </p:txBody>
@@ -8718,8 +8557,8 @@
         </p:nvSpPr>
         <p:spPr>
           <a:xfrm>
-            <a:off x="6217920" y="1463040"/>
-            <a:ext cx="5212080" cy="4754880"/>
+            <a:off x="6217920" y="1508760"/>
+            <a:ext cx="5212080" cy="4663440"/>
           </a:xfrm>
           <a:prstGeom prst="roundRect">
             <a:avLst/>
@@ -8727,7 +8566,7 @@
           <a:solidFill>
             <a:srgbClr val="FFFFFF"/>
           </a:solidFill>
-          <a:ln w="19050">
+          <a:ln w="25400">
             <a:solidFill>
               <a:srgbClr val="2D6A4F"/>
             </a:solidFill>
@@ -8763,8 +8602,8 @@
         </p:nvSpPr>
         <p:spPr>
           <a:xfrm>
-            <a:off x="6492240" y="1645920"/>
-            <a:ext cx="4663440" cy="4389120"/>
+            <a:off x="6492240" y="1691640"/>
+            <a:ext cx="4663440" cy="4297680"/>
           </a:xfrm>
           <a:prstGeom prst="rect">
             <a:avLst/>
@@ -8778,7 +8617,7 @@
           <a:lstStyle/>
           <a:p>
             <a:pPr>
-              <a:defRPr sz="1200" b="1">
+              <a:defRPr sz="1500" b="1">
                 <a:solidFill>
                   <a:srgbClr val="2D6A4F"/>
                 </a:solidFill>
@@ -8786,7 +8625,7 @@
               </a:defRPr>
             </a:pPr>
             <a:r>
-              <a:t>❓ 二橋科任/資深老師提問：</a:t>
+              <a:t>❓ 科任/資深老師提問：</a:t>
             </a:r>
           </a:p>
           <a:p>
@@ -8794,23 +8633,23 @@
               <a:spcAft>
                 <a:spcPts val="1200"/>
               </a:spcAft>
-              <a:defRPr sz="1200" b="1">
-                <a:solidFill>
-                  <a:srgbClr val="2B2D42"/>
-                </a:solidFill>
-                <a:latin typeface="Microsoft JhengHei"/>
-              </a:defRPr>
-            </a:pPr>
-            <a:r>
-              <a:t>「如何設計互動小遊戲(加入教材)，且不耗費許多時間？」</a:t>
-            </a:r>
-          </a:p>
-          <a:p>
-            <a:pPr>
-              <a:spcAft>
-                <a:spcPts val="600"/>
-              </a:spcAft>
-              <a:defRPr sz="1050" b="1">
+              <a:defRPr sz="1800" b="1">
+                <a:solidFill>
+                  <a:srgbClr val="1B4332"/>
+                </a:solidFill>
+                <a:latin typeface="Microsoft JhengHei"/>
+              </a:defRPr>
+            </a:pPr>
+            <a:r>
+              <a:t>「如何設計互動小遊戲且不耗費許多時間？」</a:t>
+            </a:r>
+          </a:p>
+          <a:p>
+            <a:pPr>
+              <a:spcAft>
+                <a:spcPts val="800"/>
+              </a:spcAft>
+              <a:defRPr sz="1600" b="1">
                 <a:solidFill>
                   <a:srgbClr val="2D6A4F"/>
                 </a:solidFill>
@@ -8824,49 +8663,49 @@
           <a:p>
             <a:pPr>
               <a:spcAft>
-                <a:spcPts val="600"/>
-              </a:spcAft>
-              <a:defRPr sz="1050" b="0">
-                <a:solidFill>
-                  <a:srgbClr val="2B2D42"/>
-                </a:solidFill>
-                <a:latin typeface="Microsoft JhengHei"/>
-              </a:defRPr>
-            </a:pPr>
-            <a:r>
-              <a:t>1. 【AI 餵料 1分鐘生題庫】將課本文字貼給 Gemini：『產生 5題四選一選擇題』，複製直接匯入 Wordwall。</a:t>
-            </a:r>
-          </a:p>
-          <a:p>
-            <a:pPr>
-              <a:spcAft>
-                <a:spcPts val="600"/>
-              </a:spcAft>
-              <a:defRPr sz="1050" b="0">
-                <a:solidFill>
-                  <a:srgbClr val="2B2D42"/>
-                </a:solidFill>
-                <a:latin typeface="Microsoft JhengHei"/>
-              </a:defRPr>
-            </a:pPr>
-            <a:r>
-              <a:t>2. 【Wordwall 一鍵換造型】貼入一次題目，自動切換打地鼠、輪盤、連連看，免重複備課！</a:t>
-            </a:r>
-          </a:p>
-          <a:p>
-            <a:pPr>
-              <a:spcAft>
-                <a:spcPts val="600"/>
-              </a:spcAft>
-              <a:defRPr sz="1050" b="0">
-                <a:solidFill>
-                  <a:srgbClr val="2B2D42"/>
-                </a:solidFill>
-                <a:latin typeface="Microsoft JhengHei"/>
-              </a:defRPr>
-            </a:pPr>
-            <a:r>
-              <a:t>3. 【86吋大螢幕雙人擂台】不用發平板！請兩位學生直接上講台用手指在大螢幕搶答，台下全班同步思考，零載具維護！</a:t>
+                <a:spcPts val="800"/>
+              </a:spcAft>
+              <a:defRPr sz="1500" b="0">
+                <a:solidFill>
+                  <a:srgbClr val="212529"/>
+                </a:solidFill>
+                <a:latin typeface="Microsoft JhengHei"/>
+              </a:defRPr>
+            </a:pPr>
+            <a:r>
+              <a:t>1. 【AI 餵料 1 分鐘生題庫】將課本貼給 Gemini：『產生 5 題四選一選擇題』，複製直接匯入 Wordwall。</a:t>
+            </a:r>
+          </a:p>
+          <a:p>
+            <a:pPr>
+              <a:spcAft>
+                <a:spcPts val="800"/>
+              </a:spcAft>
+              <a:defRPr sz="1500" b="0">
+                <a:solidFill>
+                  <a:srgbClr val="212529"/>
+                </a:solidFill>
+                <a:latin typeface="Microsoft JhengHei"/>
+              </a:defRPr>
+            </a:pPr>
+            <a:r>
+              <a:t>2. 【Wordwall 一鍵換造型】貼入一次題目，系統自動切換打地鼠、輪盤、連連看，免重複備課！</a:t>
+            </a:r>
+          </a:p>
+          <a:p>
+            <a:pPr>
+              <a:spcAft>
+                <a:spcPts val="800"/>
+              </a:spcAft>
+              <a:defRPr sz="1500" b="0">
+                <a:solidFill>
+                  <a:srgbClr val="212529"/>
+                </a:solidFill>
+                <a:latin typeface="Microsoft JhengHei"/>
+              </a:defRPr>
+            </a:pPr>
+            <a:r>
+              <a:t>3. 【86吋大螢幕雙人擂台】免發平板！兩位學生直接上台在大螢幕觸控搶答，全班同步觀戰思辨！</a:t>
             </a:r>
           </a:p>
         </p:txBody>

--- a/新北市二橋國小_數位工具教與學_2小時到校輔導教案簡報.pptx
+++ b/新北市二橋國小_數位工具教與學_2小時到校輔導教案簡報.pptx
@@ -3219,6 +3219,7 @@
               </a:defRPr>
             </a:pPr>
             <a:r>
+              <a:rPr/>
               <a:t>新北市學習共同體輔導團｜入校輔導專案</a:t>
             </a:r>
           </a:p>
@@ -3235,10 +3236,12 @@
               </a:defRPr>
             </a:pPr>
             <a:r>
+              <a:rPr/>
               <a:t>新北市二橋國小「數位工具教與學」</a:t>
             </a:r>
             <a:br/>
             <a:r>
+              <a:rPr/>
               <a:t>2 小時到校輔導課程設計教案</a:t>
             </a:r>
           </a:p>
@@ -3255,6 +3258,7 @@
               </a:defRPr>
             </a:pPr>
             <a:r>
+              <a:rPr/>
               <a:t>🎯 依據 19 位全校教師問卷診斷・破除載具分心・AI 命製跳躍任務</a:t>
             </a:r>
           </a:p>
@@ -3268,10 +3272,12 @@
               </a:defRPr>
             </a:pPr>
             <a:r>
+              <a:rPr/>
               <a:t>研習對象：新北市二橋國小全體教師　｜　研習時間：120 分鐘（實作工作坊）</a:t>
             </a:r>
             <a:br/>
             <a:r>
+              <a:rPr/>
               <a:t>教案規劃：新北市學習共同體輔導團　｜　數據來源：115數位工具前置調查</a:t>
             </a:r>
           </a:p>
@@ -3395,6 +3401,7 @@
               </a:defRPr>
             </a:pPr>
             <a:r>
+              <a:rPr/>
               <a:t>攜手二橋・課後落地有保障</a:t>
             </a:r>
           </a:p>
@@ -3408,6 +3415,7 @@
               </a:defRPr>
             </a:pPr>
             <a:r>
+              <a:rPr/>
               <a:t>🎁 研習交付成果與課後陪伴資源</a:t>
             </a:r>
           </a:p>
@@ -3492,6 +3500,7 @@
               </a:defRPr>
             </a:pPr>
             <a:r>
+              <a:rPr/>
               <a:t>📦 成果一：即戰力教案現場產出</a:t>
             </a:r>
           </a:p>
@@ -3505,6 +3514,7 @@
               </a:defRPr>
             </a:pPr>
             <a:r>
+              <a:rPr/>
               <a:t>每位參與研習的老師，在 40 分鐘實作中現場完成 1 份下週就能直接進班上陣的學共伸展跳躍任務教案！</a:t>
             </a:r>
           </a:p>
@@ -3589,6 +3599,7 @@
               </a:defRPr>
             </a:pPr>
             <a:r>
+              <a:rPr/>
               <a:t>🪄 成果二：二橋專屬 AI 提示詞速查卡</a:t>
             </a:r>
           </a:p>
@@ -3602,6 +3613,7 @@
               </a:defRPr>
             </a:pPr>
             <a:r>
+              <a:rPr/>
               <a:t>提供二橋教師專屬《學共 AI 備課提示詞手冊》，包含國語閱讀理解、數學多解探究之標準 Prompt。</a:t>
             </a:r>
           </a:p>
@@ -3686,6 +3698,7 @@
               </a:defRPr>
             </a:pPr>
             <a:r>
+              <a:rPr/>
               <a:t>📋 成果三：學共載具班級常規檢核表</a:t>
             </a:r>
           </a:p>
@@ -3699,6 +3712,7 @@
               </a:defRPr>
             </a:pPr>
             <a:r>
+              <a:rPr/>
               <a:t>提供低年級與中高年級適用的課堂常規檢核清單（螢幕蓋板三步驟口令、4人小組分工合作指標）。</a:t>
             </a:r>
           </a:p>
@@ -3783,6 +3797,7 @@
               </a:defRPr>
             </a:pPr>
             <a:r>
+              <a:rPr/>
               <a:t>🤝 成果四：輔導團雲端資源庫持續陪伴</a:t>
             </a:r>
           </a:p>
@@ -3796,6 +3811,7 @@
               </a:defRPr>
             </a:pPr>
             <a:r>
+              <a:rPr/>
               <a:t>建立二橋國小專屬雲端硬碟，講師示範簡報、Padlet 範本、觀課議課實例影片持續共享與支持更新。</a:t>
             </a:r>
           </a:p>
@@ -3898,6 +3914,7 @@
               </a:defRPr>
             </a:pPr>
             <a:r>
+              <a:rPr/>
               <a:t>學習共同體輔導團・2小時到校輔導教案</a:t>
             </a:r>
           </a:p>
@@ -3911,6 +3928,7 @@
               </a:defRPr>
             </a:pPr>
             <a:r>
+              <a:rPr/>
               <a:t>二橋國小學情診斷：全校教師四大關鍵畫像</a:t>
             </a:r>
           </a:p>
@@ -4019,6 +4037,7 @@
               </a:defRPr>
             </a:pPr>
             <a:r>
+              <a:rPr/>
               <a:t>👥 年段極均衡</a:t>
             </a:r>
           </a:p>
@@ -4035,6 +4054,7 @@
               </a:defRPr>
             </a:pPr>
             <a:r>
+              <a:rPr/>
               <a:t>19 位</a:t>
             </a:r>
           </a:p>
@@ -4051,6 +4071,7 @@
               </a:defRPr>
             </a:pPr>
             <a:r>
+              <a:rPr/>
               <a:t>低年級 4 位 (21%)</a:t>
             </a:r>
           </a:p>
@@ -4067,6 +4088,7 @@
               </a:defRPr>
             </a:pPr>
             <a:r>
+              <a:rPr/>
               <a:t>中年級 4 位 (21%)</a:t>
             </a:r>
           </a:p>
@@ -4083,6 +4105,7 @@
               </a:defRPr>
             </a:pPr>
             <a:r>
+              <a:rPr/>
               <a:t>高年級 4 位 (21%)</a:t>
             </a:r>
           </a:p>
@@ -4099,6 +4122,7 @@
               </a:defRPr>
             </a:pPr>
             <a:r>
+              <a:rPr/>
               <a:t>行政科任 7 位 (37%)</a:t>
             </a:r>
           </a:p>
@@ -4115,6 +4139,7 @@
               </a:defRPr>
             </a:pPr>
             <a:r>
+              <a:rPr/>
               <a:t>★ 研習兼顧跨學段彈性</a:t>
             </a:r>
           </a:p>
@@ -4199,6 +4224,7 @@
               </a:defRPr>
             </a:pPr>
             <a:r>
+              <a:rPr/>
               <a:t>🏆 資深骨幹主力</a:t>
             </a:r>
           </a:p>
@@ -4215,6 +4241,7 @@
               </a:defRPr>
             </a:pPr>
             <a:r>
+              <a:rPr/>
               <a:t>95%</a:t>
             </a:r>
           </a:p>
@@ -4231,6 +4258,7 @@
               </a:defRPr>
             </a:pPr>
             <a:r>
+              <a:rPr/>
               <a:t>21年以上資深 7 位 (37%)</a:t>
             </a:r>
           </a:p>
@@ -4247,6 +4275,7 @@
               </a:defRPr>
             </a:pPr>
             <a:r>
+              <a:rPr/>
               <a:t>中生代教師 6 位 (32%)</a:t>
             </a:r>
           </a:p>
@@ -4263,6 +4292,7 @@
               </a:defRPr>
             </a:pPr>
             <a:r>
+              <a:rPr/>
               <a:t>資深教師 5 位 (26%)</a:t>
             </a:r>
           </a:p>
@@ -4279,6 +4309,7 @@
               </a:defRPr>
             </a:pPr>
             <a:r>
+              <a:rPr/>
               <a:t>★ 教學底蘊極深厚</a:t>
             </a:r>
           </a:p>
@@ -4363,6 +4394,7 @@
               </a:defRPr>
             </a:pPr>
             <a:r>
+              <a:rPr/>
               <a:t>🖥️ 關鍵硬體王牌</a:t>
             </a:r>
           </a:p>
@@ -4379,6 +4411,7 @@
               </a:defRPr>
             </a:pPr>
             <a:r>
+              <a:rPr/>
               <a:t>100%</a:t>
             </a:r>
           </a:p>
@@ -4395,6 +4428,7 @@
               </a:defRPr>
             </a:pPr>
             <a:r>
+              <a:rPr/>
               <a:t>全校 19 班均內建</a:t>
             </a:r>
           </a:p>
@@ -4411,6 +4445,7 @@
               </a:defRPr>
             </a:pPr>
             <a:r>
+              <a:rPr/>
               <a:t>86 吋大型觸控螢幕！</a:t>
             </a:r>
           </a:p>
@@ -4427,6 +4462,7 @@
               </a:defRPr>
             </a:pPr>
             <a:r>
+              <a:rPr/>
               <a:t>(平板抽用或生生用)</a:t>
             </a:r>
           </a:p>
@@ -4443,6 +4479,7 @@
               </a:defRPr>
             </a:pPr>
             <a:r>
+              <a:rPr/>
               <a:t>★ 重點在大螢幕共構</a:t>
             </a:r>
           </a:p>
@@ -4527,6 +4564,7 @@
               </a:defRPr>
             </a:pPr>
             <a:r>
+              <a:rPr/>
               <a:t>📱 載具使用頻率</a:t>
             </a:r>
           </a:p>
@@ -4543,6 +4581,7 @@
               </a:defRPr>
             </a:pPr>
             <a:r>
+              <a:rPr/>
               <a:t>雙峰分佈</a:t>
             </a:r>
           </a:p>
@@ -4559,6 +4598,7 @@
               </a:defRPr>
             </a:pPr>
             <a:r>
+              <a:rPr/>
               <a:t>每週4次以上：37%</a:t>
             </a:r>
           </a:p>
@@ -4575,6 +4615,7 @@
               </a:defRPr>
             </a:pPr>
             <a:r>
+              <a:rPr/>
               <a:t>每月1-2次：26%</a:t>
             </a:r>
           </a:p>
@@ -4591,6 +4632,7 @@
               </a:defRPr>
             </a:pPr>
             <a:r>
+              <a:rPr/>
               <a:t>偶爾使用：16%</a:t>
             </a:r>
           </a:p>
@@ -4607,6 +4649,7 @@
               </a:defRPr>
             </a:pPr>
             <a:r>
+              <a:rPr/>
               <a:t>★ 高頻與少用並存</a:t>
             </a:r>
           </a:p>
@@ -4709,6 +4752,7 @@
               </a:defRPr>
             </a:pPr>
             <a:r>
+              <a:rPr/>
               <a:t>學習共同體輔導團・2小時到校輔導教案</a:t>
             </a:r>
           </a:p>
@@ -4722,6 +4766,7 @@
               </a:defRPr>
             </a:pPr>
             <a:r>
+              <a:rPr/>
               <a:t>二橋三大痛點魔王 vs 模組票選期待 Top 3</a:t>
             </a:r>
           </a:p>
@@ -4830,6 +4875,7 @@
               </a:defRPr>
             </a:pPr>
             <a:r>
+              <a:rPr/>
               <a:t>🚨 二橋教師最大的三個課堂卡點</a:t>
             </a:r>
           </a:p>
@@ -4846,6 +4892,7 @@
               </a:defRPr>
             </a:pPr>
             <a:r>
+              <a:rPr/>
               <a:t>1. 載具分心與破壞傾聽 (53%)</a:t>
             </a:r>
           </a:p>
@@ -4862,6 +4909,7 @@
               </a:defRPr>
             </a:pPr>
             <a:r>
+              <a:rPr/>
               <a:t>玩遊戲、發呆、不聽發言；螢幕亮著時眼神不再注視同伴。</a:t>
             </a:r>
           </a:p>
@@ -4878,6 +4926,7 @@
               </a:defRPr>
             </a:pPr>
             <a:r>
+              <a:rPr/>
               <a:t>2. 操作載具耗時太久 (47%)</a:t>
             </a:r>
           </a:p>
@@ -4894,6 +4943,7 @@
               </a:defRPr>
             </a:pPr>
             <a:r>
+              <a:rPr/>
               <a:t>帳號登入繁瑣、連線不穩；搞載具嚴重壓縮小組深思時間！</a:t>
             </a:r>
           </a:p>
@@ -4910,6 +4960,7 @@
               </a:defRPr>
             </a:pPr>
             <a:r>
+              <a:rPr/>
               <a:t>3. 跳躍題設計缺乏指引 (32%)</a:t>
             </a:r>
           </a:p>
@@ -4926,6 +4977,7 @@
               </a:defRPr>
             </a:pPr>
             <a:r>
+              <a:rPr/>
               <a:t>不知道如何結合數位設計高挑戰題（跳躍題信心僅 2.68 分）。</a:t>
             </a:r>
           </a:p>
@@ -5010,6 +5062,7 @@
               </a:defRPr>
             </a:pPr>
             <a:r>
+              <a:rPr/>
               <a:t>🎯 研習實作模組期待排行 Top 3</a:t>
             </a:r>
           </a:p>
@@ -5026,6 +5079,7 @@
               </a:defRPr>
             </a:pPr>
             <a:r>
+              <a:rPr/>
               <a:t>🥇 【模組A】AI 命製跳躍任務 (10票 / 53%)</a:t>
             </a:r>
           </a:p>
@@ -5042,6 +5096,7 @@
               </a:defRPr>
             </a:pPr>
             <a:r>
+              <a:rPr/>
               <a:t>用 Gemini / NotebookLM 備課，3分鐘產出高層次跳躍題。</a:t>
             </a:r>
           </a:p>
@@ -5058,6 +5113,7 @@
               </a:defRPr>
             </a:pPr>
             <a:r>
+              <a:rPr/>
               <a:t>🥈 【模組B】Padlet 共學互學神器 (9票 / 47%)</a:t>
             </a:r>
           </a:p>
@@ -5074,6 +5130,7 @@
               </a:defRPr>
             </a:pPr>
             <a:r>
+              <a:rPr/>
               <a:t>免付費互動牆，小組討論一鍵張貼，串聯大螢幕共構。</a:t>
             </a:r>
           </a:p>
@@ -5090,6 +5147,7 @@
               </a:defRPr>
             </a:pPr>
             <a:r>
+              <a:rPr/>
               <a:t>🥉 【模組D】破除分心班級經營 (8票 / 42%)</a:t>
             </a:r>
           </a:p>
@@ -5106,6 +5164,7 @@
               </a:defRPr>
             </a:pPr>
             <a:r>
+              <a:rPr/>
               <a:t>螢幕反轉法與免登入快速常規，把時間還給學生對話！</a:t>
             </a:r>
           </a:p>
@@ -5208,6 +5267,7 @@
               </a:defRPr>
             </a:pPr>
             <a:r>
+              <a:rPr/>
               <a:t>學習共同體輔導團・2小時到校輔導教案</a:t>
             </a:r>
           </a:p>
@@ -5221,6 +5281,7 @@
               </a:defRPr>
             </a:pPr>
             <a:r>
+              <a:rPr/>
               <a:t>課程指導心法：二橋專屬破局三策</a:t>
             </a:r>
           </a:p>
@@ -5329,6 +5390,7 @@
               </a:defRPr>
             </a:pPr>
             <a:r>
+              <a:rPr/>
               <a:t>策略一：常規先行</a:t>
             </a:r>
           </a:p>
@@ -5345,6 +5407,7 @@
               </a:defRPr>
             </a:pPr>
             <a:r>
+              <a:rPr/>
               <a:t>守護實體傾聽</a:t>
             </a:r>
           </a:p>
@@ -5361,6 +5424,7 @@
               </a:defRPr>
             </a:pPr>
             <a:r>
+              <a:rPr/>
               <a:t>• 實踐『三秒蓋板 / 螢幕反轉』：發言時眼看同伴，載具平放。</a:t>
             </a:r>
           </a:p>
@@ -5377,6 +5441,7 @@
               </a:defRPr>
             </a:pPr>
             <a:r>
+              <a:rPr/>
               <a:t>• 免帳號極速入場：QR-Code 一掃即進，登入由 10分鐘壓到 30秒。</a:t>
             </a:r>
           </a:p>
@@ -5393,6 +5458,7 @@
               </a:defRPr>
             </a:pPr>
             <a:r>
+              <a:rPr/>
               <a:t>• 平板是『思維筆記本』，守護課堂溫潤眼神對話。</a:t>
             </a:r>
           </a:p>
@@ -5477,6 +5543,7 @@
               </a:defRPr>
             </a:pPr>
             <a:r>
+              <a:rPr/>
               <a:t>策略二：善用 86吋大屏</a:t>
             </a:r>
           </a:p>
@@ -5493,6 +5560,7 @@
               </a:defRPr>
             </a:pPr>
             <a:r>
+              <a:rPr/>
               <a:t>告別個別孤島</a:t>
             </a:r>
           </a:p>
@@ -5509,6 +5577,7 @@
               </a:defRPr>
             </a:pPr>
             <a:r>
+              <a:rPr/>
               <a:t>• 不推生生用平板各自孤立，改以 4人一組共用 1 載具共學。</a:t>
             </a:r>
           </a:p>
@@ -5525,6 +5594,7 @@
               </a:defRPr>
             </a:pPr>
             <a:r>
+              <a:rPr/>
               <a:t>• 各組多元解法一秒推播至黑板 86 吋觸控大螢幕。</a:t>
             </a:r>
           </a:p>
@@ -5541,6 +5611,7 @@
               </a:defRPr>
             </a:pPr>
             <a:r>
+              <a:rPr/>
               <a:t>• 教師在大屏圈選、對比，促發全班高階共構對話。</a:t>
             </a:r>
           </a:p>
@@ -5625,6 +5696,7 @@
               </a:defRPr>
             </a:pPr>
             <a:r>
+              <a:rPr/>
               <a:t>策略三：AI 命題跳躍題</a:t>
             </a:r>
           </a:p>
@@ -5641,6 +5713,7 @@
               </a:defRPr>
             </a:pPr>
             <a:r>
+              <a:rPr/>
               <a:t>突破 2.68分信心瓶頸</a:t>
             </a:r>
           </a:p>
@@ -5657,6 +5730,7 @@
               </a:defRPr>
             </a:pPr>
             <a:r>
+              <a:rPr/>
               <a:t>• 課本單元丟給 AI，3分鐘解構文本三層次思維。</a:t>
             </a:r>
           </a:p>
@@ -5673,6 +5747,7 @@
               </a:defRPr>
             </a:pPr>
             <a:r>
+              <a:rPr/>
               <a:t>• 產出具備認知衝突的『伸展跳躍任務 (Jumping Task)』。</a:t>
             </a:r>
           </a:p>
@@ -5689,6 +5764,7 @@
               </a:defRPr>
             </a:pPr>
             <a:r>
+              <a:rPr/>
               <a:t>• 研習現場實作，每位老師帶走下週立即可用的教案！</a:t>
             </a:r>
           </a:p>
@@ -5791,6 +5867,7 @@
               </a:defRPr>
             </a:pPr>
             <a:r>
+              <a:rPr/>
               <a:t>學習共同體輔導團・2小時到校輔導教案</a:t>
             </a:r>
           </a:p>
@@ -5804,6 +5881,7 @@
               </a:defRPr>
             </a:pPr>
             <a:r>
+              <a:rPr/>
               <a:t>2小時工作坊教案流程總覽（起承轉合）</a:t>
             </a:r>
           </a:p>
@@ -6185,7 +6263,7 @@
                     </a:p>
                     <a:p>
                       <a:r>
-                        <a:t>破除學生分心</a:t>
+                        <a:t>破除載具分心</a:t>
                       </a:r>
                     </a:p>
                   </a:txBody>
@@ -6661,6 +6739,7 @@
               </a:defRPr>
             </a:pPr>
             <a:r>
+              <a:rPr/>
               <a:t>學習共同體輔導團・2小時到校輔導教案</a:t>
             </a:r>
           </a:p>
@@ -6674,6 +6753,7 @@
               </a:defRPr>
             </a:pPr>
             <a:r>
+              <a:rPr/>
               <a:t>模組 D 落地實務：破除分心與學共載具常規</a:t>
             </a:r>
           </a:p>
@@ -6782,6 +6862,7 @@
               </a:defRPr>
             </a:pPr>
             <a:r>
+              <a:rPr/>
               <a:t>一、 根絕『耗時15分鐘』的極速登入常規</a:t>
             </a:r>
           </a:p>
@@ -6798,6 +6879,7 @@
               </a:defRPr>
             </a:pPr>
             <a:r>
+              <a:rPr/>
               <a:t>• 傳統痛點：學生忘記帳號密碼、大小寫分不清，搞登入消耗半堂課！</a:t>
             </a:r>
           </a:p>
@@ -6814,6 +6896,7 @@
               </a:defRPr>
             </a:pPr>
             <a:r>
+              <a:rPr/>
               <a:t>• 解決對策：全面採用『零登入 / 免帳號 QR-Code』與短網址代碼直達。</a:t>
             </a:r>
           </a:p>
@@ -6830,6 +6913,7 @@
               </a:defRPr>
             </a:pPr>
             <a:r>
+              <a:rPr/>
               <a:t>• 課堂成效：開機掃描 30 秒進入討論情境，把完整時間還給學生深度對話！</a:t>
             </a:r>
           </a:p>
@@ -6914,6 +6998,7 @@
               </a:defRPr>
             </a:pPr>
             <a:r>
+              <a:rPr/>
               <a:t>二、 守護眼神與語言的『三秒蓋板三步驟』</a:t>
             </a:r>
           </a:p>
@@ -6930,6 +7015,7 @@
               </a:defRPr>
             </a:pPr>
             <a:r>
+              <a:rPr/>
               <a:t>• 步驟 1【倒數指令】：口令『3、2、1，螢幕蓋板』，全班動作一致。</a:t>
             </a:r>
           </a:p>
@@ -6946,6 +7032,7 @@
               </a:defRPr>
             </a:pPr>
             <a:r>
+              <a:rPr/>
               <a:t>• 步驟 2【姿態重置】：平板面朝下平放桌角，雙手自然置於桌面，停止滑動。</a:t>
             </a:r>
           </a:p>
@@ -6962,6 +7049,7 @@
               </a:defRPr>
             </a:pPr>
             <a:r>
+              <a:rPr/>
               <a:t>• 步驟 3【視線聚焦】：雙眼抬起注視發言夥伴，啟動高專注實體傾聽關係。</a:t>
             </a:r>
           </a:p>
@@ -7046,6 +7134,7 @@
               </a:defRPr>
             </a:pPr>
             <a:r>
+              <a:rPr/>
               <a:t>三、 低年級學童的『防卡關三法寶』</a:t>
             </a:r>
           </a:p>
@@ -7062,6 +7151,7 @@
               </a:defRPr>
             </a:pPr>
             <a:r>
+              <a:rPr/>
               <a:t>• 法寶 1【顏色組別平板】：背貼大面積紅/藍/黃/綠標籤，依組領取不分個人機。</a:t>
             </a:r>
           </a:p>
@@ -7078,6 +7168,7 @@
               </a:defRPr>
             </a:pPr>
             <a:r>
+              <a:rPr/>
               <a:t>• 法寶 2【免注音打字】：引導學生按下麥克風語音輸入，或拍下小白板實體操作。</a:t>
             </a:r>
           </a:p>
@@ -7094,6 +7185,7 @@
               </a:defRPr>
             </a:pPr>
             <a:r>
+              <a:rPr/>
               <a:t>• 法寶 3【單一桌面捷徑】：桌面僅留一個當日任務網頁捷徑，點開直接開始。</a:t>
             </a:r>
           </a:p>
@@ -7196,6 +7288,7 @@
               </a:defRPr>
             </a:pPr>
             <a:r>
+              <a:rPr/>
               <a:t>學習共同體輔導團・2小時到校輔導教案</a:t>
             </a:r>
           </a:p>
@@ -7209,6 +7302,7 @@
               </a:defRPr>
             </a:pPr>
             <a:r>
+              <a:rPr/>
               <a:t>模組 B 落地實務：Padlet 小組共學與 86吋大屏共構</a:t>
             </a:r>
           </a:p>
@@ -7317,6 +7411,7 @@
               </a:defRPr>
             </a:pPr>
             <a:r>
+              <a:rPr/>
               <a:t>📱 小組輕量共學：4人共用 1 載具</a:t>
             </a:r>
           </a:p>
@@ -7333,6 +7428,7 @@
               </a:defRPr>
             </a:pPr>
             <a:r>
+              <a:rPr/>
               <a:t>為什麼不推生生用平板？</a:t>
             </a:r>
           </a:p>
@@ -7349,6 +7445,7 @@
               </a:defRPr>
             </a:pPr>
             <a:r>
+              <a:rPr/>
               <a:t>人手一台容易陷入『各自孤島』，各滑各的，完全沒有真正的傾聽與對話！</a:t>
             </a:r>
           </a:p>
@@ -7365,6 +7462,7 @@
               </a:defRPr>
             </a:pPr>
             <a:r>
+              <a:rPr/>
               <a:t>4人共用 1 載具的協作魔力：</a:t>
             </a:r>
           </a:p>
@@ -7381,7 +7479,8 @@
               </a:defRPr>
             </a:pPr>
             <a:r>
-              <a:t>• 角色輪替：1 人負責操作記錄，其餘 3 人專注發想、檢核與質疑討論。</a:t>
+              <a:rPr/>
+              <a:t>• 角色輪替：1 人負責記錄，其餘 3 人專注發想、檢核與質疑討論。</a:t>
             </a:r>
           </a:p>
           <a:p>
@@ -7397,6 +7496,7 @@
               </a:defRPr>
             </a:pPr>
             <a:r>
+              <a:rPr/>
               <a:t>• 實體對話先行：組內必須先達成共識，才能由記錄者打字或拍照上傳。</a:t>
             </a:r>
           </a:p>
@@ -7413,6 +7513,7 @@
               </a:defRPr>
             </a:pPr>
             <a:r>
+              <a:rPr/>
               <a:t>• Padlet 零門檻張貼：小組將解法卡、疑惑卡一鍵張貼，隨時回溯思考軌跡。</a:t>
             </a:r>
           </a:p>
@@ -7497,6 +7598,7 @@
               </a:defRPr>
             </a:pPr>
             <a:r>
+              <a:rPr/>
               <a:t>🖥️ 86吋觸控大螢幕：思維可視化共構</a:t>
             </a:r>
           </a:p>
@@ -7513,6 +7615,7 @@
               </a:defRPr>
             </a:pPr>
             <a:r>
+              <a:rPr/>
               <a:t>全校 100% 內建大螢幕的最強戰術：</a:t>
             </a:r>
           </a:p>
@@ -7529,6 +7632,7 @@
               </a:defRPr>
             </a:pPr>
             <a:r>
+              <a:rPr/>
               <a:t>• 全班想法並列：大螢幕同時並列各組思考路徑，告別單組輪流報的枯燥。</a:t>
             </a:r>
           </a:p>
@@ -7545,6 +7649,7 @@
               </a:defRPr>
             </a:pPr>
             <a:r>
+              <a:rPr/>
               <a:t>• 觸控筆畫圈連線：教師與學生走上講台，直接在大屏圈出亮點與矛盾。</a:t>
             </a:r>
           </a:p>
@@ -7561,6 +7666,7 @@
               </a:defRPr>
             </a:pPr>
             <a:r>
+              <a:rPr/>
               <a:t>• 促發全班對話：『第 2 組和第 4 組有什麼不同？誰能看懂他們的想法？』</a:t>
             </a:r>
           </a:p>
@@ -7577,6 +7683,7 @@
               </a:defRPr>
             </a:pPr>
             <a:r>
+              <a:rPr/>
               <a:t>• 從作業升華為共構：大螢幕不是投影機，而是全班共同探究的大黑板！</a:t>
             </a:r>
           </a:p>
@@ -7679,6 +7786,7 @@
               </a:defRPr>
             </a:pPr>
             <a:r>
+              <a:rPr/>
               <a:t>學習共同體輔導團・2小時到校輔導教案</a:t>
             </a:r>
           </a:p>
@@ -7692,6 +7800,7 @@
               </a:defRPr>
             </a:pPr>
             <a:r>
+              <a:rPr/>
               <a:t>模組 A 落地實務：AI Agent 命製學共伸展跳躍任務</a:t>
             </a:r>
           </a:p>
@@ -7800,6 +7909,7 @@
               </a:defRPr>
             </a:pPr>
             <a:r>
+              <a:rPr/>
               <a:t>層次一：基礎提取題 (30%)</a:t>
             </a:r>
           </a:p>
@@ -7816,6 +7926,7 @@
               </a:defRPr>
             </a:pPr>
             <a:r>
+              <a:rPr/>
               <a:t>掌握課本事實、核心定義或基本算則。</a:t>
             </a:r>
           </a:p>
@@ -7832,6 +7943,7 @@
               </a:defRPr>
             </a:pPr>
             <a:r>
+              <a:rPr/>
               <a:t>• 例：主角遇到什麼困境？這題條件是什麼？</a:t>
             </a:r>
           </a:p>
@@ -7916,6 +8028,7 @@
               </a:defRPr>
             </a:pPr>
             <a:r>
+              <a:rPr/>
               <a:t>層次二：推論統整題 (60%)</a:t>
             </a:r>
           </a:p>
@@ -7932,6 +8045,7 @@
               </a:defRPr>
             </a:pPr>
             <a:r>
+              <a:rPr/>
               <a:t>小組互學探究因果關係與多元解法。</a:t>
             </a:r>
           </a:p>
@@ -7948,7 +8062,8 @@
               </a:defRPr>
             </a:pPr>
             <a:r>
-              <a:t>• 例：為什麼做此選擇？這兩種算式本質同嗎？</a:t>
+              <a:rPr/>
+              <a:t>• 例：為什麼做此選擇？兩種算式本質同嗎？</a:t>
             </a:r>
           </a:p>
         </p:txBody>
@@ -8032,6 +8147,7 @@
               </a:defRPr>
             </a:pPr>
             <a:r>
+              <a:rPr/>
               <a:t>層次三：伸展跳躍題 (100% Jumping Task)</a:t>
             </a:r>
           </a:p>
@@ -8048,7 +8164,8 @@
               </a:defRPr>
             </a:pPr>
             <a:r>
-              <a:t>高認知挑戰、開放思考、促發同儕相互借力！</a:t>
+              <a:rPr/>
+              <a:t>高認知挑戰、開放思考、促發同儕借力！</a:t>
             </a:r>
           </a:p>
           <a:p>
@@ -8064,6 +8181,7 @@
               </a:defRPr>
             </a:pPr>
             <a:r>
+              <a:rPr/>
               <a:t>• 例：如果結局翻轉，如何改寫？有何生活模型？</a:t>
             </a:r>
           </a:p>
@@ -8148,6 +8266,7 @@
               </a:defRPr>
             </a:pPr>
             <a:r>
+              <a:rPr/>
               <a:t>🪄 現場實作：二橋專屬 AI 跳躍任務命題咒語（複製貼上 Gemini / ChatGPT）</a:t>
             </a:r>
           </a:p>
@@ -8164,6 +8283,7 @@
               </a:defRPr>
             </a:pPr>
             <a:r>
+              <a:rPr/>
               <a:t>你是一位專精日本佐藤學『學習共同體』教學法的國小教材研發專家。</a:t>
             </a:r>
           </a:p>
@@ -8180,6 +8300,7 @@
               </a:defRPr>
             </a:pPr>
             <a:r>
+              <a:rPr/>
               <a:t>我目前要教授［科目/年級/單元名稱］，課本段落或核心概念如下：［貼上課文或概念］。</a:t>
             </a:r>
           </a:p>
@@ -8196,6 +8317,7 @@
               </a:defRPr>
             </a:pPr>
             <a:r>
+              <a:rPr/>
               <a:t>請為我設計：</a:t>
             </a:r>
           </a:p>
@@ -8212,6 +8334,7 @@
               </a:defRPr>
             </a:pPr>
             <a:r>
+              <a:rPr/>
               <a:t>1. 2 題小組共學互學探究題（促發學生提出不同觀察角度與深層對話）。</a:t>
             </a:r>
           </a:p>
@@ -8228,6 +8351,7 @@
               </a:defRPr>
             </a:pPr>
             <a:r>
+              <a:rPr/>
               <a:t>2. 1 題高挑戰度的『伸展跳躍任務 (Jumping Task)』（具備認知衝突、開放思考、非單一標準答案）。</a:t>
             </a:r>
           </a:p>
@@ -8244,6 +8368,7 @@
               </a:defRPr>
             </a:pPr>
             <a:r>
+              <a:rPr/>
               <a:t>3. 針對跳躍任務，提供老師 3 個課堂引導與追問的理答支架提問。</a:t>
             </a:r>
           </a:p>
@@ -8346,6 +8471,7 @@
               </a:defRPr>
             </a:pPr>
             <a:r>
+              <a:rPr/>
               <a:t>學習共同體輔導團・2小時到校輔導教案</a:t>
             </a:r>
           </a:p>
@@ -8359,6 +8485,7 @@
               </a:defRPr>
             </a:pPr>
             <a:r>
+              <a:rPr/>
               <a:t>二橋個別提問現場破解：低年級不卡關與互動小遊戲</a:t>
             </a:r>
           </a:p>
@@ -8464,6 +8591,7 @@
               </a:defRPr>
             </a:pPr>
             <a:r>
+              <a:rPr/>
               <a:t>❓ 低年級老師提問：</a:t>
             </a:r>
           </a:p>
@@ -8480,6 +8608,7 @@
               </a:defRPr>
             </a:pPr>
             <a:r>
+              <a:rPr/>
               <a:t>「低年級學生如何快速上手不卡關？」</a:t>
             </a:r>
           </a:p>
@@ -8496,6 +8625,7 @@
               </a:defRPr>
             </a:pPr>
             <a:r>
+              <a:rPr/>
               <a:t>💡 輔導團三階落地解方：</a:t>
             </a:r>
           </a:p>
@@ -8512,6 +8642,7 @@
               </a:defRPr>
             </a:pPr>
             <a:r>
+              <a:rPr/>
               <a:t>1. 【取消個人帳密】低年級不記帳號！每組 1 台貼顏色標籤的公用平板，掃 QR-code 直接進任務畫面。</a:t>
             </a:r>
           </a:p>
@@ -8528,6 +8659,7 @@
               </a:defRPr>
             </a:pPr>
             <a:r>
+              <a:rPr/>
               <a:t>2. 【語音輸入代替打字】學生按麥克風說話自動轉文字，識字量少也能暢所欲言表達思維。</a:t>
             </a:r>
           </a:p>
@@ -8544,6 +8676,7 @@
               </a:defRPr>
             </a:pPr>
             <a:r>
+              <a:rPr/>
               <a:t>3. 【拍照代替複雜操作】實體積木、小白板擺好後，小組『按拍照鍵』直接上傳，3 秒完成記錄！</a:t>
             </a:r>
           </a:p>
@@ -8625,6 +8758,7 @@
               </a:defRPr>
             </a:pPr>
             <a:r>
+              <a:rPr/>
               <a:t>❓ 科任/資深老師提問：</a:t>
             </a:r>
           </a:p>
@@ -8641,6 +8775,7 @@
               </a:defRPr>
             </a:pPr>
             <a:r>
+              <a:rPr/>
               <a:t>「如何設計互動小遊戲且不耗費許多時間？」</a:t>
             </a:r>
           </a:p>
@@ -8657,6 +8792,7 @@
               </a:defRPr>
             </a:pPr>
             <a:r>
+              <a:rPr/>
               <a:t>💡 輔導團三階落地解方：</a:t>
             </a:r>
           </a:p>
@@ -8673,6 +8809,7 @@
               </a:defRPr>
             </a:pPr>
             <a:r>
+              <a:rPr/>
               <a:t>1. 【AI 餵料 1 分鐘生題庫】將課本貼給 Gemini：『產生 5 題四選一選擇題』，複製直接匯入 Wordwall。</a:t>
             </a:r>
           </a:p>
@@ -8689,6 +8826,7 @@
               </a:defRPr>
             </a:pPr>
             <a:r>
+              <a:rPr/>
               <a:t>2. 【Wordwall 一鍵換造型】貼入一次題目，系統自動切換打地鼠、輪盤、連連看，免重複備課！</a:t>
             </a:r>
           </a:p>
@@ -8705,6 +8843,7 @@
               </a:defRPr>
             </a:pPr>
             <a:r>
+              <a:rPr/>
               <a:t>3. 【86吋大螢幕雙人擂台】免發平板！兩位學生直接上台在大螢幕觸控搶答，全班同步觀戰思辨！</a:t>
             </a:r>
           </a:p>
